--- a/Projetos Gsena Tec/oceo/apresentacao/OCEO - A Obra Completa (apresentacao).pptx
+++ b/Projetos Gsena Tec/oceo/apresentacao/OCEO - A Obra Completa (apresentacao).pptx
@@ -3498,33 +3498,9 @@
           </a:p>
         </p:txBody>
       </p:sp>
-      <p:pic>
-        <p:nvPicPr>
-          <p:cNvPr id="3" name="Picture 2" descr="LOGO-OCEO-mark.png"/>
-          <p:cNvPicPr>
-            <a:picLocks noChangeAspect="1"/>
-          </p:cNvPicPr>
-          <p:nvPr/>
-        </p:nvPicPr>
-        <p:blipFill>
-          <a:blip r:embed="rId2"/>
-          <a:stretch>
-            <a:fillRect/>
-          </a:stretch>
-        </p:blipFill>
-        <p:spPr>
-          <a:xfrm>
-            <a:off x="10637215" y="457200"/>
-            <a:ext cx="1051560" cy="954471"/>
-          </a:xfrm>
-          <a:prstGeom prst="rect">
-            <a:avLst/>
-          </a:prstGeom>
-        </p:spPr>
-      </p:pic>
-      <p:sp>
-        <p:nvSpPr>
-          <p:cNvPr id="4" name="Rectangle 3"/>
+      <p:sp>
+        <p:nvSpPr>
+          <p:cNvPr id="3" name="Rectangle 2"/>
           <p:cNvSpPr/>
           <p:nvPr/>
         </p:nvSpPr>
@@ -3568,7 +3544,7 @@
       </p:sp>
       <p:sp>
         <p:nvSpPr>
-          <p:cNvPr id="5" name="TextBox 4"/>
+          <p:cNvPr id="4" name="TextBox 3"/>
           <p:cNvSpPr txBox="1"/>
           <p:nvPr/>
         </p:nvSpPr>
@@ -3618,7 +3594,7 @@
       </p:sp>
       <p:sp>
         <p:nvSpPr>
-          <p:cNvPr id="6" name="Rectangle 5"/>
+          <p:cNvPr id="5" name="Rectangle 4"/>
           <p:cNvSpPr/>
           <p:nvPr/>
         </p:nvSpPr>
@@ -3662,7 +3638,7 @@
       </p:sp>
       <p:graphicFrame>
         <p:nvGraphicFramePr>
-          <p:cNvPr id="7" name="Table 6"/>
+          <p:cNvPr id="6" name="Table 5"/>
           <p:cNvGraphicFramePr>
             <a:graphicFrameLocks noGrp="1"/>
           </p:cNvGraphicFramePr>
@@ -4251,7 +4227,7 @@
                       </p:stCondLst>
                       <p:childTnLst>
                         <p:par>
-                          <p:cTn id="8" presetID="23" presetClass="entr" presetSubtype="16" fill="hold" grpId="0" nodeType="afterEffect">
+                          <p:cTn id="6" presetID="10" presetClass="entr" presetSubtype="0" fill="hold" grpId="0" nodeType="afterEffect">
                             <p:stCondLst>
                               <p:cond delay="0"/>
                             </p:stCondLst>
@@ -4264,88 +4240,7 @@
                                     </p:stCondLst>
                                   </p:cTn>
                                   <p:tgtEl>
-                                    <p:spTgt spid="3"/>
-                                  </p:tgtEl>
-                                  <p:attrNameLst>
-                                    <p:attrName>style.visibility</p:attrName>
-                                  </p:attrNameLst>
-                                </p:cBhvr>
-                                <p:to>
-                                  <p:strVal val="visible"/>
-                                </p:to>
-                              </p:set>
-                              <p:anim calcmode="lin" valueType="num">
-                                <p:cBhvr additive="base">
-                                  <p:cTn id="5" dur="600" fill="hold"/>
-                                  <p:tgtEl>
-                                    <p:spTgt spid="3"/>
-                                  </p:tgtEl>
-                                  <p:attrNameLst>
-                                    <p:attrName>ppt_w</p:attrName>
-                                  </p:attrNameLst>
-                                </p:cBhvr>
-                                <p:tavLst>
-                                  <p:tav tm="0">
-                                    <p:val>
-                                      <p:fltVal val="0.3"/>
-                                    </p:val>
-                                  </p:tav>
-                                  <p:tav tm="100000">
-                                    <p:val>
-                                      <p:fltVal val="1"/>
-                                    </p:val>
-                                  </p:tav>
-                                </p:tavLst>
-                              </p:anim>
-                              <p:anim calcmode="lin" valueType="num">
-                                <p:cBhvr additive="base">
-                                  <p:cTn id="6" dur="600" fill="hold"/>
-                                  <p:tgtEl>
-                                    <p:spTgt spid="3"/>
-                                  </p:tgtEl>
-                                  <p:attrNameLst>
-                                    <p:attrName>ppt_h</p:attrName>
-                                  </p:attrNameLst>
-                                </p:cBhvr>
-                                <p:tavLst>
-                                  <p:tav tm="0">
-                                    <p:val>
-                                      <p:fltVal val="0.3"/>
-                                    </p:val>
-                                  </p:tav>
-                                  <p:tav tm="100000">
-                                    <p:val>
-                                      <p:fltVal val="1"/>
-                                    </p:val>
-                                  </p:tav>
-                                </p:tavLst>
-                              </p:anim>
-                              <p:animEffect transition="in" filter="fade">
-                                <p:cBhvr>
-                                  <p:cTn id="7" dur="600"/>
-                                  <p:tgtEl>
-                                    <p:spTgt spid="3"/>
-                                  </p:tgtEl>
-                                </p:cBhvr>
-                              </p:animEffect>
-                            </p:childTnLst>
-                          </p:cTn>
-                        </p:par>
-                        <p:par>
-                          <p:cTn id="11" presetID="10" presetClass="entr" presetSubtype="0" fill="hold" grpId="0" nodeType="afterEffect">
-                            <p:stCondLst>
-                              <p:cond delay="350"/>
-                            </p:stCondLst>
-                            <p:childTnLst>
-                              <p:set>
-                                <p:cBhvr>
-                                  <p:cTn id="9" dur="1" fill="hold">
-                                    <p:stCondLst>
-                                      <p:cond delay="0"/>
-                                    </p:stCondLst>
-                                  </p:cTn>
-                                  <p:tgtEl>
-                                    <p:spTgt spid="5"/>
+                                    <p:spTgt spid="4"/>
                                   </p:tgtEl>
                                   <p:attrNameLst>
                                     <p:attrName>style.visibility</p:attrName>
@@ -4357,9 +4252,9 @@
                               </p:set>
                               <p:animEffect transition="in" filter="fade">
                                 <p:cBhvr>
-                                  <p:cTn id="10" dur="400"/>
+                                  <p:cTn id="5" dur="400"/>
                                   <p:tgtEl>
-                                    <p:spTgt spid="5"/>
+                                    <p:spTgt spid="4"/>
                                   </p:tgtEl>
                                 </p:cBhvr>
                               </p:animEffect>
@@ -4367,20 +4262,20 @@
                           </p:cTn>
                         </p:par>
                         <p:par>
-                          <p:cTn id="14" presetID="10" presetClass="entr" presetSubtype="0" fill="hold" grpId="0" nodeType="afterEffect">
+                          <p:cTn id="9" presetID="10" presetClass="entr" presetSubtype="0" fill="hold" grpId="0" nodeType="afterEffect">
                             <p:stCondLst>
-                              <p:cond delay="600"/>
+                              <p:cond delay="250"/>
                             </p:stCondLst>
                             <p:childTnLst>
                               <p:set>
                                 <p:cBhvr>
-                                  <p:cTn id="12" dur="1" fill="hold">
+                                  <p:cTn id="7" dur="1" fill="hold">
                                     <p:stCondLst>
                                       <p:cond delay="0"/>
                                     </p:stCondLst>
                                   </p:cTn>
                                   <p:tgtEl>
-                                    <p:spTgt spid="7"/>
+                                    <p:spTgt spid="6"/>
                                   </p:tgtEl>
                                   <p:attrNameLst>
                                     <p:attrName>style.visibility</p:attrName>
@@ -4392,9 +4287,9 @@
                               </p:set>
                               <p:animEffect transition="in" filter="fade">
                                 <p:cBhvr>
-                                  <p:cTn id="13" dur="400"/>
+                                  <p:cTn id="8" dur="400"/>
                                   <p:tgtEl>
-                                    <p:spTgt spid="7"/>
+                                    <p:spTgt spid="6"/>
                                   </p:tgtEl>
                                 </p:cBhvr>
                               </p:animEffect>
@@ -4483,33 +4378,9 @@
           </a:p>
         </p:txBody>
       </p:sp>
-      <p:pic>
-        <p:nvPicPr>
-          <p:cNvPr id="3" name="Picture 2" descr="LOGO-OCEO-mark.png"/>
-          <p:cNvPicPr>
-            <a:picLocks noChangeAspect="1"/>
-          </p:cNvPicPr>
-          <p:nvPr/>
-        </p:nvPicPr>
-        <p:blipFill>
-          <a:blip r:embed="rId2"/>
-          <a:stretch>
-            <a:fillRect/>
-          </a:stretch>
-        </p:blipFill>
-        <p:spPr>
-          <a:xfrm>
-            <a:off x="10637215" y="457200"/>
-            <a:ext cx="1051560" cy="954471"/>
-          </a:xfrm>
-          <a:prstGeom prst="rect">
-            <a:avLst/>
-          </a:prstGeom>
-        </p:spPr>
-      </p:pic>
-      <p:sp>
-        <p:nvSpPr>
-          <p:cNvPr id="4" name="Rectangle 3"/>
+      <p:sp>
+        <p:nvSpPr>
+          <p:cNvPr id="3" name="Rectangle 2"/>
           <p:cNvSpPr/>
           <p:nvPr/>
         </p:nvSpPr>
@@ -4553,7 +4424,7 @@
       </p:sp>
       <p:sp>
         <p:nvSpPr>
-          <p:cNvPr id="5" name="TextBox 4"/>
+          <p:cNvPr id="4" name="TextBox 3"/>
           <p:cNvSpPr txBox="1"/>
           <p:nvPr/>
         </p:nvSpPr>
@@ -4603,7 +4474,7 @@
       </p:sp>
       <p:sp>
         <p:nvSpPr>
-          <p:cNvPr id="6" name="Rectangle 5"/>
+          <p:cNvPr id="5" name="Rectangle 4"/>
           <p:cNvSpPr/>
           <p:nvPr/>
         </p:nvSpPr>
@@ -4647,7 +4518,7 @@
       </p:sp>
       <p:sp>
         <p:nvSpPr>
-          <p:cNvPr id="7" name="TextBox 6"/>
+          <p:cNvPr id="6" name="TextBox 5"/>
           <p:cNvSpPr txBox="1"/>
           <p:nvPr/>
         </p:nvSpPr>
@@ -4847,7 +4718,7 @@
                       </p:stCondLst>
                       <p:childTnLst>
                         <p:par>
-                          <p:cTn id="8" presetID="23" presetClass="entr" presetSubtype="16" fill="hold" grpId="0" nodeType="afterEffect">
+                          <p:cTn id="6" presetID="10" presetClass="entr" presetSubtype="0" fill="hold" grpId="0" nodeType="afterEffect">
                             <p:stCondLst>
                               <p:cond delay="0"/>
                             </p:stCondLst>
@@ -4860,88 +4731,7 @@
                                     </p:stCondLst>
                                   </p:cTn>
                                   <p:tgtEl>
-                                    <p:spTgt spid="3"/>
-                                  </p:tgtEl>
-                                  <p:attrNameLst>
-                                    <p:attrName>style.visibility</p:attrName>
-                                  </p:attrNameLst>
-                                </p:cBhvr>
-                                <p:to>
-                                  <p:strVal val="visible"/>
-                                </p:to>
-                              </p:set>
-                              <p:anim calcmode="lin" valueType="num">
-                                <p:cBhvr additive="base">
-                                  <p:cTn id="5" dur="600" fill="hold"/>
-                                  <p:tgtEl>
-                                    <p:spTgt spid="3"/>
-                                  </p:tgtEl>
-                                  <p:attrNameLst>
-                                    <p:attrName>ppt_w</p:attrName>
-                                  </p:attrNameLst>
-                                </p:cBhvr>
-                                <p:tavLst>
-                                  <p:tav tm="0">
-                                    <p:val>
-                                      <p:fltVal val="0.3"/>
-                                    </p:val>
-                                  </p:tav>
-                                  <p:tav tm="100000">
-                                    <p:val>
-                                      <p:fltVal val="1"/>
-                                    </p:val>
-                                  </p:tav>
-                                </p:tavLst>
-                              </p:anim>
-                              <p:anim calcmode="lin" valueType="num">
-                                <p:cBhvr additive="base">
-                                  <p:cTn id="6" dur="600" fill="hold"/>
-                                  <p:tgtEl>
-                                    <p:spTgt spid="3"/>
-                                  </p:tgtEl>
-                                  <p:attrNameLst>
-                                    <p:attrName>ppt_h</p:attrName>
-                                  </p:attrNameLst>
-                                </p:cBhvr>
-                                <p:tavLst>
-                                  <p:tav tm="0">
-                                    <p:val>
-                                      <p:fltVal val="0.3"/>
-                                    </p:val>
-                                  </p:tav>
-                                  <p:tav tm="100000">
-                                    <p:val>
-                                      <p:fltVal val="1"/>
-                                    </p:val>
-                                  </p:tav>
-                                </p:tavLst>
-                              </p:anim>
-                              <p:animEffect transition="in" filter="fade">
-                                <p:cBhvr>
-                                  <p:cTn id="7" dur="600"/>
-                                  <p:tgtEl>
-                                    <p:spTgt spid="3"/>
-                                  </p:tgtEl>
-                                </p:cBhvr>
-                              </p:animEffect>
-                            </p:childTnLst>
-                          </p:cTn>
-                        </p:par>
-                        <p:par>
-                          <p:cTn id="11" presetID="10" presetClass="entr" presetSubtype="0" fill="hold" grpId="0" nodeType="afterEffect">
-                            <p:stCondLst>
-                              <p:cond delay="350"/>
-                            </p:stCondLst>
-                            <p:childTnLst>
-                              <p:set>
-                                <p:cBhvr>
-                                  <p:cTn id="9" dur="1" fill="hold">
-                                    <p:stCondLst>
-                                      <p:cond delay="0"/>
-                                    </p:stCondLst>
-                                  </p:cTn>
-                                  <p:tgtEl>
-                                    <p:spTgt spid="5"/>
+                                    <p:spTgt spid="4"/>
                                   </p:tgtEl>
                                   <p:attrNameLst>
                                     <p:attrName>style.visibility</p:attrName>
@@ -4953,9 +4743,9 @@
                               </p:set>
                               <p:animEffect transition="in" filter="fade">
                                 <p:cBhvr>
-                                  <p:cTn id="10" dur="400"/>
+                                  <p:cTn id="5" dur="400"/>
                                   <p:tgtEl>
-                                    <p:spTgt spid="5"/>
+                                    <p:spTgt spid="4"/>
                                   </p:tgtEl>
                                 </p:cBhvr>
                               </p:animEffect>
@@ -4963,20 +4753,20 @@
                           </p:cTn>
                         </p:par>
                         <p:par>
-                          <p:cTn id="14" presetID="10" presetClass="entr" presetSubtype="0" fill="hold" grpId="0" nodeType="afterEffect">
+                          <p:cTn id="9" presetID="10" presetClass="entr" presetSubtype="0" fill="hold" grpId="0" nodeType="afterEffect">
                             <p:stCondLst>
-                              <p:cond delay="600"/>
+                              <p:cond delay="250"/>
                             </p:stCondLst>
                             <p:childTnLst>
                               <p:set>
                                 <p:cBhvr>
-                                  <p:cTn id="12" dur="1" fill="hold">
+                                  <p:cTn id="7" dur="1" fill="hold">
                                     <p:stCondLst>
                                       <p:cond delay="0"/>
                                     </p:stCondLst>
                                   </p:cTn>
                                   <p:tgtEl>
-                                    <p:spTgt spid="7"/>
+                                    <p:spTgt spid="6"/>
                                   </p:tgtEl>
                                   <p:attrNameLst>
                                     <p:attrName>style.visibility</p:attrName>
@@ -4988,9 +4778,9 @@
                               </p:set>
                               <p:animEffect transition="in" filter="fade">
                                 <p:cBhvr>
-                                  <p:cTn id="13" dur="400"/>
+                                  <p:cTn id="8" dur="400"/>
                                   <p:tgtEl>
-                                    <p:spTgt spid="7"/>
+                                    <p:spTgt spid="6"/>
                                   </p:tgtEl>
                                 </p:cBhvr>
                               </p:animEffect>
@@ -5079,33 +4869,9 @@
           </a:p>
         </p:txBody>
       </p:sp>
-      <p:pic>
-        <p:nvPicPr>
-          <p:cNvPr id="3" name="Picture 2" descr="LOGO-OCEO-mark.png"/>
-          <p:cNvPicPr>
-            <a:picLocks noChangeAspect="1"/>
-          </p:cNvPicPr>
-          <p:nvPr/>
-        </p:nvPicPr>
-        <p:blipFill>
-          <a:blip r:embed="rId2"/>
-          <a:stretch>
-            <a:fillRect/>
-          </a:stretch>
-        </p:blipFill>
-        <p:spPr>
-          <a:xfrm>
-            <a:off x="10637215" y="457200"/>
-            <a:ext cx="1051560" cy="954471"/>
-          </a:xfrm>
-          <a:prstGeom prst="rect">
-            <a:avLst/>
-          </a:prstGeom>
-        </p:spPr>
-      </p:pic>
-      <p:sp>
-        <p:nvSpPr>
-          <p:cNvPr id="4" name="Rectangle 3"/>
+      <p:sp>
+        <p:nvSpPr>
+          <p:cNvPr id="3" name="Rectangle 2"/>
           <p:cNvSpPr/>
           <p:nvPr/>
         </p:nvSpPr>
@@ -5149,7 +4915,7 @@
       </p:sp>
       <p:sp>
         <p:nvSpPr>
-          <p:cNvPr id="5" name="TextBox 4"/>
+          <p:cNvPr id="4" name="TextBox 3"/>
           <p:cNvSpPr txBox="1"/>
           <p:nvPr/>
         </p:nvSpPr>
@@ -5199,7 +4965,7 @@
       </p:sp>
       <p:sp>
         <p:nvSpPr>
-          <p:cNvPr id="6" name="Rectangle 5"/>
+          <p:cNvPr id="5" name="Rectangle 4"/>
           <p:cNvSpPr/>
           <p:nvPr/>
         </p:nvSpPr>
@@ -5243,7 +5009,7 @@
       </p:sp>
       <p:sp>
         <p:nvSpPr>
-          <p:cNvPr id="7" name="TextBox 6"/>
+          <p:cNvPr id="6" name="TextBox 5"/>
           <p:cNvSpPr txBox="1"/>
           <p:nvPr/>
         </p:nvSpPr>
@@ -5427,7 +5193,7 @@
                       </p:stCondLst>
                       <p:childTnLst>
                         <p:par>
-                          <p:cTn id="8" presetID="23" presetClass="entr" presetSubtype="16" fill="hold" grpId="0" nodeType="afterEffect">
+                          <p:cTn id="6" presetID="10" presetClass="entr" presetSubtype="0" fill="hold" grpId="0" nodeType="afterEffect">
                             <p:stCondLst>
                               <p:cond delay="0"/>
                             </p:stCondLst>
@@ -5440,88 +5206,7 @@
                                     </p:stCondLst>
                                   </p:cTn>
                                   <p:tgtEl>
-                                    <p:spTgt spid="3"/>
-                                  </p:tgtEl>
-                                  <p:attrNameLst>
-                                    <p:attrName>style.visibility</p:attrName>
-                                  </p:attrNameLst>
-                                </p:cBhvr>
-                                <p:to>
-                                  <p:strVal val="visible"/>
-                                </p:to>
-                              </p:set>
-                              <p:anim calcmode="lin" valueType="num">
-                                <p:cBhvr additive="base">
-                                  <p:cTn id="5" dur="600" fill="hold"/>
-                                  <p:tgtEl>
-                                    <p:spTgt spid="3"/>
-                                  </p:tgtEl>
-                                  <p:attrNameLst>
-                                    <p:attrName>ppt_w</p:attrName>
-                                  </p:attrNameLst>
-                                </p:cBhvr>
-                                <p:tavLst>
-                                  <p:tav tm="0">
-                                    <p:val>
-                                      <p:fltVal val="0.3"/>
-                                    </p:val>
-                                  </p:tav>
-                                  <p:tav tm="100000">
-                                    <p:val>
-                                      <p:fltVal val="1"/>
-                                    </p:val>
-                                  </p:tav>
-                                </p:tavLst>
-                              </p:anim>
-                              <p:anim calcmode="lin" valueType="num">
-                                <p:cBhvr additive="base">
-                                  <p:cTn id="6" dur="600" fill="hold"/>
-                                  <p:tgtEl>
-                                    <p:spTgt spid="3"/>
-                                  </p:tgtEl>
-                                  <p:attrNameLst>
-                                    <p:attrName>ppt_h</p:attrName>
-                                  </p:attrNameLst>
-                                </p:cBhvr>
-                                <p:tavLst>
-                                  <p:tav tm="0">
-                                    <p:val>
-                                      <p:fltVal val="0.3"/>
-                                    </p:val>
-                                  </p:tav>
-                                  <p:tav tm="100000">
-                                    <p:val>
-                                      <p:fltVal val="1"/>
-                                    </p:val>
-                                  </p:tav>
-                                </p:tavLst>
-                              </p:anim>
-                              <p:animEffect transition="in" filter="fade">
-                                <p:cBhvr>
-                                  <p:cTn id="7" dur="600"/>
-                                  <p:tgtEl>
-                                    <p:spTgt spid="3"/>
-                                  </p:tgtEl>
-                                </p:cBhvr>
-                              </p:animEffect>
-                            </p:childTnLst>
-                          </p:cTn>
-                        </p:par>
-                        <p:par>
-                          <p:cTn id="11" presetID="10" presetClass="entr" presetSubtype="0" fill="hold" grpId="0" nodeType="afterEffect">
-                            <p:stCondLst>
-                              <p:cond delay="350"/>
-                            </p:stCondLst>
-                            <p:childTnLst>
-                              <p:set>
-                                <p:cBhvr>
-                                  <p:cTn id="9" dur="1" fill="hold">
-                                    <p:stCondLst>
-                                      <p:cond delay="0"/>
-                                    </p:stCondLst>
-                                  </p:cTn>
-                                  <p:tgtEl>
-                                    <p:spTgt spid="5"/>
+                                    <p:spTgt spid="4"/>
                                   </p:tgtEl>
                                   <p:attrNameLst>
                                     <p:attrName>style.visibility</p:attrName>
@@ -5533,9 +5218,9 @@
                               </p:set>
                               <p:animEffect transition="in" filter="fade">
                                 <p:cBhvr>
-                                  <p:cTn id="10" dur="400"/>
+                                  <p:cTn id="5" dur="400"/>
                                   <p:tgtEl>
-                                    <p:spTgt spid="5"/>
+                                    <p:spTgt spid="4"/>
                                   </p:tgtEl>
                                 </p:cBhvr>
                               </p:animEffect>
@@ -5543,20 +5228,20 @@
                           </p:cTn>
                         </p:par>
                         <p:par>
-                          <p:cTn id="14" presetID="10" presetClass="entr" presetSubtype="0" fill="hold" grpId="0" nodeType="afterEffect">
+                          <p:cTn id="9" presetID="10" presetClass="entr" presetSubtype="0" fill="hold" grpId="0" nodeType="afterEffect">
                             <p:stCondLst>
-                              <p:cond delay="600"/>
+                              <p:cond delay="250"/>
                             </p:stCondLst>
                             <p:childTnLst>
                               <p:set>
                                 <p:cBhvr>
-                                  <p:cTn id="12" dur="1" fill="hold">
+                                  <p:cTn id="7" dur="1" fill="hold">
                                     <p:stCondLst>
                                       <p:cond delay="0"/>
                                     </p:stCondLst>
                                   </p:cTn>
                                   <p:tgtEl>
-                                    <p:spTgt spid="7"/>
+                                    <p:spTgt spid="6"/>
                                   </p:tgtEl>
                                   <p:attrNameLst>
                                     <p:attrName>style.visibility</p:attrName>
@@ -5568,9 +5253,9 @@
                               </p:set>
                               <p:animEffect transition="in" filter="fade">
                                 <p:cBhvr>
-                                  <p:cTn id="13" dur="400"/>
+                                  <p:cTn id="8" dur="400"/>
                                   <p:tgtEl>
-                                    <p:spTgt spid="7"/>
+                                    <p:spTgt spid="6"/>
                                   </p:tgtEl>
                                 </p:cBhvr>
                               </p:animEffect>
@@ -5659,33 +5344,9 @@
           </a:p>
         </p:txBody>
       </p:sp>
-      <p:pic>
-        <p:nvPicPr>
-          <p:cNvPr id="3" name="Picture 2" descr="LOGO-OCEO-mark.png"/>
-          <p:cNvPicPr>
-            <a:picLocks noChangeAspect="1"/>
-          </p:cNvPicPr>
-          <p:nvPr/>
-        </p:nvPicPr>
-        <p:blipFill>
-          <a:blip r:embed="rId2"/>
-          <a:stretch>
-            <a:fillRect/>
-          </a:stretch>
-        </p:blipFill>
-        <p:spPr>
-          <a:xfrm>
-            <a:off x="10637215" y="457200"/>
-            <a:ext cx="1051560" cy="954471"/>
-          </a:xfrm>
-          <a:prstGeom prst="rect">
-            <a:avLst/>
-          </a:prstGeom>
-        </p:spPr>
-      </p:pic>
-      <p:sp>
-        <p:nvSpPr>
-          <p:cNvPr id="4" name="Rectangle 3"/>
+      <p:sp>
+        <p:nvSpPr>
+          <p:cNvPr id="3" name="Rectangle 2"/>
           <p:cNvSpPr/>
           <p:nvPr/>
         </p:nvSpPr>
@@ -5729,7 +5390,7 @@
       </p:sp>
       <p:sp>
         <p:nvSpPr>
-          <p:cNvPr id="5" name="TextBox 4"/>
+          <p:cNvPr id="4" name="TextBox 3"/>
           <p:cNvSpPr txBox="1"/>
           <p:nvPr/>
         </p:nvSpPr>
@@ -5779,7 +5440,7 @@
       </p:sp>
       <p:sp>
         <p:nvSpPr>
-          <p:cNvPr id="6" name="Rectangle 5"/>
+          <p:cNvPr id="5" name="Rectangle 4"/>
           <p:cNvSpPr/>
           <p:nvPr/>
         </p:nvSpPr>
@@ -5823,7 +5484,7 @@
       </p:sp>
       <p:sp>
         <p:nvSpPr>
-          <p:cNvPr id="7" name="TextBox 6"/>
+          <p:cNvPr id="6" name="TextBox 5"/>
           <p:cNvSpPr txBox="1"/>
           <p:nvPr/>
         </p:nvSpPr>
@@ -5979,7 +5640,7 @@
                       </p:stCondLst>
                       <p:childTnLst>
                         <p:par>
-                          <p:cTn id="8" presetID="23" presetClass="entr" presetSubtype="16" fill="hold" grpId="0" nodeType="afterEffect">
+                          <p:cTn id="6" presetID="10" presetClass="entr" presetSubtype="0" fill="hold" grpId="0" nodeType="afterEffect">
                             <p:stCondLst>
                               <p:cond delay="0"/>
                             </p:stCondLst>
@@ -5992,88 +5653,7 @@
                                     </p:stCondLst>
                                   </p:cTn>
                                   <p:tgtEl>
-                                    <p:spTgt spid="3"/>
-                                  </p:tgtEl>
-                                  <p:attrNameLst>
-                                    <p:attrName>style.visibility</p:attrName>
-                                  </p:attrNameLst>
-                                </p:cBhvr>
-                                <p:to>
-                                  <p:strVal val="visible"/>
-                                </p:to>
-                              </p:set>
-                              <p:anim calcmode="lin" valueType="num">
-                                <p:cBhvr additive="base">
-                                  <p:cTn id="5" dur="600" fill="hold"/>
-                                  <p:tgtEl>
-                                    <p:spTgt spid="3"/>
-                                  </p:tgtEl>
-                                  <p:attrNameLst>
-                                    <p:attrName>ppt_w</p:attrName>
-                                  </p:attrNameLst>
-                                </p:cBhvr>
-                                <p:tavLst>
-                                  <p:tav tm="0">
-                                    <p:val>
-                                      <p:fltVal val="0.3"/>
-                                    </p:val>
-                                  </p:tav>
-                                  <p:tav tm="100000">
-                                    <p:val>
-                                      <p:fltVal val="1"/>
-                                    </p:val>
-                                  </p:tav>
-                                </p:tavLst>
-                              </p:anim>
-                              <p:anim calcmode="lin" valueType="num">
-                                <p:cBhvr additive="base">
-                                  <p:cTn id="6" dur="600" fill="hold"/>
-                                  <p:tgtEl>
-                                    <p:spTgt spid="3"/>
-                                  </p:tgtEl>
-                                  <p:attrNameLst>
-                                    <p:attrName>ppt_h</p:attrName>
-                                  </p:attrNameLst>
-                                </p:cBhvr>
-                                <p:tavLst>
-                                  <p:tav tm="0">
-                                    <p:val>
-                                      <p:fltVal val="0.3"/>
-                                    </p:val>
-                                  </p:tav>
-                                  <p:tav tm="100000">
-                                    <p:val>
-                                      <p:fltVal val="1"/>
-                                    </p:val>
-                                  </p:tav>
-                                </p:tavLst>
-                              </p:anim>
-                              <p:animEffect transition="in" filter="fade">
-                                <p:cBhvr>
-                                  <p:cTn id="7" dur="600"/>
-                                  <p:tgtEl>
-                                    <p:spTgt spid="3"/>
-                                  </p:tgtEl>
-                                </p:cBhvr>
-                              </p:animEffect>
-                            </p:childTnLst>
-                          </p:cTn>
-                        </p:par>
-                        <p:par>
-                          <p:cTn id="11" presetID="10" presetClass="entr" presetSubtype="0" fill="hold" grpId="0" nodeType="afterEffect">
-                            <p:stCondLst>
-                              <p:cond delay="350"/>
-                            </p:stCondLst>
-                            <p:childTnLst>
-                              <p:set>
-                                <p:cBhvr>
-                                  <p:cTn id="9" dur="1" fill="hold">
-                                    <p:stCondLst>
-                                      <p:cond delay="0"/>
-                                    </p:stCondLst>
-                                  </p:cTn>
-                                  <p:tgtEl>
-                                    <p:spTgt spid="5"/>
+                                    <p:spTgt spid="4"/>
                                   </p:tgtEl>
                                   <p:attrNameLst>
                                     <p:attrName>style.visibility</p:attrName>
@@ -6085,9 +5665,9 @@
                               </p:set>
                               <p:animEffect transition="in" filter="fade">
                                 <p:cBhvr>
-                                  <p:cTn id="10" dur="400"/>
+                                  <p:cTn id="5" dur="400"/>
                                   <p:tgtEl>
-                                    <p:spTgt spid="5"/>
+                                    <p:spTgt spid="4"/>
                                   </p:tgtEl>
                                 </p:cBhvr>
                               </p:animEffect>
@@ -6095,20 +5675,20 @@
                           </p:cTn>
                         </p:par>
                         <p:par>
-                          <p:cTn id="14" presetID="10" presetClass="entr" presetSubtype="0" fill="hold" grpId="0" nodeType="afterEffect">
+                          <p:cTn id="9" presetID="10" presetClass="entr" presetSubtype="0" fill="hold" grpId="0" nodeType="afterEffect">
                             <p:stCondLst>
-                              <p:cond delay="600"/>
+                              <p:cond delay="250"/>
                             </p:stCondLst>
                             <p:childTnLst>
                               <p:set>
                                 <p:cBhvr>
-                                  <p:cTn id="12" dur="1" fill="hold">
+                                  <p:cTn id="7" dur="1" fill="hold">
                                     <p:stCondLst>
                                       <p:cond delay="0"/>
                                     </p:stCondLst>
                                   </p:cTn>
                                   <p:tgtEl>
-                                    <p:spTgt spid="7"/>
+                                    <p:spTgt spid="6"/>
                                   </p:tgtEl>
                                   <p:attrNameLst>
                                     <p:attrName>style.visibility</p:attrName>
@@ -6120,9 +5700,9 @@
                               </p:set>
                               <p:animEffect transition="in" filter="fade">
                                 <p:cBhvr>
-                                  <p:cTn id="13" dur="400"/>
+                                  <p:cTn id="8" dur="400"/>
                                   <p:tgtEl>
-                                    <p:spTgt spid="7"/>
+                                    <p:spTgt spid="6"/>
                                   </p:tgtEl>
                                 </p:cBhvr>
                               </p:animEffect>
@@ -6211,33 +5791,9 @@
           </a:p>
         </p:txBody>
       </p:sp>
-      <p:pic>
-        <p:nvPicPr>
-          <p:cNvPr id="3" name="Picture 2" descr="LOGO-OCEO-mark.png"/>
-          <p:cNvPicPr>
-            <a:picLocks noChangeAspect="1"/>
-          </p:cNvPicPr>
-          <p:nvPr/>
-        </p:nvPicPr>
-        <p:blipFill>
-          <a:blip r:embed="rId2"/>
-          <a:stretch>
-            <a:fillRect/>
-          </a:stretch>
-        </p:blipFill>
-        <p:spPr>
-          <a:xfrm>
-            <a:off x="10637215" y="457200"/>
-            <a:ext cx="1051560" cy="954471"/>
-          </a:xfrm>
-          <a:prstGeom prst="rect">
-            <a:avLst/>
-          </a:prstGeom>
-        </p:spPr>
-      </p:pic>
-      <p:sp>
-        <p:nvSpPr>
-          <p:cNvPr id="4" name="Rectangle 3"/>
+      <p:sp>
+        <p:nvSpPr>
+          <p:cNvPr id="3" name="Rectangle 2"/>
           <p:cNvSpPr/>
           <p:nvPr/>
         </p:nvSpPr>
@@ -6281,7 +5837,7 @@
       </p:sp>
       <p:sp>
         <p:nvSpPr>
-          <p:cNvPr id="5" name="TextBox 4"/>
+          <p:cNvPr id="4" name="TextBox 3"/>
           <p:cNvSpPr txBox="1"/>
           <p:nvPr/>
         </p:nvSpPr>
@@ -6331,7 +5887,7 @@
       </p:sp>
       <p:sp>
         <p:nvSpPr>
-          <p:cNvPr id="6" name="Rectangle 5"/>
+          <p:cNvPr id="5" name="Rectangle 4"/>
           <p:cNvSpPr/>
           <p:nvPr/>
         </p:nvSpPr>
@@ -6375,7 +5931,7 @@
       </p:sp>
       <p:sp>
         <p:nvSpPr>
-          <p:cNvPr id="7" name="TextBox 6"/>
+          <p:cNvPr id="6" name="TextBox 5"/>
           <p:cNvSpPr txBox="1"/>
           <p:nvPr/>
         </p:nvSpPr>
@@ -6519,7 +6075,7 @@
                       </p:stCondLst>
                       <p:childTnLst>
                         <p:par>
-                          <p:cTn id="8" presetID="23" presetClass="entr" presetSubtype="16" fill="hold" grpId="0" nodeType="afterEffect">
+                          <p:cTn id="6" presetID="10" presetClass="entr" presetSubtype="0" fill="hold" grpId="0" nodeType="afterEffect">
                             <p:stCondLst>
                               <p:cond delay="0"/>
                             </p:stCondLst>
@@ -6532,88 +6088,7 @@
                                     </p:stCondLst>
                                   </p:cTn>
                                   <p:tgtEl>
-                                    <p:spTgt spid="3"/>
-                                  </p:tgtEl>
-                                  <p:attrNameLst>
-                                    <p:attrName>style.visibility</p:attrName>
-                                  </p:attrNameLst>
-                                </p:cBhvr>
-                                <p:to>
-                                  <p:strVal val="visible"/>
-                                </p:to>
-                              </p:set>
-                              <p:anim calcmode="lin" valueType="num">
-                                <p:cBhvr additive="base">
-                                  <p:cTn id="5" dur="600" fill="hold"/>
-                                  <p:tgtEl>
-                                    <p:spTgt spid="3"/>
-                                  </p:tgtEl>
-                                  <p:attrNameLst>
-                                    <p:attrName>ppt_w</p:attrName>
-                                  </p:attrNameLst>
-                                </p:cBhvr>
-                                <p:tavLst>
-                                  <p:tav tm="0">
-                                    <p:val>
-                                      <p:fltVal val="0.3"/>
-                                    </p:val>
-                                  </p:tav>
-                                  <p:tav tm="100000">
-                                    <p:val>
-                                      <p:fltVal val="1"/>
-                                    </p:val>
-                                  </p:tav>
-                                </p:tavLst>
-                              </p:anim>
-                              <p:anim calcmode="lin" valueType="num">
-                                <p:cBhvr additive="base">
-                                  <p:cTn id="6" dur="600" fill="hold"/>
-                                  <p:tgtEl>
-                                    <p:spTgt spid="3"/>
-                                  </p:tgtEl>
-                                  <p:attrNameLst>
-                                    <p:attrName>ppt_h</p:attrName>
-                                  </p:attrNameLst>
-                                </p:cBhvr>
-                                <p:tavLst>
-                                  <p:tav tm="0">
-                                    <p:val>
-                                      <p:fltVal val="0.3"/>
-                                    </p:val>
-                                  </p:tav>
-                                  <p:tav tm="100000">
-                                    <p:val>
-                                      <p:fltVal val="1"/>
-                                    </p:val>
-                                  </p:tav>
-                                </p:tavLst>
-                              </p:anim>
-                              <p:animEffect transition="in" filter="fade">
-                                <p:cBhvr>
-                                  <p:cTn id="7" dur="600"/>
-                                  <p:tgtEl>
-                                    <p:spTgt spid="3"/>
-                                  </p:tgtEl>
-                                </p:cBhvr>
-                              </p:animEffect>
-                            </p:childTnLst>
-                          </p:cTn>
-                        </p:par>
-                        <p:par>
-                          <p:cTn id="11" presetID="10" presetClass="entr" presetSubtype="0" fill="hold" grpId="0" nodeType="afterEffect">
-                            <p:stCondLst>
-                              <p:cond delay="350"/>
-                            </p:stCondLst>
-                            <p:childTnLst>
-                              <p:set>
-                                <p:cBhvr>
-                                  <p:cTn id="9" dur="1" fill="hold">
-                                    <p:stCondLst>
-                                      <p:cond delay="0"/>
-                                    </p:stCondLst>
-                                  </p:cTn>
-                                  <p:tgtEl>
-                                    <p:spTgt spid="5"/>
+                                    <p:spTgt spid="4"/>
                                   </p:tgtEl>
                                   <p:attrNameLst>
                                     <p:attrName>style.visibility</p:attrName>
@@ -6625,9 +6100,9 @@
                               </p:set>
                               <p:animEffect transition="in" filter="fade">
                                 <p:cBhvr>
-                                  <p:cTn id="10" dur="400"/>
+                                  <p:cTn id="5" dur="400"/>
                                   <p:tgtEl>
-                                    <p:spTgt spid="5"/>
+                                    <p:spTgt spid="4"/>
                                   </p:tgtEl>
                                 </p:cBhvr>
                               </p:animEffect>
@@ -6635,20 +6110,20 @@
                           </p:cTn>
                         </p:par>
                         <p:par>
-                          <p:cTn id="14" presetID="10" presetClass="entr" presetSubtype="0" fill="hold" grpId="0" nodeType="afterEffect">
+                          <p:cTn id="9" presetID="10" presetClass="entr" presetSubtype="0" fill="hold" grpId="0" nodeType="afterEffect">
                             <p:stCondLst>
-                              <p:cond delay="600"/>
+                              <p:cond delay="250"/>
                             </p:stCondLst>
                             <p:childTnLst>
                               <p:set>
                                 <p:cBhvr>
-                                  <p:cTn id="12" dur="1" fill="hold">
+                                  <p:cTn id="7" dur="1" fill="hold">
                                     <p:stCondLst>
                                       <p:cond delay="0"/>
                                     </p:stCondLst>
                                   </p:cTn>
                                   <p:tgtEl>
-                                    <p:spTgt spid="7"/>
+                                    <p:spTgt spid="6"/>
                                   </p:tgtEl>
                                   <p:attrNameLst>
                                     <p:attrName>style.visibility</p:attrName>
@@ -6660,9 +6135,9 @@
                               </p:set>
                               <p:animEffect transition="in" filter="fade">
                                 <p:cBhvr>
-                                  <p:cTn id="13" dur="400"/>
+                                  <p:cTn id="8" dur="400"/>
                                   <p:tgtEl>
-                                    <p:spTgt spid="7"/>
+                                    <p:spTgt spid="6"/>
                                   </p:tgtEl>
                                 </p:cBhvr>
                               </p:animEffect>
@@ -6751,39 +6226,15 @@
           </a:p>
         </p:txBody>
       </p:sp>
-      <p:pic>
-        <p:nvPicPr>
-          <p:cNvPr id="3" name="Picture 2" descr="LOGO-OCEO.png"/>
-          <p:cNvPicPr>
-            <a:picLocks noChangeAspect="1"/>
-          </p:cNvPicPr>
+      <p:sp>
+        <p:nvSpPr>
+          <p:cNvPr id="3" name="Rectangle 2"/>
+          <p:cNvSpPr/>
           <p:nvPr/>
-        </p:nvPicPr>
-        <p:blipFill>
-          <a:blip r:embed="rId2"/>
-          <a:stretch>
-            <a:fillRect/>
-          </a:stretch>
-        </p:blipFill>
+        </p:nvSpPr>
         <p:spPr>
           <a:xfrm>
-            <a:off x="868680" y="777240"/>
-            <a:ext cx="2468880" cy="1991869"/>
-          </a:xfrm>
-          <a:prstGeom prst="rect">
-            <a:avLst/>
-          </a:prstGeom>
-        </p:spPr>
-      </p:pic>
-      <p:sp>
-        <p:nvSpPr>
-          <p:cNvPr id="4" name="Rectangle 3"/>
-          <p:cNvSpPr/>
-          <p:nvPr/>
-        </p:nvSpPr>
-        <p:spPr>
-          <a:xfrm>
-            <a:off x="914400" y="3977639"/>
+            <a:off x="914400" y="2651760"/>
             <a:ext cx="2011680" cy="38100"/>
           </a:xfrm>
           <a:prstGeom prst="rect">
@@ -6821,13 +6272,13 @@
       </p:sp>
       <p:sp>
         <p:nvSpPr>
-          <p:cNvPr id="5" name="TextBox 4"/>
+          <p:cNvPr id="4" name="TextBox 3"/>
           <p:cNvSpPr txBox="1"/>
           <p:nvPr/>
         </p:nvSpPr>
         <p:spPr>
           <a:xfrm>
-            <a:off x="896112" y="4206240"/>
+            <a:off x="896112" y="2880360"/>
             <a:ext cx="10058400" cy="2194560"/>
           </a:xfrm>
           <a:prstGeom prst="rect">
@@ -6911,7 +6362,7 @@
                       </p:stCondLst>
                       <p:childTnLst>
                         <p:par>
-                          <p:cTn id="8" presetID="23" presetClass="entr" presetSubtype="16" fill="hold" grpId="0" nodeType="afterEffect">
+                          <p:cTn id="6" presetID="10" presetClass="entr" presetSubtype="0" fill="hold" grpId="0" nodeType="afterEffect">
                             <p:stCondLst>
                               <p:cond delay="0"/>
                             </p:stCondLst>
@@ -6924,88 +6375,7 @@
                                     </p:stCondLst>
                                   </p:cTn>
                                   <p:tgtEl>
-                                    <p:spTgt spid="3"/>
-                                  </p:tgtEl>
-                                  <p:attrNameLst>
-                                    <p:attrName>style.visibility</p:attrName>
-                                  </p:attrNameLst>
-                                </p:cBhvr>
-                                <p:to>
-                                  <p:strVal val="visible"/>
-                                </p:to>
-                              </p:set>
-                              <p:anim calcmode="lin" valueType="num">
-                                <p:cBhvr additive="base">
-                                  <p:cTn id="5" dur="600" fill="hold"/>
-                                  <p:tgtEl>
-                                    <p:spTgt spid="3"/>
-                                  </p:tgtEl>
-                                  <p:attrNameLst>
-                                    <p:attrName>ppt_w</p:attrName>
-                                  </p:attrNameLst>
-                                </p:cBhvr>
-                                <p:tavLst>
-                                  <p:tav tm="0">
-                                    <p:val>
-                                      <p:fltVal val="0.3"/>
-                                    </p:val>
-                                  </p:tav>
-                                  <p:tav tm="100000">
-                                    <p:val>
-                                      <p:fltVal val="1"/>
-                                    </p:val>
-                                  </p:tav>
-                                </p:tavLst>
-                              </p:anim>
-                              <p:anim calcmode="lin" valueType="num">
-                                <p:cBhvr additive="base">
-                                  <p:cTn id="6" dur="600" fill="hold"/>
-                                  <p:tgtEl>
-                                    <p:spTgt spid="3"/>
-                                  </p:tgtEl>
-                                  <p:attrNameLst>
-                                    <p:attrName>ppt_h</p:attrName>
-                                  </p:attrNameLst>
-                                </p:cBhvr>
-                                <p:tavLst>
-                                  <p:tav tm="0">
-                                    <p:val>
-                                      <p:fltVal val="0.3"/>
-                                    </p:val>
-                                  </p:tav>
-                                  <p:tav tm="100000">
-                                    <p:val>
-                                      <p:fltVal val="1"/>
-                                    </p:val>
-                                  </p:tav>
-                                </p:tavLst>
-                              </p:anim>
-                              <p:animEffect transition="in" filter="fade">
-                                <p:cBhvr>
-                                  <p:cTn id="7" dur="600"/>
-                                  <p:tgtEl>
-                                    <p:spTgt spid="3"/>
-                                  </p:tgtEl>
-                                </p:cBhvr>
-                              </p:animEffect>
-                            </p:childTnLst>
-                          </p:cTn>
-                        </p:par>
-                        <p:par>
-                          <p:cTn id="11" presetID="10" presetClass="entr" presetSubtype="0" fill="hold" grpId="0" nodeType="afterEffect">
-                            <p:stCondLst>
-                              <p:cond delay="350"/>
-                            </p:stCondLst>
-                            <p:childTnLst>
-                              <p:set>
-                                <p:cBhvr>
-                                  <p:cTn id="9" dur="1" fill="hold">
-                                    <p:stCondLst>
-                                      <p:cond delay="0"/>
-                                    </p:stCondLst>
-                                  </p:cTn>
-                                  <p:tgtEl>
-                                    <p:spTgt spid="5"/>
+                                    <p:spTgt spid="4"/>
                                   </p:tgtEl>
                                   <p:attrNameLst>
                                     <p:attrName>style.visibility</p:attrName>
@@ -7017,9 +6387,9 @@
                               </p:set>
                               <p:animEffect transition="in" filter="fade">
                                 <p:cBhvr>
-                                  <p:cTn id="10" dur="400"/>
+                                  <p:cTn id="5" dur="400"/>
                                   <p:tgtEl>
-                                    <p:spTgt spid="5"/>
+                                    <p:spTgt spid="4"/>
                                   </p:tgtEl>
                                 </p:cBhvr>
                               </p:animEffect>
@@ -7108,33 +6478,9 @@
           </a:p>
         </p:txBody>
       </p:sp>
-      <p:pic>
-        <p:nvPicPr>
-          <p:cNvPr id="3" name="Picture 2" descr="LOGO-OCEO-mark.png"/>
-          <p:cNvPicPr>
-            <a:picLocks noChangeAspect="1"/>
-          </p:cNvPicPr>
-          <p:nvPr/>
-        </p:nvPicPr>
-        <p:blipFill>
-          <a:blip r:embed="rId2"/>
-          <a:stretch>
-            <a:fillRect/>
-          </a:stretch>
-        </p:blipFill>
-        <p:spPr>
-          <a:xfrm>
-            <a:off x="10637215" y="457200"/>
-            <a:ext cx="1051560" cy="954471"/>
-          </a:xfrm>
-          <a:prstGeom prst="rect">
-            <a:avLst/>
-          </a:prstGeom>
-        </p:spPr>
-      </p:pic>
-      <p:sp>
-        <p:nvSpPr>
-          <p:cNvPr id="4" name="Rectangle 3"/>
+      <p:sp>
+        <p:nvSpPr>
+          <p:cNvPr id="3" name="Rectangle 2"/>
           <p:cNvSpPr/>
           <p:nvPr/>
         </p:nvSpPr>
@@ -7178,7 +6524,7 @@
       </p:sp>
       <p:sp>
         <p:nvSpPr>
-          <p:cNvPr id="5" name="TextBox 4"/>
+          <p:cNvPr id="4" name="TextBox 3"/>
           <p:cNvSpPr txBox="1"/>
           <p:nvPr/>
         </p:nvSpPr>
@@ -7228,7 +6574,7 @@
       </p:sp>
       <p:sp>
         <p:nvSpPr>
-          <p:cNvPr id="6" name="Rectangle 5"/>
+          <p:cNvPr id="5" name="Rectangle 4"/>
           <p:cNvSpPr/>
           <p:nvPr/>
         </p:nvSpPr>
@@ -7272,7 +6618,7 @@
       </p:sp>
       <p:sp>
         <p:nvSpPr>
-          <p:cNvPr id="7" name="TextBox 6"/>
+          <p:cNvPr id="6" name="TextBox 5"/>
           <p:cNvSpPr txBox="1"/>
           <p:nvPr/>
         </p:nvSpPr>
@@ -7484,7 +6830,7 @@
                       </p:stCondLst>
                       <p:childTnLst>
                         <p:par>
-                          <p:cTn id="8" presetID="23" presetClass="entr" presetSubtype="16" fill="hold" grpId="0" nodeType="afterEffect">
+                          <p:cTn id="6" presetID="10" presetClass="entr" presetSubtype="0" fill="hold" grpId="0" nodeType="afterEffect">
                             <p:stCondLst>
                               <p:cond delay="0"/>
                             </p:stCondLst>
@@ -7497,88 +6843,7 @@
                                     </p:stCondLst>
                                   </p:cTn>
                                   <p:tgtEl>
-                                    <p:spTgt spid="3"/>
-                                  </p:tgtEl>
-                                  <p:attrNameLst>
-                                    <p:attrName>style.visibility</p:attrName>
-                                  </p:attrNameLst>
-                                </p:cBhvr>
-                                <p:to>
-                                  <p:strVal val="visible"/>
-                                </p:to>
-                              </p:set>
-                              <p:anim calcmode="lin" valueType="num">
-                                <p:cBhvr additive="base">
-                                  <p:cTn id="5" dur="600" fill="hold"/>
-                                  <p:tgtEl>
-                                    <p:spTgt spid="3"/>
-                                  </p:tgtEl>
-                                  <p:attrNameLst>
-                                    <p:attrName>ppt_w</p:attrName>
-                                  </p:attrNameLst>
-                                </p:cBhvr>
-                                <p:tavLst>
-                                  <p:tav tm="0">
-                                    <p:val>
-                                      <p:fltVal val="0.3"/>
-                                    </p:val>
-                                  </p:tav>
-                                  <p:tav tm="100000">
-                                    <p:val>
-                                      <p:fltVal val="1"/>
-                                    </p:val>
-                                  </p:tav>
-                                </p:tavLst>
-                              </p:anim>
-                              <p:anim calcmode="lin" valueType="num">
-                                <p:cBhvr additive="base">
-                                  <p:cTn id="6" dur="600" fill="hold"/>
-                                  <p:tgtEl>
-                                    <p:spTgt spid="3"/>
-                                  </p:tgtEl>
-                                  <p:attrNameLst>
-                                    <p:attrName>ppt_h</p:attrName>
-                                  </p:attrNameLst>
-                                </p:cBhvr>
-                                <p:tavLst>
-                                  <p:tav tm="0">
-                                    <p:val>
-                                      <p:fltVal val="0.3"/>
-                                    </p:val>
-                                  </p:tav>
-                                  <p:tav tm="100000">
-                                    <p:val>
-                                      <p:fltVal val="1"/>
-                                    </p:val>
-                                  </p:tav>
-                                </p:tavLst>
-                              </p:anim>
-                              <p:animEffect transition="in" filter="fade">
-                                <p:cBhvr>
-                                  <p:cTn id="7" dur="600"/>
-                                  <p:tgtEl>
-                                    <p:spTgt spid="3"/>
-                                  </p:tgtEl>
-                                </p:cBhvr>
-                              </p:animEffect>
-                            </p:childTnLst>
-                          </p:cTn>
-                        </p:par>
-                        <p:par>
-                          <p:cTn id="11" presetID="10" presetClass="entr" presetSubtype="0" fill="hold" grpId="0" nodeType="afterEffect">
-                            <p:stCondLst>
-                              <p:cond delay="350"/>
-                            </p:stCondLst>
-                            <p:childTnLst>
-                              <p:set>
-                                <p:cBhvr>
-                                  <p:cTn id="9" dur="1" fill="hold">
-                                    <p:stCondLst>
-                                      <p:cond delay="0"/>
-                                    </p:stCondLst>
-                                  </p:cTn>
-                                  <p:tgtEl>
-                                    <p:spTgt spid="5"/>
+                                    <p:spTgt spid="4"/>
                                   </p:tgtEl>
                                   <p:attrNameLst>
                                     <p:attrName>style.visibility</p:attrName>
@@ -7590,9 +6855,9 @@
                               </p:set>
                               <p:animEffect transition="in" filter="fade">
                                 <p:cBhvr>
-                                  <p:cTn id="10" dur="400"/>
+                                  <p:cTn id="5" dur="400"/>
                                   <p:tgtEl>
-                                    <p:spTgt spid="5"/>
+                                    <p:spTgt spid="4"/>
                                   </p:tgtEl>
                                 </p:cBhvr>
                               </p:animEffect>
@@ -7600,20 +6865,20 @@
                           </p:cTn>
                         </p:par>
                         <p:par>
-                          <p:cTn id="14" presetID="10" presetClass="entr" presetSubtype="0" fill="hold" grpId="0" nodeType="afterEffect">
+                          <p:cTn id="9" presetID="10" presetClass="entr" presetSubtype="0" fill="hold" grpId="0" nodeType="afterEffect">
                             <p:stCondLst>
-                              <p:cond delay="600"/>
+                              <p:cond delay="250"/>
                             </p:stCondLst>
                             <p:childTnLst>
                               <p:set>
                                 <p:cBhvr>
-                                  <p:cTn id="12" dur="1" fill="hold">
+                                  <p:cTn id="7" dur="1" fill="hold">
                                     <p:stCondLst>
                                       <p:cond delay="0"/>
                                     </p:stCondLst>
                                   </p:cTn>
                                   <p:tgtEl>
-                                    <p:spTgt spid="7"/>
+                                    <p:spTgt spid="6"/>
                                   </p:tgtEl>
                                   <p:attrNameLst>
                                     <p:attrName>style.visibility</p:attrName>
@@ -7625,9 +6890,9 @@
                               </p:set>
                               <p:animEffect transition="in" filter="fade">
                                 <p:cBhvr>
-                                  <p:cTn id="13" dur="400"/>
+                                  <p:cTn id="8" dur="400"/>
                                   <p:tgtEl>
-                                    <p:spTgt spid="7"/>
+                                    <p:spTgt spid="6"/>
                                   </p:tgtEl>
                                 </p:cBhvr>
                               </p:animEffect>
@@ -7716,33 +6981,9 @@
           </a:p>
         </p:txBody>
       </p:sp>
-      <p:pic>
-        <p:nvPicPr>
-          <p:cNvPr id="3" name="Picture 2" descr="LOGO-OCEO-mark.png"/>
-          <p:cNvPicPr>
-            <a:picLocks noChangeAspect="1"/>
-          </p:cNvPicPr>
-          <p:nvPr/>
-        </p:nvPicPr>
-        <p:blipFill>
-          <a:blip r:embed="rId2"/>
-          <a:stretch>
-            <a:fillRect/>
-          </a:stretch>
-        </p:blipFill>
-        <p:spPr>
-          <a:xfrm>
-            <a:off x="10637215" y="457200"/>
-            <a:ext cx="1051560" cy="954471"/>
-          </a:xfrm>
-          <a:prstGeom prst="rect">
-            <a:avLst/>
-          </a:prstGeom>
-        </p:spPr>
-      </p:pic>
-      <p:sp>
-        <p:nvSpPr>
-          <p:cNvPr id="4" name="Rectangle 3"/>
+      <p:sp>
+        <p:nvSpPr>
+          <p:cNvPr id="3" name="Rectangle 2"/>
           <p:cNvSpPr/>
           <p:nvPr/>
         </p:nvSpPr>
@@ -7786,7 +7027,7 @@
       </p:sp>
       <p:sp>
         <p:nvSpPr>
-          <p:cNvPr id="5" name="TextBox 4"/>
+          <p:cNvPr id="4" name="TextBox 3"/>
           <p:cNvSpPr txBox="1"/>
           <p:nvPr/>
         </p:nvSpPr>
@@ -7836,7 +7077,7 @@
       </p:sp>
       <p:sp>
         <p:nvSpPr>
-          <p:cNvPr id="6" name="Rectangle 5"/>
+          <p:cNvPr id="5" name="Rectangle 4"/>
           <p:cNvSpPr/>
           <p:nvPr/>
         </p:nvSpPr>
@@ -7880,7 +7121,7 @@
       </p:sp>
       <p:sp>
         <p:nvSpPr>
-          <p:cNvPr id="7" name="TextBox 6"/>
+          <p:cNvPr id="6" name="TextBox 5"/>
           <p:cNvSpPr txBox="1"/>
           <p:nvPr/>
         </p:nvSpPr>
@@ -8080,7 +7321,7 @@
                       </p:stCondLst>
                       <p:childTnLst>
                         <p:par>
-                          <p:cTn id="8" presetID="23" presetClass="entr" presetSubtype="16" fill="hold" grpId="0" nodeType="afterEffect">
+                          <p:cTn id="6" presetID="10" presetClass="entr" presetSubtype="0" fill="hold" grpId="0" nodeType="afterEffect">
                             <p:stCondLst>
                               <p:cond delay="0"/>
                             </p:stCondLst>
@@ -8093,88 +7334,7 @@
                                     </p:stCondLst>
                                   </p:cTn>
                                   <p:tgtEl>
-                                    <p:spTgt spid="3"/>
-                                  </p:tgtEl>
-                                  <p:attrNameLst>
-                                    <p:attrName>style.visibility</p:attrName>
-                                  </p:attrNameLst>
-                                </p:cBhvr>
-                                <p:to>
-                                  <p:strVal val="visible"/>
-                                </p:to>
-                              </p:set>
-                              <p:anim calcmode="lin" valueType="num">
-                                <p:cBhvr additive="base">
-                                  <p:cTn id="5" dur="600" fill="hold"/>
-                                  <p:tgtEl>
-                                    <p:spTgt spid="3"/>
-                                  </p:tgtEl>
-                                  <p:attrNameLst>
-                                    <p:attrName>ppt_w</p:attrName>
-                                  </p:attrNameLst>
-                                </p:cBhvr>
-                                <p:tavLst>
-                                  <p:tav tm="0">
-                                    <p:val>
-                                      <p:fltVal val="0.3"/>
-                                    </p:val>
-                                  </p:tav>
-                                  <p:tav tm="100000">
-                                    <p:val>
-                                      <p:fltVal val="1"/>
-                                    </p:val>
-                                  </p:tav>
-                                </p:tavLst>
-                              </p:anim>
-                              <p:anim calcmode="lin" valueType="num">
-                                <p:cBhvr additive="base">
-                                  <p:cTn id="6" dur="600" fill="hold"/>
-                                  <p:tgtEl>
-                                    <p:spTgt spid="3"/>
-                                  </p:tgtEl>
-                                  <p:attrNameLst>
-                                    <p:attrName>ppt_h</p:attrName>
-                                  </p:attrNameLst>
-                                </p:cBhvr>
-                                <p:tavLst>
-                                  <p:tav tm="0">
-                                    <p:val>
-                                      <p:fltVal val="0.3"/>
-                                    </p:val>
-                                  </p:tav>
-                                  <p:tav tm="100000">
-                                    <p:val>
-                                      <p:fltVal val="1"/>
-                                    </p:val>
-                                  </p:tav>
-                                </p:tavLst>
-                              </p:anim>
-                              <p:animEffect transition="in" filter="fade">
-                                <p:cBhvr>
-                                  <p:cTn id="7" dur="600"/>
-                                  <p:tgtEl>
-                                    <p:spTgt spid="3"/>
-                                  </p:tgtEl>
-                                </p:cBhvr>
-                              </p:animEffect>
-                            </p:childTnLst>
-                          </p:cTn>
-                        </p:par>
-                        <p:par>
-                          <p:cTn id="11" presetID="10" presetClass="entr" presetSubtype="0" fill="hold" grpId="0" nodeType="afterEffect">
-                            <p:stCondLst>
-                              <p:cond delay="350"/>
-                            </p:stCondLst>
-                            <p:childTnLst>
-                              <p:set>
-                                <p:cBhvr>
-                                  <p:cTn id="9" dur="1" fill="hold">
-                                    <p:stCondLst>
-                                      <p:cond delay="0"/>
-                                    </p:stCondLst>
-                                  </p:cTn>
-                                  <p:tgtEl>
-                                    <p:spTgt spid="5"/>
+                                    <p:spTgt spid="4"/>
                                   </p:tgtEl>
                                   <p:attrNameLst>
                                     <p:attrName>style.visibility</p:attrName>
@@ -8186,9 +7346,9 @@
                               </p:set>
                               <p:animEffect transition="in" filter="fade">
                                 <p:cBhvr>
-                                  <p:cTn id="10" dur="400"/>
+                                  <p:cTn id="5" dur="400"/>
                                   <p:tgtEl>
-                                    <p:spTgt spid="5"/>
+                                    <p:spTgt spid="4"/>
                                   </p:tgtEl>
                                 </p:cBhvr>
                               </p:animEffect>
@@ -8196,20 +7356,20 @@
                           </p:cTn>
                         </p:par>
                         <p:par>
-                          <p:cTn id="14" presetID="10" presetClass="entr" presetSubtype="0" fill="hold" grpId="0" nodeType="afterEffect">
+                          <p:cTn id="9" presetID="10" presetClass="entr" presetSubtype="0" fill="hold" grpId="0" nodeType="afterEffect">
                             <p:stCondLst>
-                              <p:cond delay="600"/>
+                              <p:cond delay="250"/>
                             </p:stCondLst>
                             <p:childTnLst>
                               <p:set>
                                 <p:cBhvr>
-                                  <p:cTn id="12" dur="1" fill="hold">
+                                  <p:cTn id="7" dur="1" fill="hold">
                                     <p:stCondLst>
                                       <p:cond delay="0"/>
                                     </p:stCondLst>
                                   </p:cTn>
                                   <p:tgtEl>
-                                    <p:spTgt spid="7"/>
+                                    <p:spTgt spid="6"/>
                                   </p:tgtEl>
                                   <p:attrNameLst>
                                     <p:attrName>style.visibility</p:attrName>
@@ -8221,9 +7381,9 @@
                               </p:set>
                               <p:animEffect transition="in" filter="fade">
                                 <p:cBhvr>
-                                  <p:cTn id="13" dur="400"/>
+                                  <p:cTn id="8" dur="400"/>
                                   <p:tgtEl>
-                                    <p:spTgt spid="7"/>
+                                    <p:spTgt spid="6"/>
                                   </p:tgtEl>
                                 </p:cBhvr>
                               </p:animEffect>
@@ -8312,33 +7472,9 @@
           </a:p>
         </p:txBody>
       </p:sp>
-      <p:pic>
-        <p:nvPicPr>
-          <p:cNvPr id="3" name="Picture 2" descr="LOGO-OCEO-mark.png"/>
-          <p:cNvPicPr>
-            <a:picLocks noChangeAspect="1"/>
-          </p:cNvPicPr>
-          <p:nvPr/>
-        </p:nvPicPr>
-        <p:blipFill>
-          <a:blip r:embed="rId2"/>
-          <a:stretch>
-            <a:fillRect/>
-          </a:stretch>
-        </p:blipFill>
-        <p:spPr>
-          <a:xfrm>
-            <a:off x="10637215" y="457200"/>
-            <a:ext cx="1051560" cy="954471"/>
-          </a:xfrm>
-          <a:prstGeom prst="rect">
-            <a:avLst/>
-          </a:prstGeom>
-        </p:spPr>
-      </p:pic>
-      <p:sp>
-        <p:nvSpPr>
-          <p:cNvPr id="4" name="Rectangle 3"/>
+      <p:sp>
+        <p:nvSpPr>
+          <p:cNvPr id="3" name="Rectangle 2"/>
           <p:cNvSpPr/>
           <p:nvPr/>
         </p:nvSpPr>
@@ -8382,7 +7518,7 @@
       </p:sp>
       <p:sp>
         <p:nvSpPr>
-          <p:cNvPr id="5" name="TextBox 4"/>
+          <p:cNvPr id="4" name="TextBox 3"/>
           <p:cNvSpPr txBox="1"/>
           <p:nvPr/>
         </p:nvSpPr>
@@ -8432,7 +7568,7 @@
       </p:sp>
       <p:sp>
         <p:nvSpPr>
-          <p:cNvPr id="6" name="Rectangle 5"/>
+          <p:cNvPr id="5" name="Rectangle 4"/>
           <p:cNvSpPr/>
           <p:nvPr/>
         </p:nvSpPr>
@@ -8476,7 +7612,7 @@
       </p:sp>
       <p:graphicFrame>
         <p:nvGraphicFramePr>
-          <p:cNvPr id="7" name="Table 6"/>
+          <p:cNvPr id="6" name="Table 5"/>
           <p:cNvGraphicFramePr>
             <a:graphicFrameLocks noGrp="1"/>
           </p:cNvGraphicFramePr>
@@ -8886,7 +8022,7 @@
       </p:graphicFrame>
       <p:sp>
         <p:nvSpPr>
-          <p:cNvPr id="8" name="TextBox 7"/>
+          <p:cNvPr id="7" name="TextBox 6"/>
           <p:cNvSpPr txBox="1"/>
           <p:nvPr/>
         </p:nvSpPr>
@@ -8962,7 +8098,7 @@
                       </p:stCondLst>
                       <p:childTnLst>
                         <p:par>
-                          <p:cTn id="8" presetID="23" presetClass="entr" presetSubtype="16" fill="hold" grpId="0" nodeType="afterEffect">
+                          <p:cTn id="6" presetID="10" presetClass="entr" presetSubtype="0" fill="hold" grpId="0" nodeType="afterEffect">
                             <p:stCondLst>
                               <p:cond delay="0"/>
                             </p:stCondLst>
@@ -8975,88 +8111,7 @@
                                     </p:stCondLst>
                                   </p:cTn>
                                   <p:tgtEl>
-                                    <p:spTgt spid="3"/>
-                                  </p:tgtEl>
-                                  <p:attrNameLst>
-                                    <p:attrName>style.visibility</p:attrName>
-                                  </p:attrNameLst>
-                                </p:cBhvr>
-                                <p:to>
-                                  <p:strVal val="visible"/>
-                                </p:to>
-                              </p:set>
-                              <p:anim calcmode="lin" valueType="num">
-                                <p:cBhvr additive="base">
-                                  <p:cTn id="5" dur="600" fill="hold"/>
-                                  <p:tgtEl>
-                                    <p:spTgt spid="3"/>
-                                  </p:tgtEl>
-                                  <p:attrNameLst>
-                                    <p:attrName>ppt_w</p:attrName>
-                                  </p:attrNameLst>
-                                </p:cBhvr>
-                                <p:tavLst>
-                                  <p:tav tm="0">
-                                    <p:val>
-                                      <p:fltVal val="0.3"/>
-                                    </p:val>
-                                  </p:tav>
-                                  <p:tav tm="100000">
-                                    <p:val>
-                                      <p:fltVal val="1"/>
-                                    </p:val>
-                                  </p:tav>
-                                </p:tavLst>
-                              </p:anim>
-                              <p:anim calcmode="lin" valueType="num">
-                                <p:cBhvr additive="base">
-                                  <p:cTn id="6" dur="600" fill="hold"/>
-                                  <p:tgtEl>
-                                    <p:spTgt spid="3"/>
-                                  </p:tgtEl>
-                                  <p:attrNameLst>
-                                    <p:attrName>ppt_h</p:attrName>
-                                  </p:attrNameLst>
-                                </p:cBhvr>
-                                <p:tavLst>
-                                  <p:tav tm="0">
-                                    <p:val>
-                                      <p:fltVal val="0.3"/>
-                                    </p:val>
-                                  </p:tav>
-                                  <p:tav tm="100000">
-                                    <p:val>
-                                      <p:fltVal val="1"/>
-                                    </p:val>
-                                  </p:tav>
-                                </p:tavLst>
-                              </p:anim>
-                              <p:animEffect transition="in" filter="fade">
-                                <p:cBhvr>
-                                  <p:cTn id="7" dur="600"/>
-                                  <p:tgtEl>
-                                    <p:spTgt spid="3"/>
-                                  </p:tgtEl>
-                                </p:cBhvr>
-                              </p:animEffect>
-                            </p:childTnLst>
-                          </p:cTn>
-                        </p:par>
-                        <p:par>
-                          <p:cTn id="11" presetID="10" presetClass="entr" presetSubtype="0" fill="hold" grpId="0" nodeType="afterEffect">
-                            <p:stCondLst>
-                              <p:cond delay="350"/>
-                            </p:stCondLst>
-                            <p:childTnLst>
-                              <p:set>
-                                <p:cBhvr>
-                                  <p:cTn id="9" dur="1" fill="hold">
-                                    <p:stCondLst>
-                                      <p:cond delay="0"/>
-                                    </p:stCondLst>
-                                  </p:cTn>
-                                  <p:tgtEl>
-                                    <p:spTgt spid="5"/>
+                                    <p:spTgt spid="4"/>
                                   </p:tgtEl>
                                   <p:attrNameLst>
                                     <p:attrName>style.visibility</p:attrName>
@@ -9068,9 +8123,9 @@
                               </p:set>
                               <p:animEffect transition="in" filter="fade">
                                 <p:cBhvr>
-                                  <p:cTn id="10" dur="400"/>
+                                  <p:cTn id="5" dur="400"/>
                                   <p:tgtEl>
-                                    <p:spTgt spid="5"/>
+                                    <p:spTgt spid="4"/>
                                   </p:tgtEl>
                                 </p:cBhvr>
                               </p:animEffect>
@@ -9078,14 +8133,49 @@
                           </p:cTn>
                         </p:par>
                         <p:par>
-                          <p:cTn id="14" presetID="10" presetClass="entr" presetSubtype="0" fill="hold" grpId="0" nodeType="afterEffect">
+                          <p:cTn id="9" presetID="10" presetClass="entr" presetSubtype="0" fill="hold" grpId="0" nodeType="afterEffect">
                             <p:stCondLst>
-                              <p:cond delay="600"/>
+                              <p:cond delay="250"/>
                             </p:stCondLst>
                             <p:childTnLst>
                               <p:set>
                                 <p:cBhvr>
-                                  <p:cTn id="12" dur="1" fill="hold">
+                                  <p:cTn id="7" dur="1" fill="hold">
+                                    <p:stCondLst>
+                                      <p:cond delay="0"/>
+                                    </p:stCondLst>
+                                  </p:cTn>
+                                  <p:tgtEl>
+                                    <p:spTgt spid="6"/>
+                                  </p:tgtEl>
+                                  <p:attrNameLst>
+                                    <p:attrName>style.visibility</p:attrName>
+                                  </p:attrNameLst>
+                                </p:cBhvr>
+                                <p:to>
+                                  <p:strVal val="visible"/>
+                                </p:to>
+                              </p:set>
+                              <p:animEffect transition="in" filter="fade">
+                                <p:cBhvr>
+                                  <p:cTn id="8" dur="400"/>
+                                  <p:tgtEl>
+                                    <p:spTgt spid="6"/>
+                                  </p:tgtEl>
+                                </p:cBhvr>
+                              </p:animEffect>
+                            </p:childTnLst>
+                          </p:cTn>
+                        </p:par>
+                        <p:par>
+                          <p:cTn id="12" presetID="10" presetClass="entr" presetSubtype="0" fill="hold" grpId="0" nodeType="afterEffect">
+                            <p:stCondLst>
+                              <p:cond delay="500"/>
+                            </p:stCondLst>
+                            <p:childTnLst>
+                              <p:set>
+                                <p:cBhvr>
+                                  <p:cTn id="10" dur="1" fill="hold">
                                     <p:stCondLst>
                                       <p:cond delay="0"/>
                                     </p:stCondLst>
@@ -9103,44 +8193,9 @@
                               </p:set>
                               <p:animEffect transition="in" filter="fade">
                                 <p:cBhvr>
-                                  <p:cTn id="13" dur="400"/>
+                                  <p:cTn id="11" dur="400"/>
                                   <p:tgtEl>
                                     <p:spTgt spid="7"/>
-                                  </p:tgtEl>
-                                </p:cBhvr>
-                              </p:animEffect>
-                            </p:childTnLst>
-                          </p:cTn>
-                        </p:par>
-                        <p:par>
-                          <p:cTn id="17" presetID="10" presetClass="entr" presetSubtype="0" fill="hold" grpId="0" nodeType="afterEffect">
-                            <p:stCondLst>
-                              <p:cond delay="850"/>
-                            </p:stCondLst>
-                            <p:childTnLst>
-                              <p:set>
-                                <p:cBhvr>
-                                  <p:cTn id="15" dur="1" fill="hold">
-                                    <p:stCondLst>
-                                      <p:cond delay="0"/>
-                                    </p:stCondLst>
-                                  </p:cTn>
-                                  <p:tgtEl>
-                                    <p:spTgt spid="8"/>
-                                  </p:tgtEl>
-                                  <p:attrNameLst>
-                                    <p:attrName>style.visibility</p:attrName>
-                                  </p:attrNameLst>
-                                </p:cBhvr>
-                                <p:to>
-                                  <p:strVal val="visible"/>
-                                </p:to>
-                              </p:set>
-                              <p:animEffect transition="in" filter="fade">
-                                <p:cBhvr>
-                                  <p:cTn id="16" dur="400"/>
-                                  <p:tgtEl>
-                                    <p:spTgt spid="8"/>
                                   </p:tgtEl>
                                 </p:cBhvr>
                               </p:animEffect>
@@ -9229,33 +8284,9 @@
           </a:p>
         </p:txBody>
       </p:sp>
-      <p:pic>
-        <p:nvPicPr>
-          <p:cNvPr id="3" name="Picture 2" descr="LOGO-OCEO-mark.png"/>
-          <p:cNvPicPr>
-            <a:picLocks noChangeAspect="1"/>
-          </p:cNvPicPr>
-          <p:nvPr/>
-        </p:nvPicPr>
-        <p:blipFill>
-          <a:blip r:embed="rId2"/>
-          <a:stretch>
-            <a:fillRect/>
-          </a:stretch>
-        </p:blipFill>
-        <p:spPr>
-          <a:xfrm>
-            <a:off x="10637215" y="457200"/>
-            <a:ext cx="1051560" cy="954471"/>
-          </a:xfrm>
-          <a:prstGeom prst="rect">
-            <a:avLst/>
-          </a:prstGeom>
-        </p:spPr>
-      </p:pic>
-      <p:sp>
-        <p:nvSpPr>
-          <p:cNvPr id="4" name="Rectangle 3"/>
+      <p:sp>
+        <p:nvSpPr>
+          <p:cNvPr id="3" name="Rectangle 2"/>
           <p:cNvSpPr/>
           <p:nvPr/>
         </p:nvSpPr>
@@ -9299,7 +8330,7 @@
       </p:sp>
       <p:sp>
         <p:nvSpPr>
-          <p:cNvPr id="5" name="TextBox 4"/>
+          <p:cNvPr id="4" name="TextBox 3"/>
           <p:cNvSpPr txBox="1"/>
           <p:nvPr/>
         </p:nvSpPr>
@@ -9349,7 +8380,7 @@
       </p:sp>
       <p:sp>
         <p:nvSpPr>
-          <p:cNvPr id="6" name="Rectangle 5"/>
+          <p:cNvPr id="5" name="Rectangle 4"/>
           <p:cNvSpPr/>
           <p:nvPr/>
         </p:nvSpPr>
@@ -9393,7 +8424,7 @@
       </p:sp>
       <p:sp>
         <p:nvSpPr>
-          <p:cNvPr id="7" name="TextBox 6"/>
+          <p:cNvPr id="6" name="TextBox 5"/>
           <p:cNvSpPr txBox="1"/>
           <p:nvPr/>
         </p:nvSpPr>
@@ -9577,7 +8608,7 @@
                       </p:stCondLst>
                       <p:childTnLst>
                         <p:par>
-                          <p:cTn id="8" presetID="23" presetClass="entr" presetSubtype="16" fill="hold" grpId="0" nodeType="afterEffect">
+                          <p:cTn id="6" presetID="10" presetClass="entr" presetSubtype="0" fill="hold" grpId="0" nodeType="afterEffect">
                             <p:stCondLst>
                               <p:cond delay="0"/>
                             </p:stCondLst>
@@ -9590,88 +8621,7 @@
                                     </p:stCondLst>
                                   </p:cTn>
                                   <p:tgtEl>
-                                    <p:spTgt spid="3"/>
-                                  </p:tgtEl>
-                                  <p:attrNameLst>
-                                    <p:attrName>style.visibility</p:attrName>
-                                  </p:attrNameLst>
-                                </p:cBhvr>
-                                <p:to>
-                                  <p:strVal val="visible"/>
-                                </p:to>
-                              </p:set>
-                              <p:anim calcmode="lin" valueType="num">
-                                <p:cBhvr additive="base">
-                                  <p:cTn id="5" dur="600" fill="hold"/>
-                                  <p:tgtEl>
-                                    <p:spTgt spid="3"/>
-                                  </p:tgtEl>
-                                  <p:attrNameLst>
-                                    <p:attrName>ppt_w</p:attrName>
-                                  </p:attrNameLst>
-                                </p:cBhvr>
-                                <p:tavLst>
-                                  <p:tav tm="0">
-                                    <p:val>
-                                      <p:fltVal val="0.3"/>
-                                    </p:val>
-                                  </p:tav>
-                                  <p:tav tm="100000">
-                                    <p:val>
-                                      <p:fltVal val="1"/>
-                                    </p:val>
-                                  </p:tav>
-                                </p:tavLst>
-                              </p:anim>
-                              <p:anim calcmode="lin" valueType="num">
-                                <p:cBhvr additive="base">
-                                  <p:cTn id="6" dur="600" fill="hold"/>
-                                  <p:tgtEl>
-                                    <p:spTgt spid="3"/>
-                                  </p:tgtEl>
-                                  <p:attrNameLst>
-                                    <p:attrName>ppt_h</p:attrName>
-                                  </p:attrNameLst>
-                                </p:cBhvr>
-                                <p:tavLst>
-                                  <p:tav tm="0">
-                                    <p:val>
-                                      <p:fltVal val="0.3"/>
-                                    </p:val>
-                                  </p:tav>
-                                  <p:tav tm="100000">
-                                    <p:val>
-                                      <p:fltVal val="1"/>
-                                    </p:val>
-                                  </p:tav>
-                                </p:tavLst>
-                              </p:anim>
-                              <p:animEffect transition="in" filter="fade">
-                                <p:cBhvr>
-                                  <p:cTn id="7" dur="600"/>
-                                  <p:tgtEl>
-                                    <p:spTgt spid="3"/>
-                                  </p:tgtEl>
-                                </p:cBhvr>
-                              </p:animEffect>
-                            </p:childTnLst>
-                          </p:cTn>
-                        </p:par>
-                        <p:par>
-                          <p:cTn id="11" presetID="10" presetClass="entr" presetSubtype="0" fill="hold" grpId="0" nodeType="afterEffect">
-                            <p:stCondLst>
-                              <p:cond delay="350"/>
-                            </p:stCondLst>
-                            <p:childTnLst>
-                              <p:set>
-                                <p:cBhvr>
-                                  <p:cTn id="9" dur="1" fill="hold">
-                                    <p:stCondLst>
-                                      <p:cond delay="0"/>
-                                    </p:stCondLst>
-                                  </p:cTn>
-                                  <p:tgtEl>
-                                    <p:spTgt spid="5"/>
+                                    <p:spTgt spid="4"/>
                                   </p:tgtEl>
                                   <p:attrNameLst>
                                     <p:attrName>style.visibility</p:attrName>
@@ -9683,9 +8633,9 @@
                               </p:set>
                               <p:animEffect transition="in" filter="fade">
                                 <p:cBhvr>
-                                  <p:cTn id="10" dur="400"/>
+                                  <p:cTn id="5" dur="400"/>
                                   <p:tgtEl>
-                                    <p:spTgt spid="5"/>
+                                    <p:spTgt spid="4"/>
                                   </p:tgtEl>
                                 </p:cBhvr>
                               </p:animEffect>
@@ -9693,20 +8643,20 @@
                           </p:cTn>
                         </p:par>
                         <p:par>
-                          <p:cTn id="14" presetID="10" presetClass="entr" presetSubtype="0" fill="hold" grpId="0" nodeType="afterEffect">
+                          <p:cTn id="9" presetID="10" presetClass="entr" presetSubtype="0" fill="hold" grpId="0" nodeType="afterEffect">
                             <p:stCondLst>
-                              <p:cond delay="600"/>
+                              <p:cond delay="250"/>
                             </p:stCondLst>
                             <p:childTnLst>
                               <p:set>
                                 <p:cBhvr>
-                                  <p:cTn id="12" dur="1" fill="hold">
+                                  <p:cTn id="7" dur="1" fill="hold">
                                     <p:stCondLst>
                                       <p:cond delay="0"/>
                                     </p:stCondLst>
                                   </p:cTn>
                                   <p:tgtEl>
-                                    <p:spTgt spid="7"/>
+                                    <p:spTgt spid="6"/>
                                   </p:tgtEl>
                                   <p:attrNameLst>
                                     <p:attrName>style.visibility</p:attrName>
@@ -9718,9 +8668,9 @@
                               </p:set>
                               <p:animEffect transition="in" filter="fade">
                                 <p:cBhvr>
-                                  <p:cTn id="13" dur="400"/>
+                                  <p:cTn id="8" dur="400"/>
                                   <p:tgtEl>
-                                    <p:spTgt spid="7"/>
+                                    <p:spTgt spid="6"/>
                                   </p:tgtEl>
                                 </p:cBhvr>
                               </p:animEffect>
@@ -9809,33 +8759,9 @@
           </a:p>
         </p:txBody>
       </p:sp>
-      <p:pic>
-        <p:nvPicPr>
-          <p:cNvPr id="3" name="Picture 2" descr="LOGO-OCEO-mark.png"/>
-          <p:cNvPicPr>
-            <a:picLocks noChangeAspect="1"/>
-          </p:cNvPicPr>
-          <p:nvPr/>
-        </p:nvPicPr>
-        <p:blipFill>
-          <a:blip r:embed="rId2"/>
-          <a:stretch>
-            <a:fillRect/>
-          </a:stretch>
-        </p:blipFill>
-        <p:spPr>
-          <a:xfrm>
-            <a:off x="10637215" y="457200"/>
-            <a:ext cx="1051560" cy="954471"/>
-          </a:xfrm>
-          <a:prstGeom prst="rect">
-            <a:avLst/>
-          </a:prstGeom>
-        </p:spPr>
-      </p:pic>
-      <p:sp>
-        <p:nvSpPr>
-          <p:cNvPr id="4" name="Rectangle 3"/>
+      <p:sp>
+        <p:nvSpPr>
+          <p:cNvPr id="3" name="Rectangle 2"/>
           <p:cNvSpPr/>
           <p:nvPr/>
         </p:nvSpPr>
@@ -9879,7 +8805,7 @@
       </p:sp>
       <p:sp>
         <p:nvSpPr>
-          <p:cNvPr id="5" name="TextBox 4"/>
+          <p:cNvPr id="4" name="TextBox 3"/>
           <p:cNvSpPr txBox="1"/>
           <p:nvPr/>
         </p:nvSpPr>
@@ -9929,7 +8855,7 @@
       </p:sp>
       <p:sp>
         <p:nvSpPr>
-          <p:cNvPr id="6" name="Rectangle 5"/>
+          <p:cNvPr id="5" name="Rectangle 4"/>
           <p:cNvSpPr/>
           <p:nvPr/>
         </p:nvSpPr>
@@ -9973,7 +8899,7 @@
       </p:sp>
       <p:sp>
         <p:nvSpPr>
-          <p:cNvPr id="7" name="TextBox 6"/>
+          <p:cNvPr id="6" name="TextBox 5"/>
           <p:cNvSpPr txBox="1"/>
           <p:nvPr/>
         </p:nvSpPr>
@@ -10157,7 +9083,7 @@
                       </p:stCondLst>
                       <p:childTnLst>
                         <p:par>
-                          <p:cTn id="8" presetID="23" presetClass="entr" presetSubtype="16" fill="hold" grpId="0" nodeType="afterEffect">
+                          <p:cTn id="6" presetID="10" presetClass="entr" presetSubtype="0" fill="hold" grpId="0" nodeType="afterEffect">
                             <p:stCondLst>
                               <p:cond delay="0"/>
                             </p:stCondLst>
@@ -10170,88 +9096,7 @@
                                     </p:stCondLst>
                                   </p:cTn>
                                   <p:tgtEl>
-                                    <p:spTgt spid="3"/>
-                                  </p:tgtEl>
-                                  <p:attrNameLst>
-                                    <p:attrName>style.visibility</p:attrName>
-                                  </p:attrNameLst>
-                                </p:cBhvr>
-                                <p:to>
-                                  <p:strVal val="visible"/>
-                                </p:to>
-                              </p:set>
-                              <p:anim calcmode="lin" valueType="num">
-                                <p:cBhvr additive="base">
-                                  <p:cTn id="5" dur="600" fill="hold"/>
-                                  <p:tgtEl>
-                                    <p:spTgt spid="3"/>
-                                  </p:tgtEl>
-                                  <p:attrNameLst>
-                                    <p:attrName>ppt_w</p:attrName>
-                                  </p:attrNameLst>
-                                </p:cBhvr>
-                                <p:tavLst>
-                                  <p:tav tm="0">
-                                    <p:val>
-                                      <p:fltVal val="0.3"/>
-                                    </p:val>
-                                  </p:tav>
-                                  <p:tav tm="100000">
-                                    <p:val>
-                                      <p:fltVal val="1"/>
-                                    </p:val>
-                                  </p:tav>
-                                </p:tavLst>
-                              </p:anim>
-                              <p:anim calcmode="lin" valueType="num">
-                                <p:cBhvr additive="base">
-                                  <p:cTn id="6" dur="600" fill="hold"/>
-                                  <p:tgtEl>
-                                    <p:spTgt spid="3"/>
-                                  </p:tgtEl>
-                                  <p:attrNameLst>
-                                    <p:attrName>ppt_h</p:attrName>
-                                  </p:attrNameLst>
-                                </p:cBhvr>
-                                <p:tavLst>
-                                  <p:tav tm="0">
-                                    <p:val>
-                                      <p:fltVal val="0.3"/>
-                                    </p:val>
-                                  </p:tav>
-                                  <p:tav tm="100000">
-                                    <p:val>
-                                      <p:fltVal val="1"/>
-                                    </p:val>
-                                  </p:tav>
-                                </p:tavLst>
-                              </p:anim>
-                              <p:animEffect transition="in" filter="fade">
-                                <p:cBhvr>
-                                  <p:cTn id="7" dur="600"/>
-                                  <p:tgtEl>
-                                    <p:spTgt spid="3"/>
-                                  </p:tgtEl>
-                                </p:cBhvr>
-                              </p:animEffect>
-                            </p:childTnLst>
-                          </p:cTn>
-                        </p:par>
-                        <p:par>
-                          <p:cTn id="11" presetID="10" presetClass="entr" presetSubtype="0" fill="hold" grpId="0" nodeType="afterEffect">
-                            <p:stCondLst>
-                              <p:cond delay="350"/>
-                            </p:stCondLst>
-                            <p:childTnLst>
-                              <p:set>
-                                <p:cBhvr>
-                                  <p:cTn id="9" dur="1" fill="hold">
-                                    <p:stCondLst>
-                                      <p:cond delay="0"/>
-                                    </p:stCondLst>
-                                  </p:cTn>
-                                  <p:tgtEl>
-                                    <p:spTgt spid="5"/>
+                                    <p:spTgt spid="4"/>
                                   </p:tgtEl>
                                   <p:attrNameLst>
                                     <p:attrName>style.visibility</p:attrName>
@@ -10263,9 +9108,9 @@
                               </p:set>
                               <p:animEffect transition="in" filter="fade">
                                 <p:cBhvr>
-                                  <p:cTn id="10" dur="400"/>
+                                  <p:cTn id="5" dur="400"/>
                                   <p:tgtEl>
-                                    <p:spTgt spid="5"/>
+                                    <p:spTgt spid="4"/>
                                   </p:tgtEl>
                                 </p:cBhvr>
                               </p:animEffect>
@@ -10273,20 +9118,20 @@
                           </p:cTn>
                         </p:par>
                         <p:par>
-                          <p:cTn id="14" presetID="10" presetClass="entr" presetSubtype="0" fill="hold" grpId="0" nodeType="afterEffect">
+                          <p:cTn id="9" presetID="10" presetClass="entr" presetSubtype="0" fill="hold" grpId="0" nodeType="afterEffect">
                             <p:stCondLst>
-                              <p:cond delay="600"/>
+                              <p:cond delay="250"/>
                             </p:stCondLst>
                             <p:childTnLst>
                               <p:set>
                                 <p:cBhvr>
-                                  <p:cTn id="12" dur="1" fill="hold">
+                                  <p:cTn id="7" dur="1" fill="hold">
                                     <p:stCondLst>
                                       <p:cond delay="0"/>
                                     </p:stCondLst>
                                   </p:cTn>
                                   <p:tgtEl>
-                                    <p:spTgt spid="7"/>
+                                    <p:spTgt spid="6"/>
                                   </p:tgtEl>
                                   <p:attrNameLst>
                                     <p:attrName>style.visibility</p:attrName>
@@ -10298,9 +9143,9 @@
                               </p:set>
                               <p:animEffect transition="in" filter="fade">
                                 <p:cBhvr>
-                                  <p:cTn id="13" dur="400"/>
+                                  <p:cTn id="8" dur="400"/>
                                   <p:tgtEl>
-                                    <p:spTgt spid="7"/>
+                                    <p:spTgt spid="6"/>
                                   </p:tgtEl>
                                 </p:cBhvr>
                               </p:animEffect>
@@ -10389,39 +9234,15 @@
           </a:p>
         </p:txBody>
       </p:sp>
-      <p:pic>
-        <p:nvPicPr>
-          <p:cNvPr id="3" name="Picture 2" descr="LOGO-OCEO.png"/>
-          <p:cNvPicPr>
-            <a:picLocks noChangeAspect="1"/>
-          </p:cNvPicPr>
+      <p:sp>
+        <p:nvSpPr>
+          <p:cNvPr id="3" name="Rectangle 2"/>
+          <p:cNvSpPr/>
           <p:nvPr/>
-        </p:nvPicPr>
-        <p:blipFill>
-          <a:blip r:embed="rId2"/>
-          <a:stretch>
-            <a:fillRect/>
-          </a:stretch>
-        </p:blipFill>
+        </p:nvSpPr>
         <p:spPr>
           <a:xfrm>
-            <a:off x="868680" y="777240"/>
-            <a:ext cx="2468880" cy="1991869"/>
-          </a:xfrm>
-          <a:prstGeom prst="rect">
-            <a:avLst/>
-          </a:prstGeom>
-        </p:spPr>
-      </p:pic>
-      <p:sp>
-        <p:nvSpPr>
-          <p:cNvPr id="4" name="Rectangle 3"/>
-          <p:cNvSpPr/>
-          <p:nvPr/>
-        </p:nvSpPr>
-        <p:spPr>
-          <a:xfrm>
-            <a:off x="914400" y="3977639"/>
+            <a:off x="914400" y="2651760"/>
             <a:ext cx="2011680" cy="38100"/>
           </a:xfrm>
           <a:prstGeom prst="rect">
@@ -10459,13 +9280,13 @@
       </p:sp>
       <p:sp>
         <p:nvSpPr>
-          <p:cNvPr id="5" name="TextBox 4"/>
+          <p:cNvPr id="4" name="TextBox 3"/>
           <p:cNvSpPr txBox="1"/>
           <p:nvPr/>
         </p:nvSpPr>
         <p:spPr>
           <a:xfrm>
-            <a:off x="896112" y="4206240"/>
+            <a:off x="896112" y="2880360"/>
             <a:ext cx="10058400" cy="2194560"/>
           </a:xfrm>
           <a:prstGeom prst="rect">
@@ -10549,7 +9370,7 @@
                       </p:stCondLst>
                       <p:childTnLst>
                         <p:par>
-                          <p:cTn id="8" presetID="23" presetClass="entr" presetSubtype="16" fill="hold" grpId="0" nodeType="afterEffect">
+                          <p:cTn id="6" presetID="10" presetClass="entr" presetSubtype="0" fill="hold" grpId="0" nodeType="afterEffect">
                             <p:stCondLst>
                               <p:cond delay="0"/>
                             </p:stCondLst>
@@ -10562,88 +9383,7 @@
                                     </p:stCondLst>
                                   </p:cTn>
                                   <p:tgtEl>
-                                    <p:spTgt spid="3"/>
-                                  </p:tgtEl>
-                                  <p:attrNameLst>
-                                    <p:attrName>style.visibility</p:attrName>
-                                  </p:attrNameLst>
-                                </p:cBhvr>
-                                <p:to>
-                                  <p:strVal val="visible"/>
-                                </p:to>
-                              </p:set>
-                              <p:anim calcmode="lin" valueType="num">
-                                <p:cBhvr additive="base">
-                                  <p:cTn id="5" dur="600" fill="hold"/>
-                                  <p:tgtEl>
-                                    <p:spTgt spid="3"/>
-                                  </p:tgtEl>
-                                  <p:attrNameLst>
-                                    <p:attrName>ppt_w</p:attrName>
-                                  </p:attrNameLst>
-                                </p:cBhvr>
-                                <p:tavLst>
-                                  <p:tav tm="0">
-                                    <p:val>
-                                      <p:fltVal val="0.3"/>
-                                    </p:val>
-                                  </p:tav>
-                                  <p:tav tm="100000">
-                                    <p:val>
-                                      <p:fltVal val="1"/>
-                                    </p:val>
-                                  </p:tav>
-                                </p:tavLst>
-                              </p:anim>
-                              <p:anim calcmode="lin" valueType="num">
-                                <p:cBhvr additive="base">
-                                  <p:cTn id="6" dur="600" fill="hold"/>
-                                  <p:tgtEl>
-                                    <p:spTgt spid="3"/>
-                                  </p:tgtEl>
-                                  <p:attrNameLst>
-                                    <p:attrName>ppt_h</p:attrName>
-                                  </p:attrNameLst>
-                                </p:cBhvr>
-                                <p:tavLst>
-                                  <p:tav tm="0">
-                                    <p:val>
-                                      <p:fltVal val="0.3"/>
-                                    </p:val>
-                                  </p:tav>
-                                  <p:tav tm="100000">
-                                    <p:val>
-                                      <p:fltVal val="1"/>
-                                    </p:val>
-                                  </p:tav>
-                                </p:tavLst>
-                              </p:anim>
-                              <p:animEffect transition="in" filter="fade">
-                                <p:cBhvr>
-                                  <p:cTn id="7" dur="600"/>
-                                  <p:tgtEl>
-                                    <p:spTgt spid="3"/>
-                                  </p:tgtEl>
-                                </p:cBhvr>
-                              </p:animEffect>
-                            </p:childTnLst>
-                          </p:cTn>
-                        </p:par>
-                        <p:par>
-                          <p:cTn id="11" presetID="10" presetClass="entr" presetSubtype="0" fill="hold" grpId="0" nodeType="afterEffect">
-                            <p:stCondLst>
-                              <p:cond delay="350"/>
-                            </p:stCondLst>
-                            <p:childTnLst>
-                              <p:set>
-                                <p:cBhvr>
-                                  <p:cTn id="9" dur="1" fill="hold">
-                                    <p:stCondLst>
-                                      <p:cond delay="0"/>
-                                    </p:stCondLst>
-                                  </p:cTn>
-                                  <p:tgtEl>
-                                    <p:spTgt spid="5"/>
+                                    <p:spTgt spid="4"/>
                                   </p:tgtEl>
                                   <p:attrNameLst>
                                     <p:attrName>style.visibility</p:attrName>
@@ -10655,9 +9395,9 @@
                               </p:set>
                               <p:animEffect transition="in" filter="fade">
                                 <p:cBhvr>
-                                  <p:cTn id="10" dur="400"/>
+                                  <p:cTn id="5" dur="400"/>
                                   <p:tgtEl>
-                                    <p:spTgt spid="5"/>
+                                    <p:spTgt spid="4"/>
                                   </p:tgtEl>
                                 </p:cBhvr>
                               </p:animEffect>
@@ -10746,33 +9486,9 @@
           </a:p>
         </p:txBody>
       </p:sp>
-      <p:pic>
-        <p:nvPicPr>
-          <p:cNvPr id="3" name="Picture 2" descr="LOGO-OCEO-mark.png"/>
-          <p:cNvPicPr>
-            <a:picLocks noChangeAspect="1"/>
-          </p:cNvPicPr>
-          <p:nvPr/>
-        </p:nvPicPr>
-        <p:blipFill>
-          <a:blip r:embed="rId2"/>
-          <a:stretch>
-            <a:fillRect/>
-          </a:stretch>
-        </p:blipFill>
-        <p:spPr>
-          <a:xfrm>
-            <a:off x="10637215" y="457200"/>
-            <a:ext cx="1051560" cy="954471"/>
-          </a:xfrm>
-          <a:prstGeom prst="rect">
-            <a:avLst/>
-          </a:prstGeom>
-        </p:spPr>
-      </p:pic>
-      <p:sp>
-        <p:nvSpPr>
-          <p:cNvPr id="4" name="Rectangle 3"/>
+      <p:sp>
+        <p:nvSpPr>
+          <p:cNvPr id="3" name="Rectangle 2"/>
           <p:cNvSpPr/>
           <p:nvPr/>
         </p:nvSpPr>
@@ -10816,7 +9532,7 @@
       </p:sp>
       <p:sp>
         <p:nvSpPr>
-          <p:cNvPr id="5" name="TextBox 4"/>
+          <p:cNvPr id="4" name="TextBox 3"/>
           <p:cNvSpPr txBox="1"/>
           <p:nvPr/>
         </p:nvSpPr>
@@ -10866,7 +9582,7 @@
       </p:sp>
       <p:sp>
         <p:nvSpPr>
-          <p:cNvPr id="6" name="Rectangle 5"/>
+          <p:cNvPr id="5" name="Rectangle 4"/>
           <p:cNvSpPr/>
           <p:nvPr/>
         </p:nvSpPr>
@@ -10910,7 +9626,7 @@
       </p:sp>
       <p:sp>
         <p:nvSpPr>
-          <p:cNvPr id="7" name="TextBox 6"/>
+          <p:cNvPr id="6" name="TextBox 5"/>
           <p:cNvSpPr txBox="1"/>
           <p:nvPr/>
         </p:nvSpPr>
@@ -11066,7 +9782,7 @@
                       </p:stCondLst>
                       <p:childTnLst>
                         <p:par>
-                          <p:cTn id="8" presetID="23" presetClass="entr" presetSubtype="16" fill="hold" grpId="0" nodeType="afterEffect">
+                          <p:cTn id="6" presetID="10" presetClass="entr" presetSubtype="0" fill="hold" grpId="0" nodeType="afterEffect">
                             <p:stCondLst>
                               <p:cond delay="0"/>
                             </p:stCondLst>
@@ -11079,88 +9795,7 @@
                                     </p:stCondLst>
                                   </p:cTn>
                                   <p:tgtEl>
-                                    <p:spTgt spid="3"/>
-                                  </p:tgtEl>
-                                  <p:attrNameLst>
-                                    <p:attrName>style.visibility</p:attrName>
-                                  </p:attrNameLst>
-                                </p:cBhvr>
-                                <p:to>
-                                  <p:strVal val="visible"/>
-                                </p:to>
-                              </p:set>
-                              <p:anim calcmode="lin" valueType="num">
-                                <p:cBhvr additive="base">
-                                  <p:cTn id="5" dur="600" fill="hold"/>
-                                  <p:tgtEl>
-                                    <p:spTgt spid="3"/>
-                                  </p:tgtEl>
-                                  <p:attrNameLst>
-                                    <p:attrName>ppt_w</p:attrName>
-                                  </p:attrNameLst>
-                                </p:cBhvr>
-                                <p:tavLst>
-                                  <p:tav tm="0">
-                                    <p:val>
-                                      <p:fltVal val="0.3"/>
-                                    </p:val>
-                                  </p:tav>
-                                  <p:tav tm="100000">
-                                    <p:val>
-                                      <p:fltVal val="1"/>
-                                    </p:val>
-                                  </p:tav>
-                                </p:tavLst>
-                              </p:anim>
-                              <p:anim calcmode="lin" valueType="num">
-                                <p:cBhvr additive="base">
-                                  <p:cTn id="6" dur="600" fill="hold"/>
-                                  <p:tgtEl>
-                                    <p:spTgt spid="3"/>
-                                  </p:tgtEl>
-                                  <p:attrNameLst>
-                                    <p:attrName>ppt_h</p:attrName>
-                                  </p:attrNameLst>
-                                </p:cBhvr>
-                                <p:tavLst>
-                                  <p:tav tm="0">
-                                    <p:val>
-                                      <p:fltVal val="0.3"/>
-                                    </p:val>
-                                  </p:tav>
-                                  <p:tav tm="100000">
-                                    <p:val>
-                                      <p:fltVal val="1"/>
-                                    </p:val>
-                                  </p:tav>
-                                </p:tavLst>
-                              </p:anim>
-                              <p:animEffect transition="in" filter="fade">
-                                <p:cBhvr>
-                                  <p:cTn id="7" dur="600"/>
-                                  <p:tgtEl>
-                                    <p:spTgt spid="3"/>
-                                  </p:tgtEl>
-                                </p:cBhvr>
-                              </p:animEffect>
-                            </p:childTnLst>
-                          </p:cTn>
-                        </p:par>
-                        <p:par>
-                          <p:cTn id="11" presetID="10" presetClass="entr" presetSubtype="0" fill="hold" grpId="0" nodeType="afterEffect">
-                            <p:stCondLst>
-                              <p:cond delay="350"/>
-                            </p:stCondLst>
-                            <p:childTnLst>
-                              <p:set>
-                                <p:cBhvr>
-                                  <p:cTn id="9" dur="1" fill="hold">
-                                    <p:stCondLst>
-                                      <p:cond delay="0"/>
-                                    </p:stCondLst>
-                                  </p:cTn>
-                                  <p:tgtEl>
-                                    <p:spTgt spid="5"/>
+                                    <p:spTgt spid="4"/>
                                   </p:tgtEl>
                                   <p:attrNameLst>
                                     <p:attrName>style.visibility</p:attrName>
@@ -11172,9 +9807,9 @@
                               </p:set>
                               <p:animEffect transition="in" filter="fade">
                                 <p:cBhvr>
-                                  <p:cTn id="10" dur="400"/>
+                                  <p:cTn id="5" dur="400"/>
                                   <p:tgtEl>
-                                    <p:spTgt spid="5"/>
+                                    <p:spTgt spid="4"/>
                                   </p:tgtEl>
                                 </p:cBhvr>
                               </p:animEffect>
@@ -11182,20 +9817,20 @@
                           </p:cTn>
                         </p:par>
                         <p:par>
-                          <p:cTn id="14" presetID="10" presetClass="entr" presetSubtype="0" fill="hold" grpId="0" nodeType="afterEffect">
+                          <p:cTn id="9" presetID="10" presetClass="entr" presetSubtype="0" fill="hold" grpId="0" nodeType="afterEffect">
                             <p:stCondLst>
-                              <p:cond delay="600"/>
+                              <p:cond delay="250"/>
                             </p:stCondLst>
                             <p:childTnLst>
                               <p:set>
                                 <p:cBhvr>
-                                  <p:cTn id="12" dur="1" fill="hold">
+                                  <p:cTn id="7" dur="1" fill="hold">
                                     <p:stCondLst>
                                       <p:cond delay="0"/>
                                     </p:stCondLst>
                                   </p:cTn>
                                   <p:tgtEl>
-                                    <p:spTgt spid="7"/>
+                                    <p:spTgt spid="6"/>
                                   </p:tgtEl>
                                   <p:attrNameLst>
                                     <p:attrName>style.visibility</p:attrName>
@@ -11207,9 +9842,9 @@
                               </p:set>
                               <p:animEffect transition="in" filter="fade">
                                 <p:cBhvr>
-                                  <p:cTn id="13" dur="400"/>
+                                  <p:cTn id="8" dur="400"/>
                                   <p:tgtEl>
-                                    <p:spTgt spid="7"/>
+                                    <p:spTgt spid="6"/>
                                   </p:tgtEl>
                                 </p:cBhvr>
                               </p:animEffect>
@@ -11298,33 +9933,9 @@
           </a:p>
         </p:txBody>
       </p:sp>
-      <p:pic>
-        <p:nvPicPr>
-          <p:cNvPr id="3" name="Picture 2" descr="LOGO-OCEO-mark.png"/>
-          <p:cNvPicPr>
-            <a:picLocks noChangeAspect="1"/>
-          </p:cNvPicPr>
-          <p:nvPr/>
-        </p:nvPicPr>
-        <p:blipFill>
-          <a:blip r:embed="rId2"/>
-          <a:stretch>
-            <a:fillRect/>
-          </a:stretch>
-        </p:blipFill>
-        <p:spPr>
-          <a:xfrm>
-            <a:off x="10637215" y="457200"/>
-            <a:ext cx="1051560" cy="954471"/>
-          </a:xfrm>
-          <a:prstGeom prst="rect">
-            <a:avLst/>
-          </a:prstGeom>
-        </p:spPr>
-      </p:pic>
-      <p:sp>
-        <p:nvSpPr>
-          <p:cNvPr id="4" name="Rectangle 3"/>
+      <p:sp>
+        <p:nvSpPr>
+          <p:cNvPr id="3" name="Rectangle 2"/>
           <p:cNvSpPr/>
           <p:nvPr/>
         </p:nvSpPr>
@@ -11368,7 +9979,7 @@
       </p:sp>
       <p:sp>
         <p:nvSpPr>
-          <p:cNvPr id="5" name="TextBox 4"/>
+          <p:cNvPr id="4" name="TextBox 3"/>
           <p:cNvSpPr txBox="1"/>
           <p:nvPr/>
         </p:nvSpPr>
@@ -11418,7 +10029,7 @@
       </p:sp>
       <p:sp>
         <p:nvSpPr>
-          <p:cNvPr id="6" name="Rectangle 5"/>
+          <p:cNvPr id="5" name="Rectangle 4"/>
           <p:cNvSpPr/>
           <p:nvPr/>
         </p:nvSpPr>
@@ -11462,7 +10073,7 @@
       </p:sp>
       <p:sp>
         <p:nvSpPr>
-          <p:cNvPr id="7" name="TextBox 6"/>
+          <p:cNvPr id="6" name="TextBox 5"/>
           <p:cNvSpPr txBox="1"/>
           <p:nvPr/>
         </p:nvSpPr>
@@ -11618,7 +10229,7 @@
                       </p:stCondLst>
                       <p:childTnLst>
                         <p:par>
-                          <p:cTn id="8" presetID="23" presetClass="entr" presetSubtype="16" fill="hold" grpId="0" nodeType="afterEffect">
+                          <p:cTn id="6" presetID="10" presetClass="entr" presetSubtype="0" fill="hold" grpId="0" nodeType="afterEffect">
                             <p:stCondLst>
                               <p:cond delay="0"/>
                             </p:stCondLst>
@@ -11631,88 +10242,7 @@
                                     </p:stCondLst>
                                   </p:cTn>
                                   <p:tgtEl>
-                                    <p:spTgt spid="3"/>
-                                  </p:tgtEl>
-                                  <p:attrNameLst>
-                                    <p:attrName>style.visibility</p:attrName>
-                                  </p:attrNameLst>
-                                </p:cBhvr>
-                                <p:to>
-                                  <p:strVal val="visible"/>
-                                </p:to>
-                              </p:set>
-                              <p:anim calcmode="lin" valueType="num">
-                                <p:cBhvr additive="base">
-                                  <p:cTn id="5" dur="600" fill="hold"/>
-                                  <p:tgtEl>
-                                    <p:spTgt spid="3"/>
-                                  </p:tgtEl>
-                                  <p:attrNameLst>
-                                    <p:attrName>ppt_w</p:attrName>
-                                  </p:attrNameLst>
-                                </p:cBhvr>
-                                <p:tavLst>
-                                  <p:tav tm="0">
-                                    <p:val>
-                                      <p:fltVal val="0.3"/>
-                                    </p:val>
-                                  </p:tav>
-                                  <p:tav tm="100000">
-                                    <p:val>
-                                      <p:fltVal val="1"/>
-                                    </p:val>
-                                  </p:tav>
-                                </p:tavLst>
-                              </p:anim>
-                              <p:anim calcmode="lin" valueType="num">
-                                <p:cBhvr additive="base">
-                                  <p:cTn id="6" dur="600" fill="hold"/>
-                                  <p:tgtEl>
-                                    <p:spTgt spid="3"/>
-                                  </p:tgtEl>
-                                  <p:attrNameLst>
-                                    <p:attrName>ppt_h</p:attrName>
-                                  </p:attrNameLst>
-                                </p:cBhvr>
-                                <p:tavLst>
-                                  <p:tav tm="0">
-                                    <p:val>
-                                      <p:fltVal val="0.3"/>
-                                    </p:val>
-                                  </p:tav>
-                                  <p:tav tm="100000">
-                                    <p:val>
-                                      <p:fltVal val="1"/>
-                                    </p:val>
-                                  </p:tav>
-                                </p:tavLst>
-                              </p:anim>
-                              <p:animEffect transition="in" filter="fade">
-                                <p:cBhvr>
-                                  <p:cTn id="7" dur="600"/>
-                                  <p:tgtEl>
-                                    <p:spTgt spid="3"/>
-                                  </p:tgtEl>
-                                </p:cBhvr>
-                              </p:animEffect>
-                            </p:childTnLst>
-                          </p:cTn>
-                        </p:par>
-                        <p:par>
-                          <p:cTn id="11" presetID="10" presetClass="entr" presetSubtype="0" fill="hold" grpId="0" nodeType="afterEffect">
-                            <p:stCondLst>
-                              <p:cond delay="350"/>
-                            </p:stCondLst>
-                            <p:childTnLst>
-                              <p:set>
-                                <p:cBhvr>
-                                  <p:cTn id="9" dur="1" fill="hold">
-                                    <p:stCondLst>
-                                      <p:cond delay="0"/>
-                                    </p:stCondLst>
-                                  </p:cTn>
-                                  <p:tgtEl>
-                                    <p:spTgt spid="5"/>
+                                    <p:spTgt spid="4"/>
                                   </p:tgtEl>
                                   <p:attrNameLst>
                                     <p:attrName>style.visibility</p:attrName>
@@ -11724,9 +10254,9 @@
                               </p:set>
                               <p:animEffect transition="in" filter="fade">
                                 <p:cBhvr>
-                                  <p:cTn id="10" dur="400"/>
+                                  <p:cTn id="5" dur="400"/>
                                   <p:tgtEl>
-                                    <p:spTgt spid="5"/>
+                                    <p:spTgt spid="4"/>
                                   </p:tgtEl>
                                 </p:cBhvr>
                               </p:animEffect>
@@ -11734,20 +10264,20 @@
                           </p:cTn>
                         </p:par>
                         <p:par>
-                          <p:cTn id="14" presetID="10" presetClass="entr" presetSubtype="0" fill="hold" grpId="0" nodeType="afterEffect">
+                          <p:cTn id="9" presetID="10" presetClass="entr" presetSubtype="0" fill="hold" grpId="0" nodeType="afterEffect">
                             <p:stCondLst>
-                              <p:cond delay="600"/>
+                              <p:cond delay="250"/>
                             </p:stCondLst>
                             <p:childTnLst>
                               <p:set>
                                 <p:cBhvr>
-                                  <p:cTn id="12" dur="1" fill="hold">
+                                  <p:cTn id="7" dur="1" fill="hold">
                                     <p:stCondLst>
                                       <p:cond delay="0"/>
                                     </p:stCondLst>
                                   </p:cTn>
                                   <p:tgtEl>
-                                    <p:spTgt spid="7"/>
+                                    <p:spTgt spid="6"/>
                                   </p:tgtEl>
                                   <p:attrNameLst>
                                     <p:attrName>style.visibility</p:attrName>
@@ -11759,9 +10289,9 @@
                               </p:set>
                               <p:animEffect transition="in" filter="fade">
                                 <p:cBhvr>
-                                  <p:cTn id="13" dur="400"/>
+                                  <p:cTn id="8" dur="400"/>
                                   <p:tgtEl>
-                                    <p:spTgt spid="7"/>
+                                    <p:spTgt spid="6"/>
                                   </p:tgtEl>
                                 </p:cBhvr>
                               </p:animEffect>
@@ -11850,33 +10380,9 @@
           </a:p>
         </p:txBody>
       </p:sp>
-      <p:pic>
-        <p:nvPicPr>
-          <p:cNvPr id="3" name="Picture 2" descr="LOGO-OCEO-mark.png"/>
-          <p:cNvPicPr>
-            <a:picLocks noChangeAspect="1"/>
-          </p:cNvPicPr>
-          <p:nvPr/>
-        </p:nvPicPr>
-        <p:blipFill>
-          <a:blip r:embed="rId2"/>
-          <a:stretch>
-            <a:fillRect/>
-          </a:stretch>
-        </p:blipFill>
-        <p:spPr>
-          <a:xfrm>
-            <a:off x="10637215" y="457200"/>
-            <a:ext cx="1051560" cy="954471"/>
-          </a:xfrm>
-          <a:prstGeom prst="rect">
-            <a:avLst/>
-          </a:prstGeom>
-        </p:spPr>
-      </p:pic>
-      <p:sp>
-        <p:nvSpPr>
-          <p:cNvPr id="4" name="Rectangle 3"/>
+      <p:sp>
+        <p:nvSpPr>
+          <p:cNvPr id="3" name="Rectangle 2"/>
           <p:cNvSpPr/>
           <p:nvPr/>
         </p:nvSpPr>
@@ -11920,7 +10426,7 @@
       </p:sp>
       <p:sp>
         <p:nvSpPr>
-          <p:cNvPr id="5" name="TextBox 4"/>
+          <p:cNvPr id="4" name="TextBox 3"/>
           <p:cNvSpPr txBox="1"/>
           <p:nvPr/>
         </p:nvSpPr>
@@ -11970,7 +10476,7 @@
       </p:sp>
       <p:sp>
         <p:nvSpPr>
-          <p:cNvPr id="6" name="Rectangle 5"/>
+          <p:cNvPr id="5" name="Rectangle 4"/>
           <p:cNvSpPr/>
           <p:nvPr/>
         </p:nvSpPr>
@@ -12014,7 +10520,7 @@
       </p:sp>
       <p:graphicFrame>
         <p:nvGraphicFramePr>
-          <p:cNvPr id="7" name="Table 6"/>
+          <p:cNvPr id="6" name="Table 5"/>
           <p:cNvGraphicFramePr>
             <a:graphicFrameLocks noGrp="1"/>
           </p:cNvGraphicFramePr>
@@ -12232,7 +10738,7 @@
       </p:graphicFrame>
       <p:sp>
         <p:nvSpPr>
-          <p:cNvPr id="8" name="TextBox 7"/>
+          <p:cNvPr id="7" name="TextBox 6"/>
           <p:cNvSpPr txBox="1"/>
           <p:nvPr/>
         </p:nvSpPr>
@@ -12308,7 +10814,7 @@
                       </p:stCondLst>
                       <p:childTnLst>
                         <p:par>
-                          <p:cTn id="8" presetID="23" presetClass="entr" presetSubtype="16" fill="hold" grpId="0" nodeType="afterEffect">
+                          <p:cTn id="6" presetID="10" presetClass="entr" presetSubtype="0" fill="hold" grpId="0" nodeType="afterEffect">
                             <p:stCondLst>
                               <p:cond delay="0"/>
                             </p:stCondLst>
@@ -12321,88 +10827,7 @@
                                     </p:stCondLst>
                                   </p:cTn>
                                   <p:tgtEl>
-                                    <p:spTgt spid="3"/>
-                                  </p:tgtEl>
-                                  <p:attrNameLst>
-                                    <p:attrName>style.visibility</p:attrName>
-                                  </p:attrNameLst>
-                                </p:cBhvr>
-                                <p:to>
-                                  <p:strVal val="visible"/>
-                                </p:to>
-                              </p:set>
-                              <p:anim calcmode="lin" valueType="num">
-                                <p:cBhvr additive="base">
-                                  <p:cTn id="5" dur="600" fill="hold"/>
-                                  <p:tgtEl>
-                                    <p:spTgt spid="3"/>
-                                  </p:tgtEl>
-                                  <p:attrNameLst>
-                                    <p:attrName>ppt_w</p:attrName>
-                                  </p:attrNameLst>
-                                </p:cBhvr>
-                                <p:tavLst>
-                                  <p:tav tm="0">
-                                    <p:val>
-                                      <p:fltVal val="0.3"/>
-                                    </p:val>
-                                  </p:tav>
-                                  <p:tav tm="100000">
-                                    <p:val>
-                                      <p:fltVal val="1"/>
-                                    </p:val>
-                                  </p:tav>
-                                </p:tavLst>
-                              </p:anim>
-                              <p:anim calcmode="lin" valueType="num">
-                                <p:cBhvr additive="base">
-                                  <p:cTn id="6" dur="600" fill="hold"/>
-                                  <p:tgtEl>
-                                    <p:spTgt spid="3"/>
-                                  </p:tgtEl>
-                                  <p:attrNameLst>
-                                    <p:attrName>ppt_h</p:attrName>
-                                  </p:attrNameLst>
-                                </p:cBhvr>
-                                <p:tavLst>
-                                  <p:tav tm="0">
-                                    <p:val>
-                                      <p:fltVal val="0.3"/>
-                                    </p:val>
-                                  </p:tav>
-                                  <p:tav tm="100000">
-                                    <p:val>
-                                      <p:fltVal val="1"/>
-                                    </p:val>
-                                  </p:tav>
-                                </p:tavLst>
-                              </p:anim>
-                              <p:animEffect transition="in" filter="fade">
-                                <p:cBhvr>
-                                  <p:cTn id="7" dur="600"/>
-                                  <p:tgtEl>
-                                    <p:spTgt spid="3"/>
-                                  </p:tgtEl>
-                                </p:cBhvr>
-                              </p:animEffect>
-                            </p:childTnLst>
-                          </p:cTn>
-                        </p:par>
-                        <p:par>
-                          <p:cTn id="11" presetID="10" presetClass="entr" presetSubtype="0" fill="hold" grpId="0" nodeType="afterEffect">
-                            <p:stCondLst>
-                              <p:cond delay="350"/>
-                            </p:stCondLst>
-                            <p:childTnLst>
-                              <p:set>
-                                <p:cBhvr>
-                                  <p:cTn id="9" dur="1" fill="hold">
-                                    <p:stCondLst>
-                                      <p:cond delay="0"/>
-                                    </p:stCondLst>
-                                  </p:cTn>
-                                  <p:tgtEl>
-                                    <p:spTgt spid="5"/>
+                                    <p:spTgt spid="4"/>
                                   </p:tgtEl>
                                   <p:attrNameLst>
                                     <p:attrName>style.visibility</p:attrName>
@@ -12414,9 +10839,9 @@
                               </p:set>
                               <p:animEffect transition="in" filter="fade">
                                 <p:cBhvr>
-                                  <p:cTn id="10" dur="400"/>
+                                  <p:cTn id="5" dur="400"/>
                                   <p:tgtEl>
-                                    <p:spTgt spid="5"/>
+                                    <p:spTgt spid="4"/>
                                   </p:tgtEl>
                                 </p:cBhvr>
                               </p:animEffect>
@@ -12424,14 +10849,49 @@
                           </p:cTn>
                         </p:par>
                         <p:par>
-                          <p:cTn id="14" presetID="10" presetClass="entr" presetSubtype="0" fill="hold" grpId="0" nodeType="afterEffect">
+                          <p:cTn id="9" presetID="10" presetClass="entr" presetSubtype="0" fill="hold" grpId="0" nodeType="afterEffect">
                             <p:stCondLst>
-                              <p:cond delay="600"/>
+                              <p:cond delay="250"/>
                             </p:stCondLst>
                             <p:childTnLst>
                               <p:set>
                                 <p:cBhvr>
-                                  <p:cTn id="12" dur="1" fill="hold">
+                                  <p:cTn id="7" dur="1" fill="hold">
+                                    <p:stCondLst>
+                                      <p:cond delay="0"/>
+                                    </p:stCondLst>
+                                  </p:cTn>
+                                  <p:tgtEl>
+                                    <p:spTgt spid="6"/>
+                                  </p:tgtEl>
+                                  <p:attrNameLst>
+                                    <p:attrName>style.visibility</p:attrName>
+                                  </p:attrNameLst>
+                                </p:cBhvr>
+                                <p:to>
+                                  <p:strVal val="visible"/>
+                                </p:to>
+                              </p:set>
+                              <p:animEffect transition="in" filter="fade">
+                                <p:cBhvr>
+                                  <p:cTn id="8" dur="400"/>
+                                  <p:tgtEl>
+                                    <p:spTgt spid="6"/>
+                                  </p:tgtEl>
+                                </p:cBhvr>
+                              </p:animEffect>
+                            </p:childTnLst>
+                          </p:cTn>
+                        </p:par>
+                        <p:par>
+                          <p:cTn id="12" presetID="10" presetClass="entr" presetSubtype="0" fill="hold" grpId="0" nodeType="afterEffect">
+                            <p:stCondLst>
+                              <p:cond delay="500"/>
+                            </p:stCondLst>
+                            <p:childTnLst>
+                              <p:set>
+                                <p:cBhvr>
+                                  <p:cTn id="10" dur="1" fill="hold">
                                     <p:stCondLst>
                                       <p:cond delay="0"/>
                                     </p:stCondLst>
@@ -12449,44 +10909,9 @@
                               </p:set>
                               <p:animEffect transition="in" filter="fade">
                                 <p:cBhvr>
-                                  <p:cTn id="13" dur="400"/>
+                                  <p:cTn id="11" dur="400"/>
                                   <p:tgtEl>
                                     <p:spTgt spid="7"/>
-                                  </p:tgtEl>
-                                </p:cBhvr>
-                              </p:animEffect>
-                            </p:childTnLst>
-                          </p:cTn>
-                        </p:par>
-                        <p:par>
-                          <p:cTn id="17" presetID="10" presetClass="entr" presetSubtype="0" fill="hold" grpId="0" nodeType="afterEffect">
-                            <p:stCondLst>
-                              <p:cond delay="850"/>
-                            </p:stCondLst>
-                            <p:childTnLst>
-                              <p:set>
-                                <p:cBhvr>
-                                  <p:cTn id="15" dur="1" fill="hold">
-                                    <p:stCondLst>
-                                      <p:cond delay="0"/>
-                                    </p:stCondLst>
-                                  </p:cTn>
-                                  <p:tgtEl>
-                                    <p:spTgt spid="8"/>
-                                  </p:tgtEl>
-                                  <p:attrNameLst>
-                                    <p:attrName>style.visibility</p:attrName>
-                                  </p:attrNameLst>
-                                </p:cBhvr>
-                                <p:to>
-                                  <p:strVal val="visible"/>
-                                </p:to>
-                              </p:set>
-                              <p:animEffect transition="in" filter="fade">
-                                <p:cBhvr>
-                                  <p:cTn id="16" dur="400"/>
-                                  <p:tgtEl>
-                                    <p:spTgt spid="8"/>
                                   </p:tgtEl>
                                 </p:cBhvr>
                               </p:animEffect>
@@ -12575,39 +11000,15 @@
           </a:p>
         </p:txBody>
       </p:sp>
-      <p:pic>
-        <p:nvPicPr>
-          <p:cNvPr id="3" name="Picture 2" descr="LOGO-OCEO.png"/>
-          <p:cNvPicPr>
-            <a:picLocks noChangeAspect="1"/>
-          </p:cNvPicPr>
+      <p:sp>
+        <p:nvSpPr>
+          <p:cNvPr id="3" name="Rectangle 2"/>
+          <p:cNvSpPr/>
           <p:nvPr/>
-        </p:nvPicPr>
-        <p:blipFill>
-          <a:blip r:embed="rId2"/>
-          <a:stretch>
-            <a:fillRect/>
-          </a:stretch>
-        </p:blipFill>
+        </p:nvSpPr>
         <p:spPr>
           <a:xfrm>
-            <a:off x="868680" y="777240"/>
-            <a:ext cx="2468880" cy="1991869"/>
-          </a:xfrm>
-          <a:prstGeom prst="rect">
-            <a:avLst/>
-          </a:prstGeom>
-        </p:spPr>
-      </p:pic>
-      <p:sp>
-        <p:nvSpPr>
-          <p:cNvPr id="4" name="Rectangle 3"/>
-          <p:cNvSpPr/>
-          <p:nvPr/>
-        </p:nvSpPr>
-        <p:spPr>
-          <a:xfrm>
-            <a:off x="914400" y="3977639"/>
+            <a:off x="914400" y="2651760"/>
             <a:ext cx="2011680" cy="38100"/>
           </a:xfrm>
           <a:prstGeom prst="rect">
@@ -12645,13 +11046,13 @@
       </p:sp>
       <p:sp>
         <p:nvSpPr>
-          <p:cNvPr id="5" name="TextBox 4"/>
+          <p:cNvPr id="4" name="TextBox 3"/>
           <p:cNvSpPr txBox="1"/>
           <p:nvPr/>
         </p:nvSpPr>
         <p:spPr>
           <a:xfrm>
-            <a:off x="896112" y="4206240"/>
+            <a:off x="896112" y="2880360"/>
             <a:ext cx="10058400" cy="2194560"/>
           </a:xfrm>
           <a:prstGeom prst="rect">
@@ -12735,7 +11136,7 @@
                       </p:stCondLst>
                       <p:childTnLst>
                         <p:par>
-                          <p:cTn id="8" presetID="23" presetClass="entr" presetSubtype="16" fill="hold" grpId="0" nodeType="afterEffect">
+                          <p:cTn id="6" presetID="10" presetClass="entr" presetSubtype="0" fill="hold" grpId="0" nodeType="afterEffect">
                             <p:stCondLst>
                               <p:cond delay="0"/>
                             </p:stCondLst>
@@ -12748,88 +11149,7 @@
                                     </p:stCondLst>
                                   </p:cTn>
                                   <p:tgtEl>
-                                    <p:spTgt spid="3"/>
-                                  </p:tgtEl>
-                                  <p:attrNameLst>
-                                    <p:attrName>style.visibility</p:attrName>
-                                  </p:attrNameLst>
-                                </p:cBhvr>
-                                <p:to>
-                                  <p:strVal val="visible"/>
-                                </p:to>
-                              </p:set>
-                              <p:anim calcmode="lin" valueType="num">
-                                <p:cBhvr additive="base">
-                                  <p:cTn id="5" dur="600" fill="hold"/>
-                                  <p:tgtEl>
-                                    <p:spTgt spid="3"/>
-                                  </p:tgtEl>
-                                  <p:attrNameLst>
-                                    <p:attrName>ppt_w</p:attrName>
-                                  </p:attrNameLst>
-                                </p:cBhvr>
-                                <p:tavLst>
-                                  <p:tav tm="0">
-                                    <p:val>
-                                      <p:fltVal val="0.3"/>
-                                    </p:val>
-                                  </p:tav>
-                                  <p:tav tm="100000">
-                                    <p:val>
-                                      <p:fltVal val="1"/>
-                                    </p:val>
-                                  </p:tav>
-                                </p:tavLst>
-                              </p:anim>
-                              <p:anim calcmode="lin" valueType="num">
-                                <p:cBhvr additive="base">
-                                  <p:cTn id="6" dur="600" fill="hold"/>
-                                  <p:tgtEl>
-                                    <p:spTgt spid="3"/>
-                                  </p:tgtEl>
-                                  <p:attrNameLst>
-                                    <p:attrName>ppt_h</p:attrName>
-                                  </p:attrNameLst>
-                                </p:cBhvr>
-                                <p:tavLst>
-                                  <p:tav tm="0">
-                                    <p:val>
-                                      <p:fltVal val="0.3"/>
-                                    </p:val>
-                                  </p:tav>
-                                  <p:tav tm="100000">
-                                    <p:val>
-                                      <p:fltVal val="1"/>
-                                    </p:val>
-                                  </p:tav>
-                                </p:tavLst>
-                              </p:anim>
-                              <p:animEffect transition="in" filter="fade">
-                                <p:cBhvr>
-                                  <p:cTn id="7" dur="600"/>
-                                  <p:tgtEl>
-                                    <p:spTgt spid="3"/>
-                                  </p:tgtEl>
-                                </p:cBhvr>
-                              </p:animEffect>
-                            </p:childTnLst>
-                          </p:cTn>
-                        </p:par>
-                        <p:par>
-                          <p:cTn id="11" presetID="10" presetClass="entr" presetSubtype="0" fill="hold" grpId="0" nodeType="afterEffect">
-                            <p:stCondLst>
-                              <p:cond delay="350"/>
-                            </p:stCondLst>
-                            <p:childTnLst>
-                              <p:set>
-                                <p:cBhvr>
-                                  <p:cTn id="9" dur="1" fill="hold">
-                                    <p:stCondLst>
-                                      <p:cond delay="0"/>
-                                    </p:stCondLst>
-                                  </p:cTn>
-                                  <p:tgtEl>
-                                    <p:spTgt spid="5"/>
+                                    <p:spTgt spid="4"/>
                                   </p:tgtEl>
                                   <p:attrNameLst>
                                     <p:attrName>style.visibility</p:attrName>
@@ -12841,9 +11161,9 @@
                               </p:set>
                               <p:animEffect transition="in" filter="fade">
                                 <p:cBhvr>
-                                  <p:cTn id="10" dur="400"/>
+                                  <p:cTn id="5" dur="400"/>
                                   <p:tgtEl>
-                                    <p:spTgt spid="5"/>
+                                    <p:spTgt spid="4"/>
                                   </p:tgtEl>
                                 </p:cBhvr>
                               </p:animEffect>
@@ -12932,33 +11252,9 @@
           </a:p>
         </p:txBody>
       </p:sp>
-      <p:pic>
-        <p:nvPicPr>
-          <p:cNvPr id="3" name="Picture 2" descr="LOGO-OCEO-mark.png"/>
-          <p:cNvPicPr>
-            <a:picLocks noChangeAspect="1"/>
-          </p:cNvPicPr>
-          <p:nvPr/>
-        </p:nvPicPr>
-        <p:blipFill>
-          <a:blip r:embed="rId2"/>
-          <a:stretch>
-            <a:fillRect/>
-          </a:stretch>
-        </p:blipFill>
-        <p:spPr>
-          <a:xfrm>
-            <a:off x="10637215" y="457200"/>
-            <a:ext cx="1051560" cy="954471"/>
-          </a:xfrm>
-          <a:prstGeom prst="rect">
-            <a:avLst/>
-          </a:prstGeom>
-        </p:spPr>
-      </p:pic>
-      <p:sp>
-        <p:nvSpPr>
-          <p:cNvPr id="4" name="Rectangle 3"/>
+      <p:sp>
+        <p:nvSpPr>
+          <p:cNvPr id="3" name="Rectangle 2"/>
           <p:cNvSpPr/>
           <p:nvPr/>
         </p:nvSpPr>
@@ -13002,7 +11298,7 @@
       </p:sp>
       <p:sp>
         <p:nvSpPr>
-          <p:cNvPr id="5" name="TextBox 4"/>
+          <p:cNvPr id="4" name="TextBox 3"/>
           <p:cNvSpPr txBox="1"/>
           <p:nvPr/>
         </p:nvSpPr>
@@ -13052,7 +11348,7 @@
       </p:sp>
       <p:sp>
         <p:nvSpPr>
-          <p:cNvPr id="6" name="Rectangle 5"/>
+          <p:cNvPr id="5" name="Rectangle 4"/>
           <p:cNvSpPr/>
           <p:nvPr/>
         </p:nvSpPr>
@@ -13096,7 +11392,7 @@
       </p:sp>
       <p:sp>
         <p:nvSpPr>
-          <p:cNvPr id="7" name="TextBox 6"/>
+          <p:cNvPr id="6" name="TextBox 5"/>
           <p:cNvSpPr txBox="1"/>
           <p:nvPr/>
         </p:nvSpPr>
@@ -13280,7 +11576,7 @@
                       </p:stCondLst>
                       <p:childTnLst>
                         <p:par>
-                          <p:cTn id="8" presetID="23" presetClass="entr" presetSubtype="16" fill="hold" grpId="0" nodeType="afterEffect">
+                          <p:cTn id="6" presetID="10" presetClass="entr" presetSubtype="0" fill="hold" grpId="0" nodeType="afterEffect">
                             <p:stCondLst>
                               <p:cond delay="0"/>
                             </p:stCondLst>
@@ -13293,88 +11589,7 @@
                                     </p:stCondLst>
                                   </p:cTn>
                                   <p:tgtEl>
-                                    <p:spTgt spid="3"/>
-                                  </p:tgtEl>
-                                  <p:attrNameLst>
-                                    <p:attrName>style.visibility</p:attrName>
-                                  </p:attrNameLst>
-                                </p:cBhvr>
-                                <p:to>
-                                  <p:strVal val="visible"/>
-                                </p:to>
-                              </p:set>
-                              <p:anim calcmode="lin" valueType="num">
-                                <p:cBhvr additive="base">
-                                  <p:cTn id="5" dur="600" fill="hold"/>
-                                  <p:tgtEl>
-                                    <p:spTgt spid="3"/>
-                                  </p:tgtEl>
-                                  <p:attrNameLst>
-                                    <p:attrName>ppt_w</p:attrName>
-                                  </p:attrNameLst>
-                                </p:cBhvr>
-                                <p:tavLst>
-                                  <p:tav tm="0">
-                                    <p:val>
-                                      <p:fltVal val="0.3"/>
-                                    </p:val>
-                                  </p:tav>
-                                  <p:tav tm="100000">
-                                    <p:val>
-                                      <p:fltVal val="1"/>
-                                    </p:val>
-                                  </p:tav>
-                                </p:tavLst>
-                              </p:anim>
-                              <p:anim calcmode="lin" valueType="num">
-                                <p:cBhvr additive="base">
-                                  <p:cTn id="6" dur="600" fill="hold"/>
-                                  <p:tgtEl>
-                                    <p:spTgt spid="3"/>
-                                  </p:tgtEl>
-                                  <p:attrNameLst>
-                                    <p:attrName>ppt_h</p:attrName>
-                                  </p:attrNameLst>
-                                </p:cBhvr>
-                                <p:tavLst>
-                                  <p:tav tm="0">
-                                    <p:val>
-                                      <p:fltVal val="0.3"/>
-                                    </p:val>
-                                  </p:tav>
-                                  <p:tav tm="100000">
-                                    <p:val>
-                                      <p:fltVal val="1"/>
-                                    </p:val>
-                                  </p:tav>
-                                </p:tavLst>
-                              </p:anim>
-                              <p:animEffect transition="in" filter="fade">
-                                <p:cBhvr>
-                                  <p:cTn id="7" dur="600"/>
-                                  <p:tgtEl>
-                                    <p:spTgt spid="3"/>
-                                  </p:tgtEl>
-                                </p:cBhvr>
-                              </p:animEffect>
-                            </p:childTnLst>
-                          </p:cTn>
-                        </p:par>
-                        <p:par>
-                          <p:cTn id="11" presetID="10" presetClass="entr" presetSubtype="0" fill="hold" grpId="0" nodeType="afterEffect">
-                            <p:stCondLst>
-                              <p:cond delay="350"/>
-                            </p:stCondLst>
-                            <p:childTnLst>
-                              <p:set>
-                                <p:cBhvr>
-                                  <p:cTn id="9" dur="1" fill="hold">
-                                    <p:stCondLst>
-                                      <p:cond delay="0"/>
-                                    </p:stCondLst>
-                                  </p:cTn>
-                                  <p:tgtEl>
-                                    <p:spTgt spid="5"/>
+                                    <p:spTgt spid="4"/>
                                   </p:tgtEl>
                                   <p:attrNameLst>
                                     <p:attrName>style.visibility</p:attrName>
@@ -13386,9 +11601,9 @@
                               </p:set>
                               <p:animEffect transition="in" filter="fade">
                                 <p:cBhvr>
-                                  <p:cTn id="10" dur="400"/>
+                                  <p:cTn id="5" dur="400"/>
                                   <p:tgtEl>
-                                    <p:spTgt spid="5"/>
+                                    <p:spTgt spid="4"/>
                                   </p:tgtEl>
                                 </p:cBhvr>
                               </p:animEffect>
@@ -13396,20 +11611,20 @@
                           </p:cTn>
                         </p:par>
                         <p:par>
-                          <p:cTn id="14" presetID="10" presetClass="entr" presetSubtype="0" fill="hold" grpId="0" nodeType="afterEffect">
+                          <p:cTn id="9" presetID="10" presetClass="entr" presetSubtype="0" fill="hold" grpId="0" nodeType="afterEffect">
                             <p:stCondLst>
-                              <p:cond delay="600"/>
+                              <p:cond delay="250"/>
                             </p:stCondLst>
                             <p:childTnLst>
                               <p:set>
                                 <p:cBhvr>
-                                  <p:cTn id="12" dur="1" fill="hold">
+                                  <p:cTn id="7" dur="1" fill="hold">
                                     <p:stCondLst>
                                       <p:cond delay="0"/>
                                     </p:stCondLst>
                                   </p:cTn>
                                   <p:tgtEl>
-                                    <p:spTgt spid="7"/>
+                                    <p:spTgt spid="6"/>
                                   </p:tgtEl>
                                   <p:attrNameLst>
                                     <p:attrName>style.visibility</p:attrName>
@@ -13421,9 +11636,9 @@
                               </p:set>
                               <p:animEffect transition="in" filter="fade">
                                 <p:cBhvr>
-                                  <p:cTn id="13" dur="400"/>
+                                  <p:cTn id="8" dur="400"/>
                                   <p:tgtEl>
-                                    <p:spTgt spid="7"/>
+                                    <p:spTgt spid="6"/>
                                   </p:tgtEl>
                                 </p:cBhvr>
                               </p:animEffect>
@@ -13512,33 +11727,9 @@
           </a:p>
         </p:txBody>
       </p:sp>
-      <p:pic>
-        <p:nvPicPr>
-          <p:cNvPr id="3" name="Picture 2" descr="LOGO-OCEO-mark.png"/>
-          <p:cNvPicPr>
-            <a:picLocks noChangeAspect="1"/>
-          </p:cNvPicPr>
-          <p:nvPr/>
-        </p:nvPicPr>
-        <p:blipFill>
-          <a:blip r:embed="rId2"/>
-          <a:stretch>
-            <a:fillRect/>
-          </a:stretch>
-        </p:blipFill>
-        <p:spPr>
-          <a:xfrm>
-            <a:off x="10637215" y="457200"/>
-            <a:ext cx="1051560" cy="954471"/>
-          </a:xfrm>
-          <a:prstGeom prst="rect">
-            <a:avLst/>
-          </a:prstGeom>
-        </p:spPr>
-      </p:pic>
-      <p:sp>
-        <p:nvSpPr>
-          <p:cNvPr id="4" name="Rectangle 3"/>
+      <p:sp>
+        <p:nvSpPr>
+          <p:cNvPr id="3" name="Rectangle 2"/>
           <p:cNvSpPr/>
           <p:nvPr/>
         </p:nvSpPr>
@@ -13582,7 +11773,7 @@
       </p:sp>
       <p:sp>
         <p:nvSpPr>
-          <p:cNvPr id="5" name="TextBox 4"/>
+          <p:cNvPr id="4" name="TextBox 3"/>
           <p:cNvSpPr txBox="1"/>
           <p:nvPr/>
         </p:nvSpPr>
@@ -13632,7 +11823,7 @@
       </p:sp>
       <p:sp>
         <p:nvSpPr>
-          <p:cNvPr id="6" name="Rectangle 5"/>
+          <p:cNvPr id="5" name="Rectangle 4"/>
           <p:cNvSpPr/>
           <p:nvPr/>
         </p:nvSpPr>
@@ -13676,7 +11867,7 @@
       </p:sp>
       <p:sp>
         <p:nvSpPr>
-          <p:cNvPr id="7" name="TextBox 6"/>
+          <p:cNvPr id="6" name="TextBox 5"/>
           <p:cNvSpPr txBox="1"/>
           <p:nvPr/>
         </p:nvSpPr>
@@ -13860,7 +12051,7 @@
                       </p:stCondLst>
                       <p:childTnLst>
                         <p:par>
-                          <p:cTn id="8" presetID="23" presetClass="entr" presetSubtype="16" fill="hold" grpId="0" nodeType="afterEffect">
+                          <p:cTn id="6" presetID="10" presetClass="entr" presetSubtype="0" fill="hold" grpId="0" nodeType="afterEffect">
                             <p:stCondLst>
                               <p:cond delay="0"/>
                             </p:stCondLst>
@@ -13873,88 +12064,7 @@
                                     </p:stCondLst>
                                   </p:cTn>
                                   <p:tgtEl>
-                                    <p:spTgt spid="3"/>
-                                  </p:tgtEl>
-                                  <p:attrNameLst>
-                                    <p:attrName>style.visibility</p:attrName>
-                                  </p:attrNameLst>
-                                </p:cBhvr>
-                                <p:to>
-                                  <p:strVal val="visible"/>
-                                </p:to>
-                              </p:set>
-                              <p:anim calcmode="lin" valueType="num">
-                                <p:cBhvr additive="base">
-                                  <p:cTn id="5" dur="600" fill="hold"/>
-                                  <p:tgtEl>
-                                    <p:spTgt spid="3"/>
-                                  </p:tgtEl>
-                                  <p:attrNameLst>
-                                    <p:attrName>ppt_w</p:attrName>
-                                  </p:attrNameLst>
-                                </p:cBhvr>
-                                <p:tavLst>
-                                  <p:tav tm="0">
-                                    <p:val>
-                                      <p:fltVal val="0.3"/>
-                                    </p:val>
-                                  </p:tav>
-                                  <p:tav tm="100000">
-                                    <p:val>
-                                      <p:fltVal val="1"/>
-                                    </p:val>
-                                  </p:tav>
-                                </p:tavLst>
-                              </p:anim>
-                              <p:anim calcmode="lin" valueType="num">
-                                <p:cBhvr additive="base">
-                                  <p:cTn id="6" dur="600" fill="hold"/>
-                                  <p:tgtEl>
-                                    <p:spTgt spid="3"/>
-                                  </p:tgtEl>
-                                  <p:attrNameLst>
-                                    <p:attrName>ppt_h</p:attrName>
-                                  </p:attrNameLst>
-                                </p:cBhvr>
-                                <p:tavLst>
-                                  <p:tav tm="0">
-                                    <p:val>
-                                      <p:fltVal val="0.3"/>
-                                    </p:val>
-                                  </p:tav>
-                                  <p:tav tm="100000">
-                                    <p:val>
-                                      <p:fltVal val="1"/>
-                                    </p:val>
-                                  </p:tav>
-                                </p:tavLst>
-                              </p:anim>
-                              <p:animEffect transition="in" filter="fade">
-                                <p:cBhvr>
-                                  <p:cTn id="7" dur="600"/>
-                                  <p:tgtEl>
-                                    <p:spTgt spid="3"/>
-                                  </p:tgtEl>
-                                </p:cBhvr>
-                              </p:animEffect>
-                            </p:childTnLst>
-                          </p:cTn>
-                        </p:par>
-                        <p:par>
-                          <p:cTn id="11" presetID="10" presetClass="entr" presetSubtype="0" fill="hold" grpId="0" nodeType="afterEffect">
-                            <p:stCondLst>
-                              <p:cond delay="350"/>
-                            </p:stCondLst>
-                            <p:childTnLst>
-                              <p:set>
-                                <p:cBhvr>
-                                  <p:cTn id="9" dur="1" fill="hold">
-                                    <p:stCondLst>
-                                      <p:cond delay="0"/>
-                                    </p:stCondLst>
-                                  </p:cTn>
-                                  <p:tgtEl>
-                                    <p:spTgt spid="5"/>
+                                    <p:spTgt spid="4"/>
                                   </p:tgtEl>
                                   <p:attrNameLst>
                                     <p:attrName>style.visibility</p:attrName>
@@ -13966,9 +12076,9 @@
                               </p:set>
                               <p:animEffect transition="in" filter="fade">
                                 <p:cBhvr>
-                                  <p:cTn id="10" dur="400"/>
+                                  <p:cTn id="5" dur="400"/>
                                   <p:tgtEl>
-                                    <p:spTgt spid="5"/>
+                                    <p:spTgt spid="4"/>
                                   </p:tgtEl>
                                 </p:cBhvr>
                               </p:animEffect>
@@ -13976,20 +12086,20 @@
                           </p:cTn>
                         </p:par>
                         <p:par>
-                          <p:cTn id="14" presetID="10" presetClass="entr" presetSubtype="0" fill="hold" grpId="0" nodeType="afterEffect">
+                          <p:cTn id="9" presetID="10" presetClass="entr" presetSubtype="0" fill="hold" grpId="0" nodeType="afterEffect">
                             <p:stCondLst>
-                              <p:cond delay="600"/>
+                              <p:cond delay="250"/>
                             </p:stCondLst>
                             <p:childTnLst>
                               <p:set>
                                 <p:cBhvr>
-                                  <p:cTn id="12" dur="1" fill="hold">
+                                  <p:cTn id="7" dur="1" fill="hold">
                                     <p:stCondLst>
                                       <p:cond delay="0"/>
                                     </p:stCondLst>
                                   </p:cTn>
                                   <p:tgtEl>
-                                    <p:spTgt spid="7"/>
+                                    <p:spTgt spid="6"/>
                                   </p:tgtEl>
                                   <p:attrNameLst>
                                     <p:attrName>style.visibility</p:attrName>
@@ -14001,9 +12111,9 @@
                               </p:set>
                               <p:animEffect transition="in" filter="fade">
                                 <p:cBhvr>
-                                  <p:cTn id="13" dur="400"/>
+                                  <p:cTn id="8" dur="400"/>
                                   <p:tgtEl>
-                                    <p:spTgt spid="7"/>
+                                    <p:spTgt spid="6"/>
                                   </p:tgtEl>
                                 </p:cBhvr>
                               </p:animEffect>
@@ -14092,39 +12202,15 @@
           </a:p>
         </p:txBody>
       </p:sp>
-      <p:pic>
-        <p:nvPicPr>
-          <p:cNvPr id="3" name="Picture 2" descr="LOGO-OCEO.png"/>
-          <p:cNvPicPr>
-            <a:picLocks noChangeAspect="1"/>
-          </p:cNvPicPr>
+      <p:sp>
+        <p:nvSpPr>
+          <p:cNvPr id="3" name="Rectangle 2"/>
+          <p:cNvSpPr/>
           <p:nvPr/>
-        </p:nvPicPr>
-        <p:blipFill>
-          <a:blip r:embed="rId2"/>
-          <a:stretch>
-            <a:fillRect/>
-          </a:stretch>
-        </p:blipFill>
+        </p:nvSpPr>
         <p:spPr>
           <a:xfrm>
-            <a:off x="868680" y="777240"/>
-            <a:ext cx="2468880" cy="1991869"/>
-          </a:xfrm>
-          <a:prstGeom prst="rect">
-            <a:avLst/>
-          </a:prstGeom>
-        </p:spPr>
-      </p:pic>
-      <p:sp>
-        <p:nvSpPr>
-          <p:cNvPr id="4" name="Rectangle 3"/>
-          <p:cNvSpPr/>
-          <p:nvPr/>
-        </p:nvSpPr>
-        <p:spPr>
-          <a:xfrm>
-            <a:off x="914400" y="3977639"/>
+            <a:off x="914400" y="2651760"/>
             <a:ext cx="2011680" cy="38100"/>
           </a:xfrm>
           <a:prstGeom prst="rect">
@@ -14162,13 +12248,13 @@
       </p:sp>
       <p:sp>
         <p:nvSpPr>
-          <p:cNvPr id="5" name="TextBox 4"/>
+          <p:cNvPr id="4" name="TextBox 3"/>
           <p:cNvSpPr txBox="1"/>
           <p:nvPr/>
         </p:nvSpPr>
         <p:spPr>
           <a:xfrm>
-            <a:off x="896112" y="4206240"/>
+            <a:off x="896112" y="2880360"/>
             <a:ext cx="10058400" cy="2194560"/>
           </a:xfrm>
           <a:prstGeom prst="rect">
@@ -14252,7 +12338,7 @@
                       </p:stCondLst>
                       <p:childTnLst>
                         <p:par>
-                          <p:cTn id="8" presetID="23" presetClass="entr" presetSubtype="16" fill="hold" grpId="0" nodeType="afterEffect">
+                          <p:cTn id="6" presetID="10" presetClass="entr" presetSubtype="0" fill="hold" grpId="0" nodeType="afterEffect">
                             <p:stCondLst>
                               <p:cond delay="0"/>
                             </p:stCondLst>
@@ -14265,88 +12351,7 @@
                                     </p:stCondLst>
                                   </p:cTn>
                                   <p:tgtEl>
-                                    <p:spTgt spid="3"/>
-                                  </p:tgtEl>
-                                  <p:attrNameLst>
-                                    <p:attrName>style.visibility</p:attrName>
-                                  </p:attrNameLst>
-                                </p:cBhvr>
-                                <p:to>
-                                  <p:strVal val="visible"/>
-                                </p:to>
-                              </p:set>
-                              <p:anim calcmode="lin" valueType="num">
-                                <p:cBhvr additive="base">
-                                  <p:cTn id="5" dur="600" fill="hold"/>
-                                  <p:tgtEl>
-                                    <p:spTgt spid="3"/>
-                                  </p:tgtEl>
-                                  <p:attrNameLst>
-                                    <p:attrName>ppt_w</p:attrName>
-                                  </p:attrNameLst>
-                                </p:cBhvr>
-                                <p:tavLst>
-                                  <p:tav tm="0">
-                                    <p:val>
-                                      <p:fltVal val="0.3"/>
-                                    </p:val>
-                                  </p:tav>
-                                  <p:tav tm="100000">
-                                    <p:val>
-                                      <p:fltVal val="1"/>
-                                    </p:val>
-                                  </p:tav>
-                                </p:tavLst>
-                              </p:anim>
-                              <p:anim calcmode="lin" valueType="num">
-                                <p:cBhvr additive="base">
-                                  <p:cTn id="6" dur="600" fill="hold"/>
-                                  <p:tgtEl>
-                                    <p:spTgt spid="3"/>
-                                  </p:tgtEl>
-                                  <p:attrNameLst>
-                                    <p:attrName>ppt_h</p:attrName>
-                                  </p:attrNameLst>
-                                </p:cBhvr>
-                                <p:tavLst>
-                                  <p:tav tm="0">
-                                    <p:val>
-                                      <p:fltVal val="0.3"/>
-                                    </p:val>
-                                  </p:tav>
-                                  <p:tav tm="100000">
-                                    <p:val>
-                                      <p:fltVal val="1"/>
-                                    </p:val>
-                                  </p:tav>
-                                </p:tavLst>
-                              </p:anim>
-                              <p:animEffect transition="in" filter="fade">
-                                <p:cBhvr>
-                                  <p:cTn id="7" dur="600"/>
-                                  <p:tgtEl>
-                                    <p:spTgt spid="3"/>
-                                  </p:tgtEl>
-                                </p:cBhvr>
-                              </p:animEffect>
-                            </p:childTnLst>
-                          </p:cTn>
-                        </p:par>
-                        <p:par>
-                          <p:cTn id="11" presetID="10" presetClass="entr" presetSubtype="0" fill="hold" grpId="0" nodeType="afterEffect">
-                            <p:stCondLst>
-                              <p:cond delay="350"/>
-                            </p:stCondLst>
-                            <p:childTnLst>
-                              <p:set>
-                                <p:cBhvr>
-                                  <p:cTn id="9" dur="1" fill="hold">
-                                    <p:stCondLst>
-                                      <p:cond delay="0"/>
-                                    </p:stCondLst>
-                                  </p:cTn>
-                                  <p:tgtEl>
-                                    <p:spTgt spid="5"/>
+                                    <p:spTgt spid="4"/>
                                   </p:tgtEl>
                                   <p:attrNameLst>
                                     <p:attrName>style.visibility</p:attrName>
@@ -14358,9 +12363,9 @@
                               </p:set>
                               <p:animEffect transition="in" filter="fade">
                                 <p:cBhvr>
-                                  <p:cTn id="10" dur="400"/>
+                                  <p:cTn id="5" dur="400"/>
                                   <p:tgtEl>
-                                    <p:spTgt spid="5"/>
+                                    <p:spTgt spid="4"/>
                                   </p:tgtEl>
                                 </p:cBhvr>
                               </p:animEffect>
@@ -14449,33 +12454,9 @@
           </a:p>
         </p:txBody>
       </p:sp>
-      <p:pic>
-        <p:nvPicPr>
-          <p:cNvPr id="3" name="Picture 2" descr="LOGO-OCEO-mark.png"/>
-          <p:cNvPicPr>
-            <a:picLocks noChangeAspect="1"/>
-          </p:cNvPicPr>
-          <p:nvPr/>
-        </p:nvPicPr>
-        <p:blipFill>
-          <a:blip r:embed="rId2"/>
-          <a:stretch>
-            <a:fillRect/>
-          </a:stretch>
-        </p:blipFill>
-        <p:spPr>
-          <a:xfrm>
-            <a:off x="10637215" y="457200"/>
-            <a:ext cx="1051560" cy="954471"/>
-          </a:xfrm>
-          <a:prstGeom prst="rect">
-            <a:avLst/>
-          </a:prstGeom>
-        </p:spPr>
-      </p:pic>
-      <p:sp>
-        <p:nvSpPr>
-          <p:cNvPr id="4" name="Rectangle 3"/>
+      <p:sp>
+        <p:nvSpPr>
+          <p:cNvPr id="3" name="Rectangle 2"/>
           <p:cNvSpPr/>
           <p:nvPr/>
         </p:nvSpPr>
@@ -14519,7 +12500,7 @@
       </p:sp>
       <p:sp>
         <p:nvSpPr>
-          <p:cNvPr id="5" name="TextBox 4"/>
+          <p:cNvPr id="4" name="TextBox 3"/>
           <p:cNvSpPr txBox="1"/>
           <p:nvPr/>
         </p:nvSpPr>
@@ -14569,7 +12550,7 @@
       </p:sp>
       <p:sp>
         <p:nvSpPr>
-          <p:cNvPr id="6" name="Rectangle 5"/>
+          <p:cNvPr id="5" name="Rectangle 4"/>
           <p:cNvSpPr/>
           <p:nvPr/>
         </p:nvSpPr>
@@ -14613,7 +12594,7 @@
       </p:sp>
       <p:sp>
         <p:nvSpPr>
-          <p:cNvPr id="7" name="TextBox 6"/>
+          <p:cNvPr id="6" name="TextBox 5"/>
           <p:cNvSpPr txBox="1"/>
           <p:nvPr/>
         </p:nvSpPr>
@@ -14797,7 +12778,7 @@
                       </p:stCondLst>
                       <p:childTnLst>
                         <p:par>
-                          <p:cTn id="8" presetID="23" presetClass="entr" presetSubtype="16" fill="hold" grpId="0" nodeType="afterEffect">
+                          <p:cTn id="6" presetID="10" presetClass="entr" presetSubtype="0" fill="hold" grpId="0" nodeType="afterEffect">
                             <p:stCondLst>
                               <p:cond delay="0"/>
                             </p:stCondLst>
@@ -14810,88 +12791,7 @@
                                     </p:stCondLst>
                                   </p:cTn>
                                   <p:tgtEl>
-                                    <p:spTgt spid="3"/>
-                                  </p:tgtEl>
-                                  <p:attrNameLst>
-                                    <p:attrName>style.visibility</p:attrName>
-                                  </p:attrNameLst>
-                                </p:cBhvr>
-                                <p:to>
-                                  <p:strVal val="visible"/>
-                                </p:to>
-                              </p:set>
-                              <p:anim calcmode="lin" valueType="num">
-                                <p:cBhvr additive="base">
-                                  <p:cTn id="5" dur="600" fill="hold"/>
-                                  <p:tgtEl>
-                                    <p:spTgt spid="3"/>
-                                  </p:tgtEl>
-                                  <p:attrNameLst>
-                                    <p:attrName>ppt_w</p:attrName>
-                                  </p:attrNameLst>
-                                </p:cBhvr>
-                                <p:tavLst>
-                                  <p:tav tm="0">
-                                    <p:val>
-                                      <p:fltVal val="0.3"/>
-                                    </p:val>
-                                  </p:tav>
-                                  <p:tav tm="100000">
-                                    <p:val>
-                                      <p:fltVal val="1"/>
-                                    </p:val>
-                                  </p:tav>
-                                </p:tavLst>
-                              </p:anim>
-                              <p:anim calcmode="lin" valueType="num">
-                                <p:cBhvr additive="base">
-                                  <p:cTn id="6" dur="600" fill="hold"/>
-                                  <p:tgtEl>
-                                    <p:spTgt spid="3"/>
-                                  </p:tgtEl>
-                                  <p:attrNameLst>
-                                    <p:attrName>ppt_h</p:attrName>
-                                  </p:attrNameLst>
-                                </p:cBhvr>
-                                <p:tavLst>
-                                  <p:tav tm="0">
-                                    <p:val>
-                                      <p:fltVal val="0.3"/>
-                                    </p:val>
-                                  </p:tav>
-                                  <p:tav tm="100000">
-                                    <p:val>
-                                      <p:fltVal val="1"/>
-                                    </p:val>
-                                  </p:tav>
-                                </p:tavLst>
-                              </p:anim>
-                              <p:animEffect transition="in" filter="fade">
-                                <p:cBhvr>
-                                  <p:cTn id="7" dur="600"/>
-                                  <p:tgtEl>
-                                    <p:spTgt spid="3"/>
-                                  </p:tgtEl>
-                                </p:cBhvr>
-                              </p:animEffect>
-                            </p:childTnLst>
-                          </p:cTn>
-                        </p:par>
-                        <p:par>
-                          <p:cTn id="11" presetID="10" presetClass="entr" presetSubtype="0" fill="hold" grpId="0" nodeType="afterEffect">
-                            <p:stCondLst>
-                              <p:cond delay="350"/>
-                            </p:stCondLst>
-                            <p:childTnLst>
-                              <p:set>
-                                <p:cBhvr>
-                                  <p:cTn id="9" dur="1" fill="hold">
-                                    <p:stCondLst>
-                                      <p:cond delay="0"/>
-                                    </p:stCondLst>
-                                  </p:cTn>
-                                  <p:tgtEl>
-                                    <p:spTgt spid="5"/>
+                                    <p:spTgt spid="4"/>
                                   </p:tgtEl>
                                   <p:attrNameLst>
                                     <p:attrName>style.visibility</p:attrName>
@@ -14903,9 +12803,9 @@
                               </p:set>
                               <p:animEffect transition="in" filter="fade">
                                 <p:cBhvr>
-                                  <p:cTn id="10" dur="400"/>
+                                  <p:cTn id="5" dur="400"/>
                                   <p:tgtEl>
-                                    <p:spTgt spid="5"/>
+                                    <p:spTgt spid="4"/>
                                   </p:tgtEl>
                                 </p:cBhvr>
                               </p:animEffect>
@@ -14913,20 +12813,20 @@
                           </p:cTn>
                         </p:par>
                         <p:par>
-                          <p:cTn id="14" presetID="10" presetClass="entr" presetSubtype="0" fill="hold" grpId="0" nodeType="afterEffect">
+                          <p:cTn id="9" presetID="10" presetClass="entr" presetSubtype="0" fill="hold" grpId="0" nodeType="afterEffect">
                             <p:stCondLst>
-                              <p:cond delay="600"/>
+                              <p:cond delay="250"/>
                             </p:stCondLst>
                             <p:childTnLst>
                               <p:set>
                                 <p:cBhvr>
-                                  <p:cTn id="12" dur="1" fill="hold">
+                                  <p:cTn id="7" dur="1" fill="hold">
                                     <p:stCondLst>
                                       <p:cond delay="0"/>
                                     </p:stCondLst>
                                   </p:cTn>
                                   <p:tgtEl>
-                                    <p:spTgt spid="7"/>
+                                    <p:spTgt spid="6"/>
                                   </p:tgtEl>
                                   <p:attrNameLst>
                                     <p:attrName>style.visibility</p:attrName>
@@ -14938,9 +12838,9 @@
                               </p:set>
                               <p:animEffect transition="in" filter="fade">
                                 <p:cBhvr>
-                                  <p:cTn id="13" dur="400"/>
+                                  <p:cTn id="8" dur="400"/>
                                   <p:tgtEl>
-                                    <p:spTgt spid="7"/>
+                                    <p:spTgt spid="6"/>
                                   </p:tgtEl>
                                 </p:cBhvr>
                               </p:animEffect>
@@ -15029,33 +12929,9 @@
           </a:p>
         </p:txBody>
       </p:sp>
-      <p:pic>
-        <p:nvPicPr>
-          <p:cNvPr id="3" name="Picture 2" descr="LOGO-OCEO-mark.png"/>
-          <p:cNvPicPr>
-            <a:picLocks noChangeAspect="1"/>
-          </p:cNvPicPr>
-          <p:nvPr/>
-        </p:nvPicPr>
-        <p:blipFill>
-          <a:blip r:embed="rId2"/>
-          <a:stretch>
-            <a:fillRect/>
-          </a:stretch>
-        </p:blipFill>
-        <p:spPr>
-          <a:xfrm>
-            <a:off x="10637215" y="457200"/>
-            <a:ext cx="1051560" cy="954471"/>
-          </a:xfrm>
-          <a:prstGeom prst="rect">
-            <a:avLst/>
-          </a:prstGeom>
-        </p:spPr>
-      </p:pic>
-      <p:sp>
-        <p:nvSpPr>
-          <p:cNvPr id="4" name="Rectangle 3"/>
+      <p:sp>
+        <p:nvSpPr>
+          <p:cNvPr id="3" name="Rectangle 2"/>
           <p:cNvSpPr/>
           <p:nvPr/>
         </p:nvSpPr>
@@ -15099,7 +12975,7 @@
       </p:sp>
       <p:sp>
         <p:nvSpPr>
-          <p:cNvPr id="5" name="TextBox 4"/>
+          <p:cNvPr id="4" name="TextBox 3"/>
           <p:cNvSpPr txBox="1"/>
           <p:nvPr/>
         </p:nvSpPr>
@@ -15149,7 +13025,7 @@
       </p:sp>
       <p:sp>
         <p:nvSpPr>
-          <p:cNvPr id="6" name="Rectangle 5"/>
+          <p:cNvPr id="5" name="Rectangle 4"/>
           <p:cNvSpPr/>
           <p:nvPr/>
         </p:nvSpPr>
@@ -15193,7 +13069,7 @@
       </p:sp>
       <p:graphicFrame>
         <p:nvGraphicFramePr>
-          <p:cNvPr id="7" name="Table 6"/>
+          <p:cNvPr id="6" name="Table 5"/>
           <p:cNvGraphicFramePr>
             <a:graphicFrameLocks noGrp="1"/>
           </p:cNvGraphicFramePr>
@@ -15555,7 +13431,7 @@
       </p:graphicFrame>
       <p:sp>
         <p:nvSpPr>
-          <p:cNvPr id="8" name="TextBox 7"/>
+          <p:cNvPr id="7" name="TextBox 6"/>
           <p:cNvSpPr txBox="1"/>
           <p:nvPr/>
         </p:nvSpPr>
@@ -15631,7 +13507,7 @@
                       </p:stCondLst>
                       <p:childTnLst>
                         <p:par>
-                          <p:cTn id="8" presetID="23" presetClass="entr" presetSubtype="16" fill="hold" grpId="0" nodeType="afterEffect">
+                          <p:cTn id="6" presetID="10" presetClass="entr" presetSubtype="0" fill="hold" grpId="0" nodeType="afterEffect">
                             <p:stCondLst>
                               <p:cond delay="0"/>
                             </p:stCondLst>
@@ -15644,88 +13520,7 @@
                                     </p:stCondLst>
                                   </p:cTn>
                                   <p:tgtEl>
-                                    <p:spTgt spid="3"/>
-                                  </p:tgtEl>
-                                  <p:attrNameLst>
-                                    <p:attrName>style.visibility</p:attrName>
-                                  </p:attrNameLst>
-                                </p:cBhvr>
-                                <p:to>
-                                  <p:strVal val="visible"/>
-                                </p:to>
-                              </p:set>
-                              <p:anim calcmode="lin" valueType="num">
-                                <p:cBhvr additive="base">
-                                  <p:cTn id="5" dur="600" fill="hold"/>
-                                  <p:tgtEl>
-                                    <p:spTgt spid="3"/>
-                                  </p:tgtEl>
-                                  <p:attrNameLst>
-                                    <p:attrName>ppt_w</p:attrName>
-                                  </p:attrNameLst>
-                                </p:cBhvr>
-                                <p:tavLst>
-                                  <p:tav tm="0">
-                                    <p:val>
-                                      <p:fltVal val="0.3"/>
-                                    </p:val>
-                                  </p:tav>
-                                  <p:tav tm="100000">
-                                    <p:val>
-                                      <p:fltVal val="1"/>
-                                    </p:val>
-                                  </p:tav>
-                                </p:tavLst>
-                              </p:anim>
-                              <p:anim calcmode="lin" valueType="num">
-                                <p:cBhvr additive="base">
-                                  <p:cTn id="6" dur="600" fill="hold"/>
-                                  <p:tgtEl>
-                                    <p:spTgt spid="3"/>
-                                  </p:tgtEl>
-                                  <p:attrNameLst>
-                                    <p:attrName>ppt_h</p:attrName>
-                                  </p:attrNameLst>
-                                </p:cBhvr>
-                                <p:tavLst>
-                                  <p:tav tm="0">
-                                    <p:val>
-                                      <p:fltVal val="0.3"/>
-                                    </p:val>
-                                  </p:tav>
-                                  <p:tav tm="100000">
-                                    <p:val>
-                                      <p:fltVal val="1"/>
-                                    </p:val>
-                                  </p:tav>
-                                </p:tavLst>
-                              </p:anim>
-                              <p:animEffect transition="in" filter="fade">
-                                <p:cBhvr>
-                                  <p:cTn id="7" dur="600"/>
-                                  <p:tgtEl>
-                                    <p:spTgt spid="3"/>
-                                  </p:tgtEl>
-                                </p:cBhvr>
-                              </p:animEffect>
-                            </p:childTnLst>
-                          </p:cTn>
-                        </p:par>
-                        <p:par>
-                          <p:cTn id="11" presetID="10" presetClass="entr" presetSubtype="0" fill="hold" grpId="0" nodeType="afterEffect">
-                            <p:stCondLst>
-                              <p:cond delay="350"/>
-                            </p:stCondLst>
-                            <p:childTnLst>
-                              <p:set>
-                                <p:cBhvr>
-                                  <p:cTn id="9" dur="1" fill="hold">
-                                    <p:stCondLst>
-                                      <p:cond delay="0"/>
-                                    </p:stCondLst>
-                                  </p:cTn>
-                                  <p:tgtEl>
-                                    <p:spTgt spid="5"/>
+                                    <p:spTgt spid="4"/>
                                   </p:tgtEl>
                                   <p:attrNameLst>
                                     <p:attrName>style.visibility</p:attrName>
@@ -15737,9 +13532,9 @@
                               </p:set>
                               <p:animEffect transition="in" filter="fade">
                                 <p:cBhvr>
-                                  <p:cTn id="10" dur="400"/>
+                                  <p:cTn id="5" dur="400"/>
                                   <p:tgtEl>
-                                    <p:spTgt spid="5"/>
+                                    <p:spTgt spid="4"/>
                                   </p:tgtEl>
                                 </p:cBhvr>
                               </p:animEffect>
@@ -15747,14 +13542,49 @@
                           </p:cTn>
                         </p:par>
                         <p:par>
-                          <p:cTn id="14" presetID="10" presetClass="entr" presetSubtype="0" fill="hold" grpId="0" nodeType="afterEffect">
+                          <p:cTn id="9" presetID="10" presetClass="entr" presetSubtype="0" fill="hold" grpId="0" nodeType="afterEffect">
                             <p:stCondLst>
-                              <p:cond delay="600"/>
+                              <p:cond delay="250"/>
                             </p:stCondLst>
                             <p:childTnLst>
                               <p:set>
                                 <p:cBhvr>
-                                  <p:cTn id="12" dur="1" fill="hold">
+                                  <p:cTn id="7" dur="1" fill="hold">
+                                    <p:stCondLst>
+                                      <p:cond delay="0"/>
+                                    </p:stCondLst>
+                                  </p:cTn>
+                                  <p:tgtEl>
+                                    <p:spTgt spid="6"/>
+                                  </p:tgtEl>
+                                  <p:attrNameLst>
+                                    <p:attrName>style.visibility</p:attrName>
+                                  </p:attrNameLst>
+                                </p:cBhvr>
+                                <p:to>
+                                  <p:strVal val="visible"/>
+                                </p:to>
+                              </p:set>
+                              <p:animEffect transition="in" filter="fade">
+                                <p:cBhvr>
+                                  <p:cTn id="8" dur="400"/>
+                                  <p:tgtEl>
+                                    <p:spTgt spid="6"/>
+                                  </p:tgtEl>
+                                </p:cBhvr>
+                              </p:animEffect>
+                            </p:childTnLst>
+                          </p:cTn>
+                        </p:par>
+                        <p:par>
+                          <p:cTn id="12" presetID="10" presetClass="entr" presetSubtype="0" fill="hold" grpId="0" nodeType="afterEffect">
+                            <p:stCondLst>
+                              <p:cond delay="500"/>
+                            </p:stCondLst>
+                            <p:childTnLst>
+                              <p:set>
+                                <p:cBhvr>
+                                  <p:cTn id="10" dur="1" fill="hold">
                                     <p:stCondLst>
                                       <p:cond delay="0"/>
                                     </p:stCondLst>
@@ -15772,44 +13602,9 @@
                               </p:set>
                               <p:animEffect transition="in" filter="fade">
                                 <p:cBhvr>
-                                  <p:cTn id="13" dur="400"/>
+                                  <p:cTn id="11" dur="400"/>
                                   <p:tgtEl>
                                     <p:spTgt spid="7"/>
-                                  </p:tgtEl>
-                                </p:cBhvr>
-                              </p:animEffect>
-                            </p:childTnLst>
-                          </p:cTn>
-                        </p:par>
-                        <p:par>
-                          <p:cTn id="17" presetID="10" presetClass="entr" presetSubtype="0" fill="hold" grpId="0" nodeType="afterEffect">
-                            <p:stCondLst>
-                              <p:cond delay="850"/>
-                            </p:stCondLst>
-                            <p:childTnLst>
-                              <p:set>
-                                <p:cBhvr>
-                                  <p:cTn id="15" dur="1" fill="hold">
-                                    <p:stCondLst>
-                                      <p:cond delay="0"/>
-                                    </p:stCondLst>
-                                  </p:cTn>
-                                  <p:tgtEl>
-                                    <p:spTgt spid="8"/>
-                                  </p:tgtEl>
-                                  <p:attrNameLst>
-                                    <p:attrName>style.visibility</p:attrName>
-                                  </p:attrNameLst>
-                                </p:cBhvr>
-                                <p:to>
-                                  <p:strVal val="visible"/>
-                                </p:to>
-                              </p:set>
-                              <p:animEffect transition="in" filter="fade">
-                                <p:cBhvr>
-                                  <p:cTn id="16" dur="400"/>
-                                  <p:tgtEl>
-                                    <p:spTgt spid="8"/>
                                   </p:tgtEl>
                                 </p:cBhvr>
                               </p:animEffect>
@@ -15898,33 +13693,9 @@
           </a:p>
         </p:txBody>
       </p:sp>
-      <p:pic>
-        <p:nvPicPr>
-          <p:cNvPr id="3" name="Picture 2" descr="LOGO-OCEO-mark.png"/>
-          <p:cNvPicPr>
-            <a:picLocks noChangeAspect="1"/>
-          </p:cNvPicPr>
-          <p:nvPr/>
-        </p:nvPicPr>
-        <p:blipFill>
-          <a:blip r:embed="rId2"/>
-          <a:stretch>
-            <a:fillRect/>
-          </a:stretch>
-        </p:blipFill>
-        <p:spPr>
-          <a:xfrm>
-            <a:off x="10637215" y="457200"/>
-            <a:ext cx="1051560" cy="954471"/>
-          </a:xfrm>
-          <a:prstGeom prst="rect">
-            <a:avLst/>
-          </a:prstGeom>
-        </p:spPr>
-      </p:pic>
-      <p:sp>
-        <p:nvSpPr>
-          <p:cNvPr id="4" name="Rectangle 3"/>
+      <p:sp>
+        <p:nvSpPr>
+          <p:cNvPr id="3" name="Rectangle 2"/>
           <p:cNvSpPr/>
           <p:nvPr/>
         </p:nvSpPr>
@@ -15968,7 +13739,7 @@
       </p:sp>
       <p:sp>
         <p:nvSpPr>
-          <p:cNvPr id="5" name="TextBox 4"/>
+          <p:cNvPr id="4" name="TextBox 3"/>
           <p:cNvSpPr txBox="1"/>
           <p:nvPr/>
         </p:nvSpPr>
@@ -16018,7 +13789,7 @@
       </p:sp>
       <p:sp>
         <p:nvSpPr>
-          <p:cNvPr id="6" name="Rectangle 5"/>
+          <p:cNvPr id="5" name="Rectangle 4"/>
           <p:cNvSpPr/>
           <p:nvPr/>
         </p:nvSpPr>
@@ -16062,7 +13833,7 @@
       </p:sp>
       <p:sp>
         <p:nvSpPr>
-          <p:cNvPr id="7" name="TextBox 6"/>
+          <p:cNvPr id="6" name="TextBox 5"/>
           <p:cNvSpPr txBox="1"/>
           <p:nvPr/>
         </p:nvSpPr>
@@ -16234,7 +14005,7 @@
                       </p:stCondLst>
                       <p:childTnLst>
                         <p:par>
-                          <p:cTn id="8" presetID="23" presetClass="entr" presetSubtype="16" fill="hold" grpId="0" nodeType="afterEffect">
+                          <p:cTn id="6" presetID="10" presetClass="entr" presetSubtype="0" fill="hold" grpId="0" nodeType="afterEffect">
                             <p:stCondLst>
                               <p:cond delay="0"/>
                             </p:stCondLst>
@@ -16247,88 +14018,7 @@
                                     </p:stCondLst>
                                   </p:cTn>
                                   <p:tgtEl>
-                                    <p:spTgt spid="3"/>
-                                  </p:tgtEl>
-                                  <p:attrNameLst>
-                                    <p:attrName>style.visibility</p:attrName>
-                                  </p:attrNameLst>
-                                </p:cBhvr>
-                                <p:to>
-                                  <p:strVal val="visible"/>
-                                </p:to>
-                              </p:set>
-                              <p:anim calcmode="lin" valueType="num">
-                                <p:cBhvr additive="base">
-                                  <p:cTn id="5" dur="600" fill="hold"/>
-                                  <p:tgtEl>
-                                    <p:spTgt spid="3"/>
-                                  </p:tgtEl>
-                                  <p:attrNameLst>
-                                    <p:attrName>ppt_w</p:attrName>
-                                  </p:attrNameLst>
-                                </p:cBhvr>
-                                <p:tavLst>
-                                  <p:tav tm="0">
-                                    <p:val>
-                                      <p:fltVal val="0.3"/>
-                                    </p:val>
-                                  </p:tav>
-                                  <p:tav tm="100000">
-                                    <p:val>
-                                      <p:fltVal val="1"/>
-                                    </p:val>
-                                  </p:tav>
-                                </p:tavLst>
-                              </p:anim>
-                              <p:anim calcmode="lin" valueType="num">
-                                <p:cBhvr additive="base">
-                                  <p:cTn id="6" dur="600" fill="hold"/>
-                                  <p:tgtEl>
-                                    <p:spTgt spid="3"/>
-                                  </p:tgtEl>
-                                  <p:attrNameLst>
-                                    <p:attrName>ppt_h</p:attrName>
-                                  </p:attrNameLst>
-                                </p:cBhvr>
-                                <p:tavLst>
-                                  <p:tav tm="0">
-                                    <p:val>
-                                      <p:fltVal val="0.3"/>
-                                    </p:val>
-                                  </p:tav>
-                                  <p:tav tm="100000">
-                                    <p:val>
-                                      <p:fltVal val="1"/>
-                                    </p:val>
-                                  </p:tav>
-                                </p:tavLst>
-                              </p:anim>
-                              <p:animEffect transition="in" filter="fade">
-                                <p:cBhvr>
-                                  <p:cTn id="7" dur="600"/>
-                                  <p:tgtEl>
-                                    <p:spTgt spid="3"/>
-                                  </p:tgtEl>
-                                </p:cBhvr>
-                              </p:animEffect>
-                            </p:childTnLst>
-                          </p:cTn>
-                        </p:par>
-                        <p:par>
-                          <p:cTn id="11" presetID="10" presetClass="entr" presetSubtype="0" fill="hold" grpId="0" nodeType="afterEffect">
-                            <p:stCondLst>
-                              <p:cond delay="350"/>
-                            </p:stCondLst>
-                            <p:childTnLst>
-                              <p:set>
-                                <p:cBhvr>
-                                  <p:cTn id="9" dur="1" fill="hold">
-                                    <p:stCondLst>
-                                      <p:cond delay="0"/>
-                                    </p:stCondLst>
-                                  </p:cTn>
-                                  <p:tgtEl>
-                                    <p:spTgt spid="5"/>
+                                    <p:spTgt spid="4"/>
                                   </p:tgtEl>
                                   <p:attrNameLst>
                                     <p:attrName>style.visibility</p:attrName>
@@ -16340,9 +14030,9 @@
                               </p:set>
                               <p:animEffect transition="in" filter="fade">
                                 <p:cBhvr>
-                                  <p:cTn id="10" dur="400"/>
+                                  <p:cTn id="5" dur="400"/>
                                   <p:tgtEl>
-                                    <p:spTgt spid="5"/>
+                                    <p:spTgt spid="4"/>
                                   </p:tgtEl>
                                 </p:cBhvr>
                               </p:animEffect>
@@ -16350,20 +14040,20 @@
                           </p:cTn>
                         </p:par>
                         <p:par>
-                          <p:cTn id="14" presetID="10" presetClass="entr" presetSubtype="0" fill="hold" grpId="0" nodeType="afterEffect">
+                          <p:cTn id="9" presetID="10" presetClass="entr" presetSubtype="0" fill="hold" grpId="0" nodeType="afterEffect">
                             <p:stCondLst>
-                              <p:cond delay="600"/>
+                              <p:cond delay="250"/>
                             </p:stCondLst>
                             <p:childTnLst>
                               <p:set>
                                 <p:cBhvr>
-                                  <p:cTn id="12" dur="1" fill="hold">
+                                  <p:cTn id="7" dur="1" fill="hold">
                                     <p:stCondLst>
                                       <p:cond delay="0"/>
                                     </p:stCondLst>
                                   </p:cTn>
                                   <p:tgtEl>
-                                    <p:spTgt spid="7"/>
+                                    <p:spTgt spid="6"/>
                                   </p:tgtEl>
                                   <p:attrNameLst>
                                     <p:attrName>style.visibility</p:attrName>
@@ -16375,9 +14065,9 @@
                               </p:set>
                               <p:animEffect transition="in" filter="fade">
                                 <p:cBhvr>
-                                  <p:cTn id="13" dur="400"/>
+                                  <p:cTn id="8" dur="400"/>
                                   <p:tgtEl>
-                                    <p:spTgt spid="7"/>
+                                    <p:spTgt spid="6"/>
                                   </p:tgtEl>
                                 </p:cBhvr>
                               </p:animEffect>
@@ -16466,39 +14156,15 @@
           </a:p>
         </p:txBody>
       </p:sp>
-      <p:pic>
-        <p:nvPicPr>
-          <p:cNvPr id="3" name="Picture 2" descr="LOGO-OCEO.png"/>
-          <p:cNvPicPr>
-            <a:picLocks noChangeAspect="1"/>
-          </p:cNvPicPr>
+      <p:sp>
+        <p:nvSpPr>
+          <p:cNvPr id="3" name="Rectangle 2"/>
+          <p:cNvSpPr/>
           <p:nvPr/>
-        </p:nvPicPr>
-        <p:blipFill>
-          <a:blip r:embed="rId2"/>
-          <a:stretch>
-            <a:fillRect/>
-          </a:stretch>
-        </p:blipFill>
+        </p:nvSpPr>
         <p:spPr>
           <a:xfrm>
-            <a:off x="868680" y="777240"/>
-            <a:ext cx="2468880" cy="1991869"/>
-          </a:xfrm>
-          <a:prstGeom prst="rect">
-            <a:avLst/>
-          </a:prstGeom>
-        </p:spPr>
-      </p:pic>
-      <p:sp>
-        <p:nvSpPr>
-          <p:cNvPr id="4" name="Rectangle 3"/>
-          <p:cNvSpPr/>
-          <p:nvPr/>
-        </p:nvSpPr>
-        <p:spPr>
-          <a:xfrm>
-            <a:off x="914400" y="3977639"/>
+            <a:off x="914400" y="2651760"/>
             <a:ext cx="2011680" cy="38100"/>
           </a:xfrm>
           <a:prstGeom prst="rect">
@@ -16536,13 +14202,13 @@
       </p:sp>
       <p:sp>
         <p:nvSpPr>
-          <p:cNvPr id="5" name="TextBox 4"/>
+          <p:cNvPr id="4" name="TextBox 3"/>
           <p:cNvSpPr txBox="1"/>
           <p:nvPr/>
         </p:nvSpPr>
         <p:spPr>
           <a:xfrm>
-            <a:off x="896112" y="4206240"/>
+            <a:off x="896112" y="2880360"/>
             <a:ext cx="10058400" cy="2194560"/>
           </a:xfrm>
           <a:prstGeom prst="rect">
@@ -16626,7 +14292,7 @@
                       </p:stCondLst>
                       <p:childTnLst>
                         <p:par>
-                          <p:cTn id="8" presetID="23" presetClass="entr" presetSubtype="16" fill="hold" grpId="0" nodeType="afterEffect">
+                          <p:cTn id="6" presetID="10" presetClass="entr" presetSubtype="0" fill="hold" grpId="0" nodeType="afterEffect">
                             <p:stCondLst>
                               <p:cond delay="0"/>
                             </p:stCondLst>
@@ -16639,88 +14305,7 @@
                                     </p:stCondLst>
                                   </p:cTn>
                                   <p:tgtEl>
-                                    <p:spTgt spid="3"/>
-                                  </p:tgtEl>
-                                  <p:attrNameLst>
-                                    <p:attrName>style.visibility</p:attrName>
-                                  </p:attrNameLst>
-                                </p:cBhvr>
-                                <p:to>
-                                  <p:strVal val="visible"/>
-                                </p:to>
-                              </p:set>
-                              <p:anim calcmode="lin" valueType="num">
-                                <p:cBhvr additive="base">
-                                  <p:cTn id="5" dur="600" fill="hold"/>
-                                  <p:tgtEl>
-                                    <p:spTgt spid="3"/>
-                                  </p:tgtEl>
-                                  <p:attrNameLst>
-                                    <p:attrName>ppt_w</p:attrName>
-                                  </p:attrNameLst>
-                                </p:cBhvr>
-                                <p:tavLst>
-                                  <p:tav tm="0">
-                                    <p:val>
-                                      <p:fltVal val="0.3"/>
-                                    </p:val>
-                                  </p:tav>
-                                  <p:tav tm="100000">
-                                    <p:val>
-                                      <p:fltVal val="1"/>
-                                    </p:val>
-                                  </p:tav>
-                                </p:tavLst>
-                              </p:anim>
-                              <p:anim calcmode="lin" valueType="num">
-                                <p:cBhvr additive="base">
-                                  <p:cTn id="6" dur="600" fill="hold"/>
-                                  <p:tgtEl>
-                                    <p:spTgt spid="3"/>
-                                  </p:tgtEl>
-                                  <p:attrNameLst>
-                                    <p:attrName>ppt_h</p:attrName>
-                                  </p:attrNameLst>
-                                </p:cBhvr>
-                                <p:tavLst>
-                                  <p:tav tm="0">
-                                    <p:val>
-                                      <p:fltVal val="0.3"/>
-                                    </p:val>
-                                  </p:tav>
-                                  <p:tav tm="100000">
-                                    <p:val>
-                                      <p:fltVal val="1"/>
-                                    </p:val>
-                                  </p:tav>
-                                </p:tavLst>
-                              </p:anim>
-                              <p:animEffect transition="in" filter="fade">
-                                <p:cBhvr>
-                                  <p:cTn id="7" dur="600"/>
-                                  <p:tgtEl>
-                                    <p:spTgt spid="3"/>
-                                  </p:tgtEl>
-                                </p:cBhvr>
-                              </p:animEffect>
-                            </p:childTnLst>
-                          </p:cTn>
-                        </p:par>
-                        <p:par>
-                          <p:cTn id="11" presetID="10" presetClass="entr" presetSubtype="0" fill="hold" grpId="0" nodeType="afterEffect">
-                            <p:stCondLst>
-                              <p:cond delay="350"/>
-                            </p:stCondLst>
-                            <p:childTnLst>
-                              <p:set>
-                                <p:cBhvr>
-                                  <p:cTn id="9" dur="1" fill="hold">
-                                    <p:stCondLst>
-                                      <p:cond delay="0"/>
-                                    </p:stCondLst>
-                                  </p:cTn>
-                                  <p:tgtEl>
-                                    <p:spTgt spid="5"/>
+                                    <p:spTgt spid="4"/>
                                   </p:tgtEl>
                                   <p:attrNameLst>
                                     <p:attrName>style.visibility</p:attrName>
@@ -16732,9 +14317,9 @@
                               </p:set>
                               <p:animEffect transition="in" filter="fade">
                                 <p:cBhvr>
-                                  <p:cTn id="10" dur="400"/>
+                                  <p:cTn id="5" dur="400"/>
                                   <p:tgtEl>
-                                    <p:spTgt spid="5"/>
+                                    <p:spTgt spid="4"/>
                                   </p:tgtEl>
                                 </p:cBhvr>
                               </p:animEffect>
@@ -16823,33 +14408,9 @@
           </a:p>
         </p:txBody>
       </p:sp>
-      <p:pic>
-        <p:nvPicPr>
-          <p:cNvPr id="3" name="Picture 2" descr="LOGO-OCEO-mark.png"/>
-          <p:cNvPicPr>
-            <a:picLocks noChangeAspect="1"/>
-          </p:cNvPicPr>
-          <p:nvPr/>
-        </p:nvPicPr>
-        <p:blipFill>
-          <a:blip r:embed="rId2"/>
-          <a:stretch>
-            <a:fillRect/>
-          </a:stretch>
-        </p:blipFill>
-        <p:spPr>
-          <a:xfrm>
-            <a:off x="10637215" y="457200"/>
-            <a:ext cx="1051560" cy="954471"/>
-          </a:xfrm>
-          <a:prstGeom prst="rect">
-            <a:avLst/>
-          </a:prstGeom>
-        </p:spPr>
-      </p:pic>
-      <p:sp>
-        <p:nvSpPr>
-          <p:cNvPr id="4" name="Rectangle 3"/>
+      <p:sp>
+        <p:nvSpPr>
+          <p:cNvPr id="3" name="Rectangle 2"/>
           <p:cNvSpPr/>
           <p:nvPr/>
         </p:nvSpPr>
@@ -16893,7 +14454,7 @@
       </p:sp>
       <p:sp>
         <p:nvSpPr>
-          <p:cNvPr id="5" name="TextBox 4"/>
+          <p:cNvPr id="4" name="TextBox 3"/>
           <p:cNvSpPr txBox="1"/>
           <p:nvPr/>
         </p:nvSpPr>
@@ -16943,7 +14504,7 @@
       </p:sp>
       <p:sp>
         <p:nvSpPr>
-          <p:cNvPr id="6" name="Rectangle 5"/>
+          <p:cNvPr id="5" name="Rectangle 4"/>
           <p:cNvSpPr/>
           <p:nvPr/>
         </p:nvSpPr>
@@ -16987,7 +14548,7 @@
       </p:sp>
       <p:sp>
         <p:nvSpPr>
-          <p:cNvPr id="7" name="TextBox 6"/>
+          <p:cNvPr id="6" name="TextBox 5"/>
           <p:cNvSpPr txBox="1"/>
           <p:nvPr/>
         </p:nvSpPr>
@@ -17171,7 +14732,7 @@
                       </p:stCondLst>
                       <p:childTnLst>
                         <p:par>
-                          <p:cTn id="8" presetID="23" presetClass="entr" presetSubtype="16" fill="hold" grpId="0" nodeType="afterEffect">
+                          <p:cTn id="6" presetID="10" presetClass="entr" presetSubtype="0" fill="hold" grpId="0" nodeType="afterEffect">
                             <p:stCondLst>
                               <p:cond delay="0"/>
                             </p:stCondLst>
@@ -17184,88 +14745,7 @@
                                     </p:stCondLst>
                                   </p:cTn>
                                   <p:tgtEl>
-                                    <p:spTgt spid="3"/>
-                                  </p:tgtEl>
-                                  <p:attrNameLst>
-                                    <p:attrName>style.visibility</p:attrName>
-                                  </p:attrNameLst>
-                                </p:cBhvr>
-                                <p:to>
-                                  <p:strVal val="visible"/>
-                                </p:to>
-                              </p:set>
-                              <p:anim calcmode="lin" valueType="num">
-                                <p:cBhvr additive="base">
-                                  <p:cTn id="5" dur="600" fill="hold"/>
-                                  <p:tgtEl>
-                                    <p:spTgt spid="3"/>
-                                  </p:tgtEl>
-                                  <p:attrNameLst>
-                                    <p:attrName>ppt_w</p:attrName>
-                                  </p:attrNameLst>
-                                </p:cBhvr>
-                                <p:tavLst>
-                                  <p:tav tm="0">
-                                    <p:val>
-                                      <p:fltVal val="0.3"/>
-                                    </p:val>
-                                  </p:tav>
-                                  <p:tav tm="100000">
-                                    <p:val>
-                                      <p:fltVal val="1"/>
-                                    </p:val>
-                                  </p:tav>
-                                </p:tavLst>
-                              </p:anim>
-                              <p:anim calcmode="lin" valueType="num">
-                                <p:cBhvr additive="base">
-                                  <p:cTn id="6" dur="600" fill="hold"/>
-                                  <p:tgtEl>
-                                    <p:spTgt spid="3"/>
-                                  </p:tgtEl>
-                                  <p:attrNameLst>
-                                    <p:attrName>ppt_h</p:attrName>
-                                  </p:attrNameLst>
-                                </p:cBhvr>
-                                <p:tavLst>
-                                  <p:tav tm="0">
-                                    <p:val>
-                                      <p:fltVal val="0.3"/>
-                                    </p:val>
-                                  </p:tav>
-                                  <p:tav tm="100000">
-                                    <p:val>
-                                      <p:fltVal val="1"/>
-                                    </p:val>
-                                  </p:tav>
-                                </p:tavLst>
-                              </p:anim>
-                              <p:animEffect transition="in" filter="fade">
-                                <p:cBhvr>
-                                  <p:cTn id="7" dur="600"/>
-                                  <p:tgtEl>
-                                    <p:spTgt spid="3"/>
-                                  </p:tgtEl>
-                                </p:cBhvr>
-                              </p:animEffect>
-                            </p:childTnLst>
-                          </p:cTn>
-                        </p:par>
-                        <p:par>
-                          <p:cTn id="11" presetID="10" presetClass="entr" presetSubtype="0" fill="hold" grpId="0" nodeType="afterEffect">
-                            <p:stCondLst>
-                              <p:cond delay="350"/>
-                            </p:stCondLst>
-                            <p:childTnLst>
-                              <p:set>
-                                <p:cBhvr>
-                                  <p:cTn id="9" dur="1" fill="hold">
-                                    <p:stCondLst>
-                                      <p:cond delay="0"/>
-                                    </p:stCondLst>
-                                  </p:cTn>
-                                  <p:tgtEl>
-                                    <p:spTgt spid="5"/>
+                                    <p:spTgt spid="4"/>
                                   </p:tgtEl>
                                   <p:attrNameLst>
                                     <p:attrName>style.visibility</p:attrName>
@@ -17277,9 +14757,9 @@
                               </p:set>
                               <p:animEffect transition="in" filter="fade">
                                 <p:cBhvr>
-                                  <p:cTn id="10" dur="400"/>
+                                  <p:cTn id="5" dur="400"/>
                                   <p:tgtEl>
-                                    <p:spTgt spid="5"/>
+                                    <p:spTgt spid="4"/>
                                   </p:tgtEl>
                                 </p:cBhvr>
                               </p:animEffect>
@@ -17287,20 +14767,20 @@
                           </p:cTn>
                         </p:par>
                         <p:par>
-                          <p:cTn id="14" presetID="10" presetClass="entr" presetSubtype="0" fill="hold" grpId="0" nodeType="afterEffect">
+                          <p:cTn id="9" presetID="10" presetClass="entr" presetSubtype="0" fill="hold" grpId="0" nodeType="afterEffect">
                             <p:stCondLst>
-                              <p:cond delay="600"/>
+                              <p:cond delay="250"/>
                             </p:stCondLst>
                             <p:childTnLst>
                               <p:set>
                                 <p:cBhvr>
-                                  <p:cTn id="12" dur="1" fill="hold">
+                                  <p:cTn id="7" dur="1" fill="hold">
                                     <p:stCondLst>
                                       <p:cond delay="0"/>
                                     </p:stCondLst>
                                   </p:cTn>
                                   <p:tgtEl>
-                                    <p:spTgt spid="7"/>
+                                    <p:spTgt spid="6"/>
                                   </p:tgtEl>
                                   <p:attrNameLst>
                                     <p:attrName>style.visibility</p:attrName>
@@ -17312,9 +14792,9 @@
                               </p:set>
                               <p:animEffect transition="in" filter="fade">
                                 <p:cBhvr>
-                                  <p:cTn id="13" dur="400"/>
+                                  <p:cTn id="8" dur="400"/>
                                   <p:tgtEl>
-                                    <p:spTgt spid="7"/>
+                                    <p:spTgt spid="6"/>
                                   </p:tgtEl>
                                 </p:cBhvr>
                               </p:animEffect>
@@ -17403,33 +14883,9 @@
           </a:p>
         </p:txBody>
       </p:sp>
-      <p:pic>
-        <p:nvPicPr>
-          <p:cNvPr id="3" name="Picture 2" descr="LOGO-OCEO-mark.png"/>
-          <p:cNvPicPr>
-            <a:picLocks noChangeAspect="1"/>
-          </p:cNvPicPr>
-          <p:nvPr/>
-        </p:nvPicPr>
-        <p:blipFill>
-          <a:blip r:embed="rId2"/>
-          <a:stretch>
-            <a:fillRect/>
-          </a:stretch>
-        </p:blipFill>
-        <p:spPr>
-          <a:xfrm>
-            <a:off x="10637215" y="457200"/>
-            <a:ext cx="1051560" cy="954471"/>
-          </a:xfrm>
-          <a:prstGeom prst="rect">
-            <a:avLst/>
-          </a:prstGeom>
-        </p:spPr>
-      </p:pic>
-      <p:sp>
-        <p:nvSpPr>
-          <p:cNvPr id="4" name="Rectangle 3"/>
+      <p:sp>
+        <p:nvSpPr>
+          <p:cNvPr id="3" name="Rectangle 2"/>
           <p:cNvSpPr/>
           <p:nvPr/>
         </p:nvSpPr>
@@ -17473,7 +14929,7 @@
       </p:sp>
       <p:sp>
         <p:nvSpPr>
-          <p:cNvPr id="5" name="TextBox 4"/>
+          <p:cNvPr id="4" name="TextBox 3"/>
           <p:cNvSpPr txBox="1"/>
           <p:nvPr/>
         </p:nvSpPr>
@@ -17523,7 +14979,7 @@
       </p:sp>
       <p:sp>
         <p:nvSpPr>
-          <p:cNvPr id="6" name="Rectangle 5"/>
+          <p:cNvPr id="5" name="Rectangle 4"/>
           <p:cNvSpPr/>
           <p:nvPr/>
         </p:nvSpPr>
@@ -17567,7 +15023,7 @@
       </p:sp>
       <p:sp>
         <p:nvSpPr>
-          <p:cNvPr id="7" name="TextBox 6"/>
+          <p:cNvPr id="6" name="TextBox 5"/>
           <p:cNvSpPr txBox="1"/>
           <p:nvPr/>
         </p:nvSpPr>
@@ -17751,7 +15207,7 @@
                       </p:stCondLst>
                       <p:childTnLst>
                         <p:par>
-                          <p:cTn id="8" presetID="23" presetClass="entr" presetSubtype="16" fill="hold" grpId="0" nodeType="afterEffect">
+                          <p:cTn id="6" presetID="10" presetClass="entr" presetSubtype="0" fill="hold" grpId="0" nodeType="afterEffect">
                             <p:stCondLst>
                               <p:cond delay="0"/>
                             </p:stCondLst>
@@ -17764,88 +15220,7 @@
                                     </p:stCondLst>
                                   </p:cTn>
                                   <p:tgtEl>
-                                    <p:spTgt spid="3"/>
-                                  </p:tgtEl>
-                                  <p:attrNameLst>
-                                    <p:attrName>style.visibility</p:attrName>
-                                  </p:attrNameLst>
-                                </p:cBhvr>
-                                <p:to>
-                                  <p:strVal val="visible"/>
-                                </p:to>
-                              </p:set>
-                              <p:anim calcmode="lin" valueType="num">
-                                <p:cBhvr additive="base">
-                                  <p:cTn id="5" dur="600" fill="hold"/>
-                                  <p:tgtEl>
-                                    <p:spTgt spid="3"/>
-                                  </p:tgtEl>
-                                  <p:attrNameLst>
-                                    <p:attrName>ppt_w</p:attrName>
-                                  </p:attrNameLst>
-                                </p:cBhvr>
-                                <p:tavLst>
-                                  <p:tav tm="0">
-                                    <p:val>
-                                      <p:fltVal val="0.3"/>
-                                    </p:val>
-                                  </p:tav>
-                                  <p:tav tm="100000">
-                                    <p:val>
-                                      <p:fltVal val="1"/>
-                                    </p:val>
-                                  </p:tav>
-                                </p:tavLst>
-                              </p:anim>
-                              <p:anim calcmode="lin" valueType="num">
-                                <p:cBhvr additive="base">
-                                  <p:cTn id="6" dur="600" fill="hold"/>
-                                  <p:tgtEl>
-                                    <p:spTgt spid="3"/>
-                                  </p:tgtEl>
-                                  <p:attrNameLst>
-                                    <p:attrName>ppt_h</p:attrName>
-                                  </p:attrNameLst>
-                                </p:cBhvr>
-                                <p:tavLst>
-                                  <p:tav tm="0">
-                                    <p:val>
-                                      <p:fltVal val="0.3"/>
-                                    </p:val>
-                                  </p:tav>
-                                  <p:tav tm="100000">
-                                    <p:val>
-                                      <p:fltVal val="1"/>
-                                    </p:val>
-                                  </p:tav>
-                                </p:tavLst>
-                              </p:anim>
-                              <p:animEffect transition="in" filter="fade">
-                                <p:cBhvr>
-                                  <p:cTn id="7" dur="600"/>
-                                  <p:tgtEl>
-                                    <p:spTgt spid="3"/>
-                                  </p:tgtEl>
-                                </p:cBhvr>
-                              </p:animEffect>
-                            </p:childTnLst>
-                          </p:cTn>
-                        </p:par>
-                        <p:par>
-                          <p:cTn id="11" presetID="10" presetClass="entr" presetSubtype="0" fill="hold" grpId="0" nodeType="afterEffect">
-                            <p:stCondLst>
-                              <p:cond delay="350"/>
-                            </p:stCondLst>
-                            <p:childTnLst>
-                              <p:set>
-                                <p:cBhvr>
-                                  <p:cTn id="9" dur="1" fill="hold">
-                                    <p:stCondLst>
-                                      <p:cond delay="0"/>
-                                    </p:stCondLst>
-                                  </p:cTn>
-                                  <p:tgtEl>
-                                    <p:spTgt spid="5"/>
+                                    <p:spTgt spid="4"/>
                                   </p:tgtEl>
                                   <p:attrNameLst>
                                     <p:attrName>style.visibility</p:attrName>
@@ -17857,9 +15232,9 @@
                               </p:set>
                               <p:animEffect transition="in" filter="fade">
                                 <p:cBhvr>
-                                  <p:cTn id="10" dur="400"/>
+                                  <p:cTn id="5" dur="400"/>
                                   <p:tgtEl>
-                                    <p:spTgt spid="5"/>
+                                    <p:spTgt spid="4"/>
                                   </p:tgtEl>
                                 </p:cBhvr>
                               </p:animEffect>
@@ -17867,20 +15242,20 @@
                           </p:cTn>
                         </p:par>
                         <p:par>
-                          <p:cTn id="14" presetID="10" presetClass="entr" presetSubtype="0" fill="hold" grpId="0" nodeType="afterEffect">
+                          <p:cTn id="9" presetID="10" presetClass="entr" presetSubtype="0" fill="hold" grpId="0" nodeType="afterEffect">
                             <p:stCondLst>
-                              <p:cond delay="600"/>
+                              <p:cond delay="250"/>
                             </p:stCondLst>
                             <p:childTnLst>
                               <p:set>
                                 <p:cBhvr>
-                                  <p:cTn id="12" dur="1" fill="hold">
+                                  <p:cTn id="7" dur="1" fill="hold">
                                     <p:stCondLst>
                                       <p:cond delay="0"/>
                                     </p:stCondLst>
                                   </p:cTn>
                                   <p:tgtEl>
-                                    <p:spTgt spid="7"/>
+                                    <p:spTgt spid="6"/>
                                   </p:tgtEl>
                                   <p:attrNameLst>
                                     <p:attrName>style.visibility</p:attrName>
@@ -17892,9 +15267,9 @@
                               </p:set>
                               <p:animEffect transition="in" filter="fade">
                                 <p:cBhvr>
-                                  <p:cTn id="13" dur="400"/>
+                                  <p:cTn id="8" dur="400"/>
                                   <p:tgtEl>
-                                    <p:spTgt spid="7"/>
+                                    <p:spTgt spid="6"/>
                                   </p:tgtEl>
                                 </p:cBhvr>
                               </p:animEffect>
@@ -17983,33 +15358,9 @@
           </a:p>
         </p:txBody>
       </p:sp>
-      <p:pic>
-        <p:nvPicPr>
-          <p:cNvPr id="3" name="Picture 2" descr="LOGO-OCEO-mark.png"/>
-          <p:cNvPicPr>
-            <a:picLocks noChangeAspect="1"/>
-          </p:cNvPicPr>
-          <p:nvPr/>
-        </p:nvPicPr>
-        <p:blipFill>
-          <a:blip r:embed="rId2"/>
-          <a:stretch>
-            <a:fillRect/>
-          </a:stretch>
-        </p:blipFill>
-        <p:spPr>
-          <a:xfrm>
-            <a:off x="10637215" y="457200"/>
-            <a:ext cx="1051560" cy="954471"/>
-          </a:xfrm>
-          <a:prstGeom prst="rect">
-            <a:avLst/>
-          </a:prstGeom>
-        </p:spPr>
-      </p:pic>
-      <p:sp>
-        <p:nvSpPr>
-          <p:cNvPr id="4" name="Rectangle 3"/>
+      <p:sp>
+        <p:nvSpPr>
+          <p:cNvPr id="3" name="Rectangle 2"/>
           <p:cNvSpPr/>
           <p:nvPr/>
         </p:nvSpPr>
@@ -18053,7 +15404,7 @@
       </p:sp>
       <p:sp>
         <p:nvSpPr>
-          <p:cNvPr id="5" name="TextBox 4"/>
+          <p:cNvPr id="4" name="TextBox 3"/>
           <p:cNvSpPr txBox="1"/>
           <p:nvPr/>
         </p:nvSpPr>
@@ -18103,7 +15454,7 @@
       </p:sp>
       <p:sp>
         <p:nvSpPr>
-          <p:cNvPr id="6" name="Rectangle 5"/>
+          <p:cNvPr id="5" name="Rectangle 4"/>
           <p:cNvSpPr/>
           <p:nvPr/>
         </p:nvSpPr>
@@ -18147,7 +15498,7 @@
       </p:sp>
       <p:graphicFrame>
         <p:nvGraphicFramePr>
-          <p:cNvPr id="7" name="Table 6"/>
+          <p:cNvPr id="6" name="Table 5"/>
           <p:cNvGraphicFramePr>
             <a:graphicFrameLocks noGrp="1"/>
           </p:cNvGraphicFramePr>
@@ -18653,7 +16004,7 @@
       </p:graphicFrame>
       <p:sp>
         <p:nvSpPr>
-          <p:cNvPr id="8" name="TextBox 7"/>
+          <p:cNvPr id="7" name="TextBox 6"/>
           <p:cNvSpPr txBox="1"/>
           <p:nvPr/>
         </p:nvSpPr>
@@ -18729,7 +16080,7 @@
                       </p:stCondLst>
                       <p:childTnLst>
                         <p:par>
-                          <p:cTn id="8" presetID="23" presetClass="entr" presetSubtype="16" fill="hold" grpId="0" nodeType="afterEffect">
+                          <p:cTn id="6" presetID="10" presetClass="entr" presetSubtype="0" fill="hold" grpId="0" nodeType="afterEffect">
                             <p:stCondLst>
                               <p:cond delay="0"/>
                             </p:stCondLst>
@@ -18742,88 +16093,7 @@
                                     </p:stCondLst>
                                   </p:cTn>
                                   <p:tgtEl>
-                                    <p:spTgt spid="3"/>
-                                  </p:tgtEl>
-                                  <p:attrNameLst>
-                                    <p:attrName>style.visibility</p:attrName>
-                                  </p:attrNameLst>
-                                </p:cBhvr>
-                                <p:to>
-                                  <p:strVal val="visible"/>
-                                </p:to>
-                              </p:set>
-                              <p:anim calcmode="lin" valueType="num">
-                                <p:cBhvr additive="base">
-                                  <p:cTn id="5" dur="600" fill="hold"/>
-                                  <p:tgtEl>
-                                    <p:spTgt spid="3"/>
-                                  </p:tgtEl>
-                                  <p:attrNameLst>
-                                    <p:attrName>ppt_w</p:attrName>
-                                  </p:attrNameLst>
-                                </p:cBhvr>
-                                <p:tavLst>
-                                  <p:tav tm="0">
-                                    <p:val>
-                                      <p:fltVal val="0.3"/>
-                                    </p:val>
-                                  </p:tav>
-                                  <p:tav tm="100000">
-                                    <p:val>
-                                      <p:fltVal val="1"/>
-                                    </p:val>
-                                  </p:tav>
-                                </p:tavLst>
-                              </p:anim>
-                              <p:anim calcmode="lin" valueType="num">
-                                <p:cBhvr additive="base">
-                                  <p:cTn id="6" dur="600" fill="hold"/>
-                                  <p:tgtEl>
-                                    <p:spTgt spid="3"/>
-                                  </p:tgtEl>
-                                  <p:attrNameLst>
-                                    <p:attrName>ppt_h</p:attrName>
-                                  </p:attrNameLst>
-                                </p:cBhvr>
-                                <p:tavLst>
-                                  <p:tav tm="0">
-                                    <p:val>
-                                      <p:fltVal val="0.3"/>
-                                    </p:val>
-                                  </p:tav>
-                                  <p:tav tm="100000">
-                                    <p:val>
-                                      <p:fltVal val="1"/>
-                                    </p:val>
-                                  </p:tav>
-                                </p:tavLst>
-                              </p:anim>
-                              <p:animEffect transition="in" filter="fade">
-                                <p:cBhvr>
-                                  <p:cTn id="7" dur="600"/>
-                                  <p:tgtEl>
-                                    <p:spTgt spid="3"/>
-                                  </p:tgtEl>
-                                </p:cBhvr>
-                              </p:animEffect>
-                            </p:childTnLst>
-                          </p:cTn>
-                        </p:par>
-                        <p:par>
-                          <p:cTn id="11" presetID="10" presetClass="entr" presetSubtype="0" fill="hold" grpId="0" nodeType="afterEffect">
-                            <p:stCondLst>
-                              <p:cond delay="350"/>
-                            </p:stCondLst>
-                            <p:childTnLst>
-                              <p:set>
-                                <p:cBhvr>
-                                  <p:cTn id="9" dur="1" fill="hold">
-                                    <p:stCondLst>
-                                      <p:cond delay="0"/>
-                                    </p:stCondLst>
-                                  </p:cTn>
-                                  <p:tgtEl>
-                                    <p:spTgt spid="5"/>
+                                    <p:spTgt spid="4"/>
                                   </p:tgtEl>
                                   <p:attrNameLst>
                                     <p:attrName>style.visibility</p:attrName>
@@ -18835,9 +16105,9 @@
                               </p:set>
                               <p:animEffect transition="in" filter="fade">
                                 <p:cBhvr>
-                                  <p:cTn id="10" dur="400"/>
+                                  <p:cTn id="5" dur="400"/>
                                   <p:tgtEl>
-                                    <p:spTgt spid="5"/>
+                                    <p:spTgt spid="4"/>
                                   </p:tgtEl>
                                 </p:cBhvr>
                               </p:animEffect>
@@ -18845,14 +16115,49 @@
                           </p:cTn>
                         </p:par>
                         <p:par>
-                          <p:cTn id="14" presetID="10" presetClass="entr" presetSubtype="0" fill="hold" grpId="0" nodeType="afterEffect">
+                          <p:cTn id="9" presetID="10" presetClass="entr" presetSubtype="0" fill="hold" grpId="0" nodeType="afterEffect">
                             <p:stCondLst>
-                              <p:cond delay="600"/>
+                              <p:cond delay="250"/>
                             </p:stCondLst>
                             <p:childTnLst>
                               <p:set>
                                 <p:cBhvr>
-                                  <p:cTn id="12" dur="1" fill="hold">
+                                  <p:cTn id="7" dur="1" fill="hold">
+                                    <p:stCondLst>
+                                      <p:cond delay="0"/>
+                                    </p:stCondLst>
+                                  </p:cTn>
+                                  <p:tgtEl>
+                                    <p:spTgt spid="6"/>
+                                  </p:tgtEl>
+                                  <p:attrNameLst>
+                                    <p:attrName>style.visibility</p:attrName>
+                                  </p:attrNameLst>
+                                </p:cBhvr>
+                                <p:to>
+                                  <p:strVal val="visible"/>
+                                </p:to>
+                              </p:set>
+                              <p:animEffect transition="in" filter="fade">
+                                <p:cBhvr>
+                                  <p:cTn id="8" dur="400"/>
+                                  <p:tgtEl>
+                                    <p:spTgt spid="6"/>
+                                  </p:tgtEl>
+                                </p:cBhvr>
+                              </p:animEffect>
+                            </p:childTnLst>
+                          </p:cTn>
+                        </p:par>
+                        <p:par>
+                          <p:cTn id="12" presetID="10" presetClass="entr" presetSubtype="0" fill="hold" grpId="0" nodeType="afterEffect">
+                            <p:stCondLst>
+                              <p:cond delay="500"/>
+                            </p:stCondLst>
+                            <p:childTnLst>
+                              <p:set>
+                                <p:cBhvr>
+                                  <p:cTn id="10" dur="1" fill="hold">
                                     <p:stCondLst>
                                       <p:cond delay="0"/>
                                     </p:stCondLst>
@@ -18870,44 +16175,9 @@
                               </p:set>
                               <p:animEffect transition="in" filter="fade">
                                 <p:cBhvr>
-                                  <p:cTn id="13" dur="400"/>
+                                  <p:cTn id="11" dur="400"/>
                                   <p:tgtEl>
                                     <p:spTgt spid="7"/>
-                                  </p:tgtEl>
-                                </p:cBhvr>
-                              </p:animEffect>
-                            </p:childTnLst>
-                          </p:cTn>
-                        </p:par>
-                        <p:par>
-                          <p:cTn id="17" presetID="10" presetClass="entr" presetSubtype="0" fill="hold" grpId="0" nodeType="afterEffect">
-                            <p:stCondLst>
-                              <p:cond delay="850"/>
-                            </p:stCondLst>
-                            <p:childTnLst>
-                              <p:set>
-                                <p:cBhvr>
-                                  <p:cTn id="15" dur="1" fill="hold">
-                                    <p:stCondLst>
-                                      <p:cond delay="0"/>
-                                    </p:stCondLst>
-                                  </p:cTn>
-                                  <p:tgtEl>
-                                    <p:spTgt spid="8"/>
-                                  </p:tgtEl>
-                                  <p:attrNameLst>
-                                    <p:attrName>style.visibility</p:attrName>
-                                  </p:attrNameLst>
-                                </p:cBhvr>
-                                <p:to>
-                                  <p:strVal val="visible"/>
-                                </p:to>
-                              </p:set>
-                              <p:animEffect transition="in" filter="fade">
-                                <p:cBhvr>
-                                  <p:cTn id="16" dur="400"/>
-                                  <p:tgtEl>
-                                    <p:spTgt spid="8"/>
                                   </p:tgtEl>
                                 </p:cBhvr>
                               </p:animEffect>
@@ -18996,33 +16266,9 @@
           </a:p>
         </p:txBody>
       </p:sp>
-      <p:pic>
-        <p:nvPicPr>
-          <p:cNvPr id="3" name="Picture 2" descr="LOGO-OCEO-mark.png"/>
-          <p:cNvPicPr>
-            <a:picLocks noChangeAspect="1"/>
-          </p:cNvPicPr>
-          <p:nvPr/>
-        </p:nvPicPr>
-        <p:blipFill>
-          <a:blip r:embed="rId2"/>
-          <a:stretch>
-            <a:fillRect/>
-          </a:stretch>
-        </p:blipFill>
-        <p:spPr>
-          <a:xfrm>
-            <a:off x="10637215" y="457200"/>
-            <a:ext cx="1051560" cy="954471"/>
-          </a:xfrm>
-          <a:prstGeom prst="rect">
-            <a:avLst/>
-          </a:prstGeom>
-        </p:spPr>
-      </p:pic>
-      <p:sp>
-        <p:nvSpPr>
-          <p:cNvPr id="4" name="Rectangle 3"/>
+      <p:sp>
+        <p:nvSpPr>
+          <p:cNvPr id="3" name="Rectangle 2"/>
           <p:cNvSpPr/>
           <p:nvPr/>
         </p:nvSpPr>
@@ -19066,7 +16312,7 @@
       </p:sp>
       <p:sp>
         <p:nvSpPr>
-          <p:cNvPr id="5" name="TextBox 4"/>
+          <p:cNvPr id="4" name="TextBox 3"/>
           <p:cNvSpPr txBox="1"/>
           <p:nvPr/>
         </p:nvSpPr>
@@ -19116,7 +16362,7 @@
       </p:sp>
       <p:sp>
         <p:nvSpPr>
-          <p:cNvPr id="6" name="Rectangle 5"/>
+          <p:cNvPr id="5" name="Rectangle 4"/>
           <p:cNvSpPr/>
           <p:nvPr/>
         </p:nvSpPr>
@@ -19160,7 +16406,7 @@
       </p:sp>
       <p:sp>
         <p:nvSpPr>
-          <p:cNvPr id="7" name="TextBox 6"/>
+          <p:cNvPr id="6" name="TextBox 5"/>
           <p:cNvSpPr txBox="1"/>
           <p:nvPr/>
         </p:nvSpPr>
@@ -19316,7 +16562,7 @@
                       </p:stCondLst>
                       <p:childTnLst>
                         <p:par>
-                          <p:cTn id="8" presetID="23" presetClass="entr" presetSubtype="16" fill="hold" grpId="0" nodeType="afterEffect">
+                          <p:cTn id="6" presetID="10" presetClass="entr" presetSubtype="0" fill="hold" grpId="0" nodeType="afterEffect">
                             <p:stCondLst>
                               <p:cond delay="0"/>
                             </p:stCondLst>
@@ -19329,88 +16575,7 @@
                                     </p:stCondLst>
                                   </p:cTn>
                                   <p:tgtEl>
-                                    <p:spTgt spid="3"/>
-                                  </p:tgtEl>
-                                  <p:attrNameLst>
-                                    <p:attrName>style.visibility</p:attrName>
-                                  </p:attrNameLst>
-                                </p:cBhvr>
-                                <p:to>
-                                  <p:strVal val="visible"/>
-                                </p:to>
-                              </p:set>
-                              <p:anim calcmode="lin" valueType="num">
-                                <p:cBhvr additive="base">
-                                  <p:cTn id="5" dur="600" fill="hold"/>
-                                  <p:tgtEl>
-                                    <p:spTgt spid="3"/>
-                                  </p:tgtEl>
-                                  <p:attrNameLst>
-                                    <p:attrName>ppt_w</p:attrName>
-                                  </p:attrNameLst>
-                                </p:cBhvr>
-                                <p:tavLst>
-                                  <p:tav tm="0">
-                                    <p:val>
-                                      <p:fltVal val="0.3"/>
-                                    </p:val>
-                                  </p:tav>
-                                  <p:tav tm="100000">
-                                    <p:val>
-                                      <p:fltVal val="1"/>
-                                    </p:val>
-                                  </p:tav>
-                                </p:tavLst>
-                              </p:anim>
-                              <p:anim calcmode="lin" valueType="num">
-                                <p:cBhvr additive="base">
-                                  <p:cTn id="6" dur="600" fill="hold"/>
-                                  <p:tgtEl>
-                                    <p:spTgt spid="3"/>
-                                  </p:tgtEl>
-                                  <p:attrNameLst>
-                                    <p:attrName>ppt_h</p:attrName>
-                                  </p:attrNameLst>
-                                </p:cBhvr>
-                                <p:tavLst>
-                                  <p:tav tm="0">
-                                    <p:val>
-                                      <p:fltVal val="0.3"/>
-                                    </p:val>
-                                  </p:tav>
-                                  <p:tav tm="100000">
-                                    <p:val>
-                                      <p:fltVal val="1"/>
-                                    </p:val>
-                                  </p:tav>
-                                </p:tavLst>
-                              </p:anim>
-                              <p:animEffect transition="in" filter="fade">
-                                <p:cBhvr>
-                                  <p:cTn id="7" dur="600"/>
-                                  <p:tgtEl>
-                                    <p:spTgt spid="3"/>
-                                  </p:tgtEl>
-                                </p:cBhvr>
-                              </p:animEffect>
-                            </p:childTnLst>
-                          </p:cTn>
-                        </p:par>
-                        <p:par>
-                          <p:cTn id="11" presetID="10" presetClass="entr" presetSubtype="0" fill="hold" grpId="0" nodeType="afterEffect">
-                            <p:stCondLst>
-                              <p:cond delay="350"/>
-                            </p:stCondLst>
-                            <p:childTnLst>
-                              <p:set>
-                                <p:cBhvr>
-                                  <p:cTn id="9" dur="1" fill="hold">
-                                    <p:stCondLst>
-                                      <p:cond delay="0"/>
-                                    </p:stCondLst>
-                                  </p:cTn>
-                                  <p:tgtEl>
-                                    <p:spTgt spid="5"/>
+                                    <p:spTgt spid="4"/>
                                   </p:tgtEl>
                                   <p:attrNameLst>
                                     <p:attrName>style.visibility</p:attrName>
@@ -19422,9 +16587,9 @@
                               </p:set>
                               <p:animEffect transition="in" filter="fade">
                                 <p:cBhvr>
-                                  <p:cTn id="10" dur="400"/>
+                                  <p:cTn id="5" dur="400"/>
                                   <p:tgtEl>
-                                    <p:spTgt spid="5"/>
+                                    <p:spTgt spid="4"/>
                                   </p:tgtEl>
                                 </p:cBhvr>
                               </p:animEffect>
@@ -19432,20 +16597,20 @@
                           </p:cTn>
                         </p:par>
                         <p:par>
-                          <p:cTn id="14" presetID="10" presetClass="entr" presetSubtype="0" fill="hold" grpId="0" nodeType="afterEffect">
+                          <p:cTn id="9" presetID="10" presetClass="entr" presetSubtype="0" fill="hold" grpId="0" nodeType="afterEffect">
                             <p:stCondLst>
-                              <p:cond delay="600"/>
+                              <p:cond delay="250"/>
                             </p:stCondLst>
                             <p:childTnLst>
                               <p:set>
                                 <p:cBhvr>
-                                  <p:cTn id="12" dur="1" fill="hold">
+                                  <p:cTn id="7" dur="1" fill="hold">
                                     <p:stCondLst>
                                       <p:cond delay="0"/>
                                     </p:stCondLst>
                                   </p:cTn>
                                   <p:tgtEl>
-                                    <p:spTgt spid="7"/>
+                                    <p:spTgt spid="6"/>
                                   </p:tgtEl>
                                   <p:attrNameLst>
                                     <p:attrName>style.visibility</p:attrName>
@@ -19457,9 +16622,9 @@
                               </p:set>
                               <p:animEffect transition="in" filter="fade">
                                 <p:cBhvr>
-                                  <p:cTn id="13" dur="400"/>
+                                  <p:cTn id="8" dur="400"/>
                                   <p:tgtEl>
-                                    <p:spTgt spid="7"/>
+                                    <p:spTgt spid="6"/>
                                   </p:tgtEl>
                                 </p:cBhvr>
                               </p:animEffect>
@@ -19548,33 +16713,9 @@
           </a:p>
         </p:txBody>
       </p:sp>
-      <p:pic>
-        <p:nvPicPr>
-          <p:cNvPr id="3" name="Picture 2" descr="LOGO-OCEO-mark.png"/>
-          <p:cNvPicPr>
-            <a:picLocks noChangeAspect="1"/>
-          </p:cNvPicPr>
-          <p:nvPr/>
-        </p:nvPicPr>
-        <p:blipFill>
-          <a:blip r:embed="rId2"/>
-          <a:stretch>
-            <a:fillRect/>
-          </a:stretch>
-        </p:blipFill>
-        <p:spPr>
-          <a:xfrm>
-            <a:off x="10637215" y="457200"/>
-            <a:ext cx="1051560" cy="954471"/>
-          </a:xfrm>
-          <a:prstGeom prst="rect">
-            <a:avLst/>
-          </a:prstGeom>
-        </p:spPr>
-      </p:pic>
-      <p:sp>
-        <p:nvSpPr>
-          <p:cNvPr id="4" name="Rectangle 3"/>
+      <p:sp>
+        <p:nvSpPr>
+          <p:cNvPr id="3" name="Rectangle 2"/>
           <p:cNvSpPr/>
           <p:nvPr/>
         </p:nvSpPr>
@@ -19618,7 +16759,7 @@
       </p:sp>
       <p:sp>
         <p:nvSpPr>
-          <p:cNvPr id="5" name="TextBox 4"/>
+          <p:cNvPr id="4" name="TextBox 3"/>
           <p:cNvSpPr txBox="1"/>
           <p:nvPr/>
         </p:nvSpPr>
@@ -19668,7 +16809,7 @@
       </p:sp>
       <p:sp>
         <p:nvSpPr>
-          <p:cNvPr id="6" name="Rectangle 5"/>
+          <p:cNvPr id="5" name="Rectangle 4"/>
           <p:cNvSpPr/>
           <p:nvPr/>
         </p:nvSpPr>
@@ -19712,7 +16853,7 @@
       </p:sp>
       <p:sp>
         <p:nvSpPr>
-          <p:cNvPr id="7" name="TextBox 6"/>
+          <p:cNvPr id="6" name="TextBox 5"/>
           <p:cNvSpPr txBox="1"/>
           <p:nvPr/>
         </p:nvSpPr>
@@ -19868,7 +17009,7 @@
                       </p:stCondLst>
                       <p:childTnLst>
                         <p:par>
-                          <p:cTn id="8" presetID="23" presetClass="entr" presetSubtype="16" fill="hold" grpId="0" nodeType="afterEffect">
+                          <p:cTn id="6" presetID="10" presetClass="entr" presetSubtype="0" fill="hold" grpId="0" nodeType="afterEffect">
                             <p:stCondLst>
                               <p:cond delay="0"/>
                             </p:stCondLst>
@@ -19881,88 +17022,7 @@
                                     </p:stCondLst>
                                   </p:cTn>
                                   <p:tgtEl>
-                                    <p:spTgt spid="3"/>
-                                  </p:tgtEl>
-                                  <p:attrNameLst>
-                                    <p:attrName>style.visibility</p:attrName>
-                                  </p:attrNameLst>
-                                </p:cBhvr>
-                                <p:to>
-                                  <p:strVal val="visible"/>
-                                </p:to>
-                              </p:set>
-                              <p:anim calcmode="lin" valueType="num">
-                                <p:cBhvr additive="base">
-                                  <p:cTn id="5" dur="600" fill="hold"/>
-                                  <p:tgtEl>
-                                    <p:spTgt spid="3"/>
-                                  </p:tgtEl>
-                                  <p:attrNameLst>
-                                    <p:attrName>ppt_w</p:attrName>
-                                  </p:attrNameLst>
-                                </p:cBhvr>
-                                <p:tavLst>
-                                  <p:tav tm="0">
-                                    <p:val>
-                                      <p:fltVal val="0.3"/>
-                                    </p:val>
-                                  </p:tav>
-                                  <p:tav tm="100000">
-                                    <p:val>
-                                      <p:fltVal val="1"/>
-                                    </p:val>
-                                  </p:tav>
-                                </p:tavLst>
-                              </p:anim>
-                              <p:anim calcmode="lin" valueType="num">
-                                <p:cBhvr additive="base">
-                                  <p:cTn id="6" dur="600" fill="hold"/>
-                                  <p:tgtEl>
-                                    <p:spTgt spid="3"/>
-                                  </p:tgtEl>
-                                  <p:attrNameLst>
-                                    <p:attrName>ppt_h</p:attrName>
-                                  </p:attrNameLst>
-                                </p:cBhvr>
-                                <p:tavLst>
-                                  <p:tav tm="0">
-                                    <p:val>
-                                      <p:fltVal val="0.3"/>
-                                    </p:val>
-                                  </p:tav>
-                                  <p:tav tm="100000">
-                                    <p:val>
-                                      <p:fltVal val="1"/>
-                                    </p:val>
-                                  </p:tav>
-                                </p:tavLst>
-                              </p:anim>
-                              <p:animEffect transition="in" filter="fade">
-                                <p:cBhvr>
-                                  <p:cTn id="7" dur="600"/>
-                                  <p:tgtEl>
-                                    <p:spTgt spid="3"/>
-                                  </p:tgtEl>
-                                </p:cBhvr>
-                              </p:animEffect>
-                            </p:childTnLst>
-                          </p:cTn>
-                        </p:par>
-                        <p:par>
-                          <p:cTn id="11" presetID="10" presetClass="entr" presetSubtype="0" fill="hold" grpId="0" nodeType="afterEffect">
-                            <p:stCondLst>
-                              <p:cond delay="350"/>
-                            </p:stCondLst>
-                            <p:childTnLst>
-                              <p:set>
-                                <p:cBhvr>
-                                  <p:cTn id="9" dur="1" fill="hold">
-                                    <p:stCondLst>
-                                      <p:cond delay="0"/>
-                                    </p:stCondLst>
-                                  </p:cTn>
-                                  <p:tgtEl>
-                                    <p:spTgt spid="5"/>
+                                    <p:spTgt spid="4"/>
                                   </p:tgtEl>
                                   <p:attrNameLst>
                                     <p:attrName>style.visibility</p:attrName>
@@ -19974,9 +17034,9 @@
                               </p:set>
                               <p:animEffect transition="in" filter="fade">
                                 <p:cBhvr>
-                                  <p:cTn id="10" dur="400"/>
+                                  <p:cTn id="5" dur="400"/>
                                   <p:tgtEl>
-                                    <p:spTgt spid="5"/>
+                                    <p:spTgt spid="4"/>
                                   </p:tgtEl>
                                 </p:cBhvr>
                               </p:animEffect>
@@ -19984,20 +17044,20 @@
                           </p:cTn>
                         </p:par>
                         <p:par>
-                          <p:cTn id="14" presetID="10" presetClass="entr" presetSubtype="0" fill="hold" grpId="0" nodeType="afterEffect">
+                          <p:cTn id="9" presetID="10" presetClass="entr" presetSubtype="0" fill="hold" grpId="0" nodeType="afterEffect">
                             <p:stCondLst>
-                              <p:cond delay="600"/>
+                              <p:cond delay="250"/>
                             </p:stCondLst>
                             <p:childTnLst>
                               <p:set>
                                 <p:cBhvr>
-                                  <p:cTn id="12" dur="1" fill="hold">
+                                  <p:cTn id="7" dur="1" fill="hold">
                                     <p:stCondLst>
                                       <p:cond delay="0"/>
                                     </p:stCondLst>
                                   </p:cTn>
                                   <p:tgtEl>
-                                    <p:spTgt spid="7"/>
+                                    <p:spTgt spid="6"/>
                                   </p:tgtEl>
                                   <p:attrNameLst>
                                     <p:attrName>style.visibility</p:attrName>
@@ -20009,9 +17069,9 @@
                               </p:set>
                               <p:animEffect transition="in" filter="fade">
                                 <p:cBhvr>
-                                  <p:cTn id="13" dur="400"/>
+                                  <p:cTn id="8" dur="400"/>
                                   <p:tgtEl>
-                                    <p:spTgt spid="7"/>
+                                    <p:spTgt spid="6"/>
                                   </p:tgtEl>
                                 </p:cBhvr>
                               </p:animEffect>
@@ -20100,33 +17160,9 @@
           </a:p>
         </p:txBody>
       </p:sp>
-      <p:pic>
-        <p:nvPicPr>
-          <p:cNvPr id="3" name="Picture 2" descr="LOGO-OCEO-mark.png"/>
-          <p:cNvPicPr>
-            <a:picLocks noChangeAspect="1"/>
-          </p:cNvPicPr>
-          <p:nvPr/>
-        </p:nvPicPr>
-        <p:blipFill>
-          <a:blip r:embed="rId2"/>
-          <a:stretch>
-            <a:fillRect/>
-          </a:stretch>
-        </p:blipFill>
-        <p:spPr>
-          <a:xfrm>
-            <a:off x="10637215" y="457200"/>
-            <a:ext cx="1051560" cy="954471"/>
-          </a:xfrm>
-          <a:prstGeom prst="rect">
-            <a:avLst/>
-          </a:prstGeom>
-        </p:spPr>
-      </p:pic>
-      <p:sp>
-        <p:nvSpPr>
-          <p:cNvPr id="4" name="Rectangle 3"/>
+      <p:sp>
+        <p:nvSpPr>
+          <p:cNvPr id="3" name="Rectangle 2"/>
           <p:cNvSpPr/>
           <p:nvPr/>
         </p:nvSpPr>
@@ -20170,7 +17206,7 @@
       </p:sp>
       <p:sp>
         <p:nvSpPr>
-          <p:cNvPr id="5" name="TextBox 4"/>
+          <p:cNvPr id="4" name="TextBox 3"/>
           <p:cNvSpPr txBox="1"/>
           <p:nvPr/>
         </p:nvSpPr>
@@ -20220,7 +17256,7 @@
       </p:sp>
       <p:sp>
         <p:nvSpPr>
-          <p:cNvPr id="6" name="Rectangle 5"/>
+          <p:cNvPr id="5" name="Rectangle 4"/>
           <p:cNvSpPr/>
           <p:nvPr/>
         </p:nvSpPr>
@@ -20264,7 +17300,7 @@
       </p:sp>
       <p:sp>
         <p:nvSpPr>
-          <p:cNvPr id="7" name="TextBox 6"/>
+          <p:cNvPr id="6" name="TextBox 5"/>
           <p:cNvSpPr txBox="1"/>
           <p:nvPr/>
         </p:nvSpPr>
@@ -20464,7 +17500,7 @@
                       </p:stCondLst>
                       <p:childTnLst>
                         <p:par>
-                          <p:cTn id="8" presetID="23" presetClass="entr" presetSubtype="16" fill="hold" grpId="0" nodeType="afterEffect">
+                          <p:cTn id="6" presetID="10" presetClass="entr" presetSubtype="0" fill="hold" grpId="0" nodeType="afterEffect">
                             <p:stCondLst>
                               <p:cond delay="0"/>
                             </p:stCondLst>
@@ -20477,88 +17513,7 @@
                                     </p:stCondLst>
                                   </p:cTn>
                                   <p:tgtEl>
-                                    <p:spTgt spid="3"/>
-                                  </p:tgtEl>
-                                  <p:attrNameLst>
-                                    <p:attrName>style.visibility</p:attrName>
-                                  </p:attrNameLst>
-                                </p:cBhvr>
-                                <p:to>
-                                  <p:strVal val="visible"/>
-                                </p:to>
-                              </p:set>
-                              <p:anim calcmode="lin" valueType="num">
-                                <p:cBhvr additive="base">
-                                  <p:cTn id="5" dur="600" fill="hold"/>
-                                  <p:tgtEl>
-                                    <p:spTgt spid="3"/>
-                                  </p:tgtEl>
-                                  <p:attrNameLst>
-                                    <p:attrName>ppt_w</p:attrName>
-                                  </p:attrNameLst>
-                                </p:cBhvr>
-                                <p:tavLst>
-                                  <p:tav tm="0">
-                                    <p:val>
-                                      <p:fltVal val="0.3"/>
-                                    </p:val>
-                                  </p:tav>
-                                  <p:tav tm="100000">
-                                    <p:val>
-                                      <p:fltVal val="1"/>
-                                    </p:val>
-                                  </p:tav>
-                                </p:tavLst>
-                              </p:anim>
-                              <p:anim calcmode="lin" valueType="num">
-                                <p:cBhvr additive="base">
-                                  <p:cTn id="6" dur="600" fill="hold"/>
-                                  <p:tgtEl>
-                                    <p:spTgt spid="3"/>
-                                  </p:tgtEl>
-                                  <p:attrNameLst>
-                                    <p:attrName>ppt_h</p:attrName>
-                                  </p:attrNameLst>
-                                </p:cBhvr>
-                                <p:tavLst>
-                                  <p:tav tm="0">
-                                    <p:val>
-                                      <p:fltVal val="0.3"/>
-                                    </p:val>
-                                  </p:tav>
-                                  <p:tav tm="100000">
-                                    <p:val>
-                                      <p:fltVal val="1"/>
-                                    </p:val>
-                                  </p:tav>
-                                </p:tavLst>
-                              </p:anim>
-                              <p:animEffect transition="in" filter="fade">
-                                <p:cBhvr>
-                                  <p:cTn id="7" dur="600"/>
-                                  <p:tgtEl>
-                                    <p:spTgt spid="3"/>
-                                  </p:tgtEl>
-                                </p:cBhvr>
-                              </p:animEffect>
-                            </p:childTnLst>
-                          </p:cTn>
-                        </p:par>
-                        <p:par>
-                          <p:cTn id="11" presetID="10" presetClass="entr" presetSubtype="0" fill="hold" grpId="0" nodeType="afterEffect">
-                            <p:stCondLst>
-                              <p:cond delay="350"/>
-                            </p:stCondLst>
-                            <p:childTnLst>
-                              <p:set>
-                                <p:cBhvr>
-                                  <p:cTn id="9" dur="1" fill="hold">
-                                    <p:stCondLst>
-                                      <p:cond delay="0"/>
-                                    </p:stCondLst>
-                                  </p:cTn>
-                                  <p:tgtEl>
-                                    <p:spTgt spid="5"/>
+                                    <p:spTgt spid="4"/>
                                   </p:tgtEl>
                                   <p:attrNameLst>
                                     <p:attrName>style.visibility</p:attrName>
@@ -20570,9 +17525,9 @@
                               </p:set>
                               <p:animEffect transition="in" filter="fade">
                                 <p:cBhvr>
-                                  <p:cTn id="10" dur="400"/>
+                                  <p:cTn id="5" dur="400"/>
                                   <p:tgtEl>
-                                    <p:spTgt spid="5"/>
+                                    <p:spTgt spid="4"/>
                                   </p:tgtEl>
                                 </p:cBhvr>
                               </p:animEffect>
@@ -20580,20 +17535,20 @@
                           </p:cTn>
                         </p:par>
                         <p:par>
-                          <p:cTn id="14" presetID="10" presetClass="entr" presetSubtype="0" fill="hold" grpId="0" nodeType="afterEffect">
+                          <p:cTn id="9" presetID="10" presetClass="entr" presetSubtype="0" fill="hold" grpId="0" nodeType="afterEffect">
                             <p:stCondLst>
-                              <p:cond delay="600"/>
+                              <p:cond delay="250"/>
                             </p:stCondLst>
                             <p:childTnLst>
                               <p:set>
                                 <p:cBhvr>
-                                  <p:cTn id="12" dur="1" fill="hold">
+                                  <p:cTn id="7" dur="1" fill="hold">
                                     <p:stCondLst>
                                       <p:cond delay="0"/>
                                     </p:stCondLst>
                                   </p:cTn>
                                   <p:tgtEl>
-                                    <p:spTgt spid="7"/>
+                                    <p:spTgt spid="6"/>
                                   </p:tgtEl>
                                   <p:attrNameLst>
                                     <p:attrName>style.visibility</p:attrName>
@@ -20605,9 +17560,9 @@
                               </p:set>
                               <p:animEffect transition="in" filter="fade">
                                 <p:cBhvr>
-                                  <p:cTn id="13" dur="400"/>
+                                  <p:cTn id="8" dur="400"/>
                                   <p:tgtEl>
-                                    <p:spTgt spid="7"/>
+                                    <p:spTgt spid="6"/>
                                   </p:tgtEl>
                                 </p:cBhvr>
                               </p:animEffect>
@@ -20696,33 +17651,9 @@
           </a:p>
         </p:txBody>
       </p:sp>
-      <p:pic>
-        <p:nvPicPr>
-          <p:cNvPr id="3" name="Picture 2" descr="LOGO-OCEO-mark.png"/>
-          <p:cNvPicPr>
-            <a:picLocks noChangeAspect="1"/>
-          </p:cNvPicPr>
-          <p:nvPr/>
-        </p:nvPicPr>
-        <p:blipFill>
-          <a:blip r:embed="rId2"/>
-          <a:stretch>
-            <a:fillRect/>
-          </a:stretch>
-        </p:blipFill>
-        <p:spPr>
-          <a:xfrm>
-            <a:off x="10637215" y="457200"/>
-            <a:ext cx="1051560" cy="954471"/>
-          </a:xfrm>
-          <a:prstGeom prst="rect">
-            <a:avLst/>
-          </a:prstGeom>
-        </p:spPr>
-      </p:pic>
-      <p:sp>
-        <p:nvSpPr>
-          <p:cNvPr id="4" name="Rectangle 3"/>
+      <p:sp>
+        <p:nvSpPr>
+          <p:cNvPr id="3" name="Rectangle 2"/>
           <p:cNvSpPr/>
           <p:nvPr/>
         </p:nvSpPr>
@@ -20766,7 +17697,7 @@
       </p:sp>
       <p:sp>
         <p:nvSpPr>
-          <p:cNvPr id="5" name="TextBox 4"/>
+          <p:cNvPr id="4" name="TextBox 3"/>
           <p:cNvSpPr txBox="1"/>
           <p:nvPr/>
         </p:nvSpPr>
@@ -20816,7 +17747,7 @@
       </p:sp>
       <p:sp>
         <p:nvSpPr>
-          <p:cNvPr id="6" name="Rectangle 5"/>
+          <p:cNvPr id="5" name="Rectangle 4"/>
           <p:cNvSpPr/>
           <p:nvPr/>
         </p:nvSpPr>
@@ -20860,7 +17791,7 @@
       </p:sp>
       <p:sp>
         <p:nvSpPr>
-          <p:cNvPr id="7" name="TextBox 6"/>
+          <p:cNvPr id="6" name="TextBox 5"/>
           <p:cNvSpPr txBox="1"/>
           <p:nvPr/>
         </p:nvSpPr>
@@ -21079,7 +18010,7 @@
                       </p:stCondLst>
                       <p:childTnLst>
                         <p:par>
-                          <p:cTn id="8" presetID="23" presetClass="entr" presetSubtype="16" fill="hold" grpId="0" nodeType="afterEffect">
+                          <p:cTn id="6" presetID="10" presetClass="entr" presetSubtype="0" fill="hold" grpId="0" nodeType="afterEffect">
                             <p:stCondLst>
                               <p:cond delay="0"/>
                             </p:stCondLst>
@@ -21092,88 +18023,7 @@
                                     </p:stCondLst>
                                   </p:cTn>
                                   <p:tgtEl>
-                                    <p:spTgt spid="3"/>
-                                  </p:tgtEl>
-                                  <p:attrNameLst>
-                                    <p:attrName>style.visibility</p:attrName>
-                                  </p:attrNameLst>
-                                </p:cBhvr>
-                                <p:to>
-                                  <p:strVal val="visible"/>
-                                </p:to>
-                              </p:set>
-                              <p:anim calcmode="lin" valueType="num">
-                                <p:cBhvr additive="base">
-                                  <p:cTn id="5" dur="600" fill="hold"/>
-                                  <p:tgtEl>
-                                    <p:spTgt spid="3"/>
-                                  </p:tgtEl>
-                                  <p:attrNameLst>
-                                    <p:attrName>ppt_w</p:attrName>
-                                  </p:attrNameLst>
-                                </p:cBhvr>
-                                <p:tavLst>
-                                  <p:tav tm="0">
-                                    <p:val>
-                                      <p:fltVal val="0.3"/>
-                                    </p:val>
-                                  </p:tav>
-                                  <p:tav tm="100000">
-                                    <p:val>
-                                      <p:fltVal val="1"/>
-                                    </p:val>
-                                  </p:tav>
-                                </p:tavLst>
-                              </p:anim>
-                              <p:anim calcmode="lin" valueType="num">
-                                <p:cBhvr additive="base">
-                                  <p:cTn id="6" dur="600" fill="hold"/>
-                                  <p:tgtEl>
-                                    <p:spTgt spid="3"/>
-                                  </p:tgtEl>
-                                  <p:attrNameLst>
-                                    <p:attrName>ppt_h</p:attrName>
-                                  </p:attrNameLst>
-                                </p:cBhvr>
-                                <p:tavLst>
-                                  <p:tav tm="0">
-                                    <p:val>
-                                      <p:fltVal val="0.3"/>
-                                    </p:val>
-                                  </p:tav>
-                                  <p:tav tm="100000">
-                                    <p:val>
-                                      <p:fltVal val="1"/>
-                                    </p:val>
-                                  </p:tav>
-                                </p:tavLst>
-                              </p:anim>
-                              <p:animEffect transition="in" filter="fade">
-                                <p:cBhvr>
-                                  <p:cTn id="7" dur="600"/>
-                                  <p:tgtEl>
-                                    <p:spTgt spid="3"/>
-                                  </p:tgtEl>
-                                </p:cBhvr>
-                              </p:animEffect>
-                            </p:childTnLst>
-                          </p:cTn>
-                        </p:par>
-                        <p:par>
-                          <p:cTn id="11" presetID="10" presetClass="entr" presetSubtype="0" fill="hold" grpId="0" nodeType="afterEffect">
-                            <p:stCondLst>
-                              <p:cond delay="350"/>
-                            </p:stCondLst>
-                            <p:childTnLst>
-                              <p:set>
-                                <p:cBhvr>
-                                  <p:cTn id="9" dur="1" fill="hold">
-                                    <p:stCondLst>
-                                      <p:cond delay="0"/>
-                                    </p:stCondLst>
-                                  </p:cTn>
-                                  <p:tgtEl>
-                                    <p:spTgt spid="5"/>
+                                    <p:spTgt spid="4"/>
                                   </p:tgtEl>
                                   <p:attrNameLst>
                                     <p:attrName>style.visibility</p:attrName>
@@ -21185,9 +18035,9 @@
                               </p:set>
                               <p:animEffect transition="in" filter="fade">
                                 <p:cBhvr>
-                                  <p:cTn id="10" dur="400"/>
+                                  <p:cTn id="5" dur="400"/>
                                   <p:tgtEl>
-                                    <p:spTgt spid="5"/>
+                                    <p:spTgt spid="4"/>
                                   </p:tgtEl>
                                 </p:cBhvr>
                               </p:animEffect>
@@ -21195,20 +18045,20 @@
                           </p:cTn>
                         </p:par>
                         <p:par>
-                          <p:cTn id="14" presetID="10" presetClass="entr" presetSubtype="0" fill="hold" grpId="0" nodeType="afterEffect">
+                          <p:cTn id="9" presetID="10" presetClass="entr" presetSubtype="0" fill="hold" grpId="0" nodeType="afterEffect">
                             <p:stCondLst>
-                              <p:cond delay="600"/>
+                              <p:cond delay="250"/>
                             </p:stCondLst>
                             <p:childTnLst>
                               <p:set>
                                 <p:cBhvr>
-                                  <p:cTn id="12" dur="1" fill="hold">
+                                  <p:cTn id="7" dur="1" fill="hold">
                                     <p:stCondLst>
                                       <p:cond delay="0"/>
                                     </p:stCondLst>
                                   </p:cTn>
                                   <p:tgtEl>
-                                    <p:spTgt spid="7"/>
+                                    <p:spTgt spid="6"/>
                                   </p:tgtEl>
                                   <p:attrNameLst>
                                     <p:attrName>style.visibility</p:attrName>
@@ -21220,9 +18070,9 @@
                               </p:set>
                               <p:animEffect transition="in" filter="fade">
                                 <p:cBhvr>
-                                  <p:cTn id="13" dur="400"/>
+                                  <p:cTn id="8" dur="400"/>
                                   <p:tgtEl>
-                                    <p:spTgt spid="7"/>
+                                    <p:spTgt spid="6"/>
                                   </p:tgtEl>
                                 </p:cBhvr>
                               </p:animEffect>
@@ -21311,33 +18161,9 @@
           </a:p>
         </p:txBody>
       </p:sp>
-      <p:pic>
-        <p:nvPicPr>
-          <p:cNvPr id="3" name="Picture 2" descr="LOGO-OCEO-mark.png"/>
-          <p:cNvPicPr>
-            <a:picLocks noChangeAspect="1"/>
-          </p:cNvPicPr>
-          <p:nvPr/>
-        </p:nvPicPr>
-        <p:blipFill>
-          <a:blip r:embed="rId2"/>
-          <a:stretch>
-            <a:fillRect/>
-          </a:stretch>
-        </p:blipFill>
-        <p:spPr>
-          <a:xfrm>
-            <a:off x="10637215" y="457200"/>
-            <a:ext cx="1051560" cy="954471"/>
-          </a:xfrm>
-          <a:prstGeom prst="rect">
-            <a:avLst/>
-          </a:prstGeom>
-        </p:spPr>
-      </p:pic>
-      <p:sp>
-        <p:nvSpPr>
-          <p:cNvPr id="4" name="Rectangle 3"/>
+      <p:sp>
+        <p:nvSpPr>
+          <p:cNvPr id="3" name="Rectangle 2"/>
           <p:cNvSpPr/>
           <p:nvPr/>
         </p:nvSpPr>
@@ -21381,7 +18207,7 @@
       </p:sp>
       <p:sp>
         <p:nvSpPr>
-          <p:cNvPr id="5" name="TextBox 4"/>
+          <p:cNvPr id="4" name="TextBox 3"/>
           <p:cNvSpPr txBox="1"/>
           <p:nvPr/>
         </p:nvSpPr>
@@ -21431,7 +18257,7 @@
       </p:sp>
       <p:sp>
         <p:nvSpPr>
-          <p:cNvPr id="6" name="Rectangle 5"/>
+          <p:cNvPr id="5" name="Rectangle 4"/>
           <p:cNvSpPr/>
           <p:nvPr/>
         </p:nvSpPr>
@@ -21475,7 +18301,7 @@
       </p:sp>
       <p:sp>
         <p:nvSpPr>
-          <p:cNvPr id="7" name="TextBox 6"/>
+          <p:cNvPr id="6" name="TextBox 5"/>
           <p:cNvSpPr txBox="1"/>
           <p:nvPr/>
         </p:nvSpPr>
@@ -21715,7 +18541,7 @@
                       </p:stCondLst>
                       <p:childTnLst>
                         <p:par>
-                          <p:cTn id="8" presetID="23" presetClass="entr" presetSubtype="16" fill="hold" grpId="0" nodeType="afterEffect">
+                          <p:cTn id="6" presetID="10" presetClass="entr" presetSubtype="0" fill="hold" grpId="0" nodeType="afterEffect">
                             <p:stCondLst>
                               <p:cond delay="0"/>
                             </p:stCondLst>
@@ -21728,88 +18554,7 @@
                                     </p:stCondLst>
                                   </p:cTn>
                                   <p:tgtEl>
-                                    <p:spTgt spid="3"/>
-                                  </p:tgtEl>
-                                  <p:attrNameLst>
-                                    <p:attrName>style.visibility</p:attrName>
-                                  </p:attrNameLst>
-                                </p:cBhvr>
-                                <p:to>
-                                  <p:strVal val="visible"/>
-                                </p:to>
-                              </p:set>
-                              <p:anim calcmode="lin" valueType="num">
-                                <p:cBhvr additive="base">
-                                  <p:cTn id="5" dur="600" fill="hold"/>
-                                  <p:tgtEl>
-                                    <p:spTgt spid="3"/>
-                                  </p:tgtEl>
-                                  <p:attrNameLst>
-                                    <p:attrName>ppt_w</p:attrName>
-                                  </p:attrNameLst>
-                                </p:cBhvr>
-                                <p:tavLst>
-                                  <p:tav tm="0">
-                                    <p:val>
-                                      <p:fltVal val="0.3"/>
-                                    </p:val>
-                                  </p:tav>
-                                  <p:tav tm="100000">
-                                    <p:val>
-                                      <p:fltVal val="1"/>
-                                    </p:val>
-                                  </p:tav>
-                                </p:tavLst>
-                              </p:anim>
-                              <p:anim calcmode="lin" valueType="num">
-                                <p:cBhvr additive="base">
-                                  <p:cTn id="6" dur="600" fill="hold"/>
-                                  <p:tgtEl>
-                                    <p:spTgt spid="3"/>
-                                  </p:tgtEl>
-                                  <p:attrNameLst>
-                                    <p:attrName>ppt_h</p:attrName>
-                                  </p:attrNameLst>
-                                </p:cBhvr>
-                                <p:tavLst>
-                                  <p:tav tm="0">
-                                    <p:val>
-                                      <p:fltVal val="0.3"/>
-                                    </p:val>
-                                  </p:tav>
-                                  <p:tav tm="100000">
-                                    <p:val>
-                                      <p:fltVal val="1"/>
-                                    </p:val>
-                                  </p:tav>
-                                </p:tavLst>
-                              </p:anim>
-                              <p:animEffect transition="in" filter="fade">
-                                <p:cBhvr>
-                                  <p:cTn id="7" dur="600"/>
-                                  <p:tgtEl>
-                                    <p:spTgt spid="3"/>
-                                  </p:tgtEl>
-                                </p:cBhvr>
-                              </p:animEffect>
-                            </p:childTnLst>
-                          </p:cTn>
-                        </p:par>
-                        <p:par>
-                          <p:cTn id="11" presetID="10" presetClass="entr" presetSubtype="0" fill="hold" grpId="0" nodeType="afterEffect">
-                            <p:stCondLst>
-                              <p:cond delay="350"/>
-                            </p:stCondLst>
-                            <p:childTnLst>
-                              <p:set>
-                                <p:cBhvr>
-                                  <p:cTn id="9" dur="1" fill="hold">
-                                    <p:stCondLst>
-                                      <p:cond delay="0"/>
-                                    </p:stCondLst>
-                                  </p:cTn>
-                                  <p:tgtEl>
-                                    <p:spTgt spid="5"/>
+                                    <p:spTgt spid="4"/>
                                   </p:tgtEl>
                                   <p:attrNameLst>
                                     <p:attrName>style.visibility</p:attrName>
@@ -21821,9 +18566,9 @@
                               </p:set>
                               <p:animEffect transition="in" filter="fade">
                                 <p:cBhvr>
-                                  <p:cTn id="10" dur="400"/>
+                                  <p:cTn id="5" dur="400"/>
                                   <p:tgtEl>
-                                    <p:spTgt spid="5"/>
+                                    <p:spTgt spid="4"/>
                                   </p:tgtEl>
                                 </p:cBhvr>
                               </p:animEffect>
@@ -21831,20 +18576,20 @@
                           </p:cTn>
                         </p:par>
                         <p:par>
-                          <p:cTn id="14" presetID="10" presetClass="entr" presetSubtype="0" fill="hold" grpId="0" nodeType="afterEffect">
+                          <p:cTn id="9" presetID="10" presetClass="entr" presetSubtype="0" fill="hold" grpId="0" nodeType="afterEffect">
                             <p:stCondLst>
-                              <p:cond delay="600"/>
+                              <p:cond delay="250"/>
                             </p:stCondLst>
                             <p:childTnLst>
                               <p:set>
                                 <p:cBhvr>
-                                  <p:cTn id="12" dur="1" fill="hold">
+                                  <p:cTn id="7" dur="1" fill="hold">
                                     <p:stCondLst>
                                       <p:cond delay="0"/>
                                     </p:stCondLst>
                                   </p:cTn>
                                   <p:tgtEl>
-                                    <p:spTgt spid="7"/>
+                                    <p:spTgt spid="6"/>
                                   </p:tgtEl>
                                   <p:attrNameLst>
                                     <p:attrName>style.visibility</p:attrName>
@@ -21856,9 +18601,9 @@
                               </p:set>
                               <p:animEffect transition="in" filter="fade">
                                 <p:cBhvr>
-                                  <p:cTn id="13" dur="400"/>
+                                  <p:cTn id="8" dur="400"/>
                                   <p:tgtEl>
-                                    <p:spTgt spid="7"/>
+                                    <p:spTgt spid="6"/>
                                   </p:tgtEl>
                                 </p:cBhvr>
                               </p:animEffect>
@@ -21947,33 +18692,9 @@
           </a:p>
         </p:txBody>
       </p:sp>
-      <p:pic>
-        <p:nvPicPr>
-          <p:cNvPr id="3" name="Picture 2" descr="LOGO-OCEO-mark.png"/>
-          <p:cNvPicPr>
-            <a:picLocks noChangeAspect="1"/>
-          </p:cNvPicPr>
-          <p:nvPr/>
-        </p:nvPicPr>
-        <p:blipFill>
-          <a:blip r:embed="rId2"/>
-          <a:stretch>
-            <a:fillRect/>
-          </a:stretch>
-        </p:blipFill>
-        <p:spPr>
-          <a:xfrm>
-            <a:off x="10637215" y="457200"/>
-            <a:ext cx="1051560" cy="954471"/>
-          </a:xfrm>
-          <a:prstGeom prst="rect">
-            <a:avLst/>
-          </a:prstGeom>
-        </p:spPr>
-      </p:pic>
-      <p:sp>
-        <p:nvSpPr>
-          <p:cNvPr id="4" name="Rectangle 3"/>
+      <p:sp>
+        <p:nvSpPr>
+          <p:cNvPr id="3" name="Rectangle 2"/>
           <p:cNvSpPr/>
           <p:nvPr/>
         </p:nvSpPr>
@@ -22017,7 +18738,7 @@
       </p:sp>
       <p:sp>
         <p:nvSpPr>
-          <p:cNvPr id="5" name="TextBox 4"/>
+          <p:cNvPr id="4" name="TextBox 3"/>
           <p:cNvSpPr txBox="1"/>
           <p:nvPr/>
         </p:nvSpPr>
@@ -22067,7 +18788,7 @@
       </p:sp>
       <p:sp>
         <p:nvSpPr>
-          <p:cNvPr id="6" name="Rectangle 5"/>
+          <p:cNvPr id="5" name="Rectangle 4"/>
           <p:cNvSpPr/>
           <p:nvPr/>
         </p:nvSpPr>
@@ -22111,7 +18832,7 @@
       </p:sp>
       <p:sp>
         <p:nvSpPr>
-          <p:cNvPr id="7" name="TextBox 6"/>
+          <p:cNvPr id="6" name="TextBox 5"/>
           <p:cNvSpPr txBox="1"/>
           <p:nvPr/>
         </p:nvSpPr>
@@ -22267,7 +18988,7 @@
                       </p:stCondLst>
                       <p:childTnLst>
                         <p:par>
-                          <p:cTn id="8" presetID="23" presetClass="entr" presetSubtype="16" fill="hold" grpId="0" nodeType="afterEffect">
+                          <p:cTn id="6" presetID="10" presetClass="entr" presetSubtype="0" fill="hold" grpId="0" nodeType="afterEffect">
                             <p:stCondLst>
                               <p:cond delay="0"/>
                             </p:stCondLst>
@@ -22280,88 +19001,7 @@
                                     </p:stCondLst>
                                   </p:cTn>
                                   <p:tgtEl>
-                                    <p:spTgt spid="3"/>
-                                  </p:tgtEl>
-                                  <p:attrNameLst>
-                                    <p:attrName>style.visibility</p:attrName>
-                                  </p:attrNameLst>
-                                </p:cBhvr>
-                                <p:to>
-                                  <p:strVal val="visible"/>
-                                </p:to>
-                              </p:set>
-                              <p:anim calcmode="lin" valueType="num">
-                                <p:cBhvr additive="base">
-                                  <p:cTn id="5" dur="600" fill="hold"/>
-                                  <p:tgtEl>
-                                    <p:spTgt spid="3"/>
-                                  </p:tgtEl>
-                                  <p:attrNameLst>
-                                    <p:attrName>ppt_w</p:attrName>
-                                  </p:attrNameLst>
-                                </p:cBhvr>
-                                <p:tavLst>
-                                  <p:tav tm="0">
-                                    <p:val>
-                                      <p:fltVal val="0.3"/>
-                                    </p:val>
-                                  </p:tav>
-                                  <p:tav tm="100000">
-                                    <p:val>
-                                      <p:fltVal val="1"/>
-                                    </p:val>
-                                  </p:tav>
-                                </p:tavLst>
-                              </p:anim>
-                              <p:anim calcmode="lin" valueType="num">
-                                <p:cBhvr additive="base">
-                                  <p:cTn id="6" dur="600" fill="hold"/>
-                                  <p:tgtEl>
-                                    <p:spTgt spid="3"/>
-                                  </p:tgtEl>
-                                  <p:attrNameLst>
-                                    <p:attrName>ppt_h</p:attrName>
-                                  </p:attrNameLst>
-                                </p:cBhvr>
-                                <p:tavLst>
-                                  <p:tav tm="0">
-                                    <p:val>
-                                      <p:fltVal val="0.3"/>
-                                    </p:val>
-                                  </p:tav>
-                                  <p:tav tm="100000">
-                                    <p:val>
-                                      <p:fltVal val="1"/>
-                                    </p:val>
-                                  </p:tav>
-                                </p:tavLst>
-                              </p:anim>
-                              <p:animEffect transition="in" filter="fade">
-                                <p:cBhvr>
-                                  <p:cTn id="7" dur="600"/>
-                                  <p:tgtEl>
-                                    <p:spTgt spid="3"/>
-                                  </p:tgtEl>
-                                </p:cBhvr>
-                              </p:animEffect>
-                            </p:childTnLst>
-                          </p:cTn>
-                        </p:par>
-                        <p:par>
-                          <p:cTn id="11" presetID="10" presetClass="entr" presetSubtype="0" fill="hold" grpId="0" nodeType="afterEffect">
-                            <p:stCondLst>
-                              <p:cond delay="350"/>
-                            </p:stCondLst>
-                            <p:childTnLst>
-                              <p:set>
-                                <p:cBhvr>
-                                  <p:cTn id="9" dur="1" fill="hold">
-                                    <p:stCondLst>
-                                      <p:cond delay="0"/>
-                                    </p:stCondLst>
-                                  </p:cTn>
-                                  <p:tgtEl>
-                                    <p:spTgt spid="5"/>
+                                    <p:spTgt spid="4"/>
                                   </p:tgtEl>
                                   <p:attrNameLst>
                                     <p:attrName>style.visibility</p:attrName>
@@ -22373,9 +19013,9 @@
                               </p:set>
                               <p:animEffect transition="in" filter="fade">
                                 <p:cBhvr>
-                                  <p:cTn id="10" dur="400"/>
+                                  <p:cTn id="5" dur="400"/>
                                   <p:tgtEl>
-                                    <p:spTgt spid="5"/>
+                                    <p:spTgt spid="4"/>
                                   </p:tgtEl>
                                 </p:cBhvr>
                               </p:animEffect>
@@ -22383,20 +19023,20 @@
                           </p:cTn>
                         </p:par>
                         <p:par>
-                          <p:cTn id="14" presetID="10" presetClass="entr" presetSubtype="0" fill="hold" grpId="0" nodeType="afterEffect">
+                          <p:cTn id="9" presetID="10" presetClass="entr" presetSubtype="0" fill="hold" grpId="0" nodeType="afterEffect">
                             <p:stCondLst>
-                              <p:cond delay="600"/>
+                              <p:cond delay="250"/>
                             </p:stCondLst>
                             <p:childTnLst>
                               <p:set>
                                 <p:cBhvr>
-                                  <p:cTn id="12" dur="1" fill="hold">
+                                  <p:cTn id="7" dur="1" fill="hold">
                                     <p:stCondLst>
                                       <p:cond delay="0"/>
                                     </p:stCondLst>
                                   </p:cTn>
                                   <p:tgtEl>
-                                    <p:spTgt spid="7"/>
+                                    <p:spTgt spid="6"/>
                                   </p:tgtEl>
                                   <p:attrNameLst>
                                     <p:attrName>style.visibility</p:attrName>
@@ -22408,9 +19048,9 @@
                               </p:set>
                               <p:animEffect transition="in" filter="fade">
                                 <p:cBhvr>
-                                  <p:cTn id="13" dur="400"/>
+                                  <p:cTn id="8" dur="400"/>
                                   <p:tgtEl>
-                                    <p:spTgt spid="7"/>
+                                    <p:spTgt spid="6"/>
                                   </p:tgtEl>
                                 </p:cBhvr>
                               </p:animEffect>
@@ -22499,33 +19139,9 @@
           </a:p>
         </p:txBody>
       </p:sp>
-      <p:pic>
-        <p:nvPicPr>
-          <p:cNvPr id="3" name="Picture 2" descr="LOGO-OCEO-mark.png"/>
-          <p:cNvPicPr>
-            <a:picLocks noChangeAspect="1"/>
-          </p:cNvPicPr>
-          <p:nvPr/>
-        </p:nvPicPr>
-        <p:blipFill>
-          <a:blip r:embed="rId2"/>
-          <a:stretch>
-            <a:fillRect/>
-          </a:stretch>
-        </p:blipFill>
-        <p:spPr>
-          <a:xfrm>
-            <a:off x="10637215" y="457200"/>
-            <a:ext cx="1051560" cy="954471"/>
-          </a:xfrm>
-          <a:prstGeom prst="rect">
-            <a:avLst/>
-          </a:prstGeom>
-        </p:spPr>
-      </p:pic>
-      <p:sp>
-        <p:nvSpPr>
-          <p:cNvPr id="4" name="Rectangle 3"/>
+      <p:sp>
+        <p:nvSpPr>
+          <p:cNvPr id="3" name="Rectangle 2"/>
           <p:cNvSpPr/>
           <p:nvPr/>
         </p:nvSpPr>
@@ -22569,7 +19185,7 @@
       </p:sp>
       <p:sp>
         <p:nvSpPr>
-          <p:cNvPr id="5" name="TextBox 4"/>
+          <p:cNvPr id="4" name="TextBox 3"/>
           <p:cNvSpPr txBox="1"/>
           <p:nvPr/>
         </p:nvSpPr>
@@ -22619,7 +19235,7 @@
       </p:sp>
       <p:sp>
         <p:nvSpPr>
-          <p:cNvPr id="6" name="Rectangle 5"/>
+          <p:cNvPr id="5" name="Rectangle 4"/>
           <p:cNvSpPr/>
           <p:nvPr/>
         </p:nvSpPr>
@@ -22663,7 +19279,7 @@
       </p:sp>
       <p:sp>
         <p:nvSpPr>
-          <p:cNvPr id="7" name="TextBox 6"/>
+          <p:cNvPr id="6" name="TextBox 5"/>
           <p:cNvSpPr txBox="1"/>
           <p:nvPr/>
         </p:nvSpPr>
@@ -22819,7 +19435,7 @@
                       </p:stCondLst>
                       <p:childTnLst>
                         <p:par>
-                          <p:cTn id="8" presetID="23" presetClass="entr" presetSubtype="16" fill="hold" grpId="0" nodeType="afterEffect">
+                          <p:cTn id="6" presetID="10" presetClass="entr" presetSubtype="0" fill="hold" grpId="0" nodeType="afterEffect">
                             <p:stCondLst>
                               <p:cond delay="0"/>
                             </p:stCondLst>
@@ -22832,88 +19448,7 @@
                                     </p:stCondLst>
                                   </p:cTn>
                                   <p:tgtEl>
-                                    <p:spTgt spid="3"/>
-                                  </p:tgtEl>
-                                  <p:attrNameLst>
-                                    <p:attrName>style.visibility</p:attrName>
-                                  </p:attrNameLst>
-                                </p:cBhvr>
-                                <p:to>
-                                  <p:strVal val="visible"/>
-                                </p:to>
-                              </p:set>
-                              <p:anim calcmode="lin" valueType="num">
-                                <p:cBhvr additive="base">
-                                  <p:cTn id="5" dur="600" fill="hold"/>
-                                  <p:tgtEl>
-                                    <p:spTgt spid="3"/>
-                                  </p:tgtEl>
-                                  <p:attrNameLst>
-                                    <p:attrName>ppt_w</p:attrName>
-                                  </p:attrNameLst>
-                                </p:cBhvr>
-                                <p:tavLst>
-                                  <p:tav tm="0">
-                                    <p:val>
-                                      <p:fltVal val="0.3"/>
-                                    </p:val>
-                                  </p:tav>
-                                  <p:tav tm="100000">
-                                    <p:val>
-                                      <p:fltVal val="1"/>
-                                    </p:val>
-                                  </p:tav>
-                                </p:tavLst>
-                              </p:anim>
-                              <p:anim calcmode="lin" valueType="num">
-                                <p:cBhvr additive="base">
-                                  <p:cTn id="6" dur="600" fill="hold"/>
-                                  <p:tgtEl>
-                                    <p:spTgt spid="3"/>
-                                  </p:tgtEl>
-                                  <p:attrNameLst>
-                                    <p:attrName>ppt_h</p:attrName>
-                                  </p:attrNameLst>
-                                </p:cBhvr>
-                                <p:tavLst>
-                                  <p:tav tm="0">
-                                    <p:val>
-                                      <p:fltVal val="0.3"/>
-                                    </p:val>
-                                  </p:tav>
-                                  <p:tav tm="100000">
-                                    <p:val>
-                                      <p:fltVal val="1"/>
-                                    </p:val>
-                                  </p:tav>
-                                </p:tavLst>
-                              </p:anim>
-                              <p:animEffect transition="in" filter="fade">
-                                <p:cBhvr>
-                                  <p:cTn id="7" dur="600"/>
-                                  <p:tgtEl>
-                                    <p:spTgt spid="3"/>
-                                  </p:tgtEl>
-                                </p:cBhvr>
-                              </p:animEffect>
-                            </p:childTnLst>
-                          </p:cTn>
-                        </p:par>
-                        <p:par>
-                          <p:cTn id="11" presetID="10" presetClass="entr" presetSubtype="0" fill="hold" grpId="0" nodeType="afterEffect">
-                            <p:stCondLst>
-                              <p:cond delay="350"/>
-                            </p:stCondLst>
-                            <p:childTnLst>
-                              <p:set>
-                                <p:cBhvr>
-                                  <p:cTn id="9" dur="1" fill="hold">
-                                    <p:stCondLst>
-                                      <p:cond delay="0"/>
-                                    </p:stCondLst>
-                                  </p:cTn>
-                                  <p:tgtEl>
-                                    <p:spTgt spid="5"/>
+                                    <p:spTgt spid="4"/>
                                   </p:tgtEl>
                                   <p:attrNameLst>
                                     <p:attrName>style.visibility</p:attrName>
@@ -22925,9 +19460,9 @@
                               </p:set>
                               <p:animEffect transition="in" filter="fade">
                                 <p:cBhvr>
-                                  <p:cTn id="10" dur="400"/>
+                                  <p:cTn id="5" dur="400"/>
                                   <p:tgtEl>
-                                    <p:spTgt spid="5"/>
+                                    <p:spTgt spid="4"/>
                                   </p:tgtEl>
                                 </p:cBhvr>
                               </p:animEffect>
@@ -22935,20 +19470,20 @@
                           </p:cTn>
                         </p:par>
                         <p:par>
-                          <p:cTn id="14" presetID="10" presetClass="entr" presetSubtype="0" fill="hold" grpId="0" nodeType="afterEffect">
+                          <p:cTn id="9" presetID="10" presetClass="entr" presetSubtype="0" fill="hold" grpId="0" nodeType="afterEffect">
                             <p:stCondLst>
-                              <p:cond delay="600"/>
+                              <p:cond delay="250"/>
                             </p:stCondLst>
                             <p:childTnLst>
                               <p:set>
                                 <p:cBhvr>
-                                  <p:cTn id="12" dur="1" fill="hold">
+                                  <p:cTn id="7" dur="1" fill="hold">
                                     <p:stCondLst>
                                       <p:cond delay="0"/>
                                     </p:stCondLst>
                                   </p:cTn>
                                   <p:tgtEl>
-                                    <p:spTgt spid="7"/>
+                                    <p:spTgt spid="6"/>
                                   </p:tgtEl>
                                   <p:attrNameLst>
                                     <p:attrName>style.visibility</p:attrName>
@@ -22960,9 +19495,9 @@
                               </p:set>
                               <p:animEffect transition="in" filter="fade">
                                 <p:cBhvr>
-                                  <p:cTn id="13" dur="400"/>
+                                  <p:cTn id="8" dur="400"/>
                                   <p:tgtEl>
-                                    <p:spTgt spid="7"/>
+                                    <p:spTgt spid="6"/>
                                   </p:tgtEl>
                                 </p:cBhvr>
                               </p:animEffect>
@@ -23362,33 +19897,9 @@
           </a:p>
         </p:txBody>
       </p:sp>
-      <p:pic>
-        <p:nvPicPr>
-          <p:cNvPr id="3" name="Picture 2" descr="LOGO-OCEO-mark.png"/>
-          <p:cNvPicPr>
-            <a:picLocks noChangeAspect="1"/>
-          </p:cNvPicPr>
-          <p:nvPr/>
-        </p:nvPicPr>
-        <p:blipFill>
-          <a:blip r:embed="rId2"/>
-          <a:stretch>
-            <a:fillRect/>
-          </a:stretch>
-        </p:blipFill>
-        <p:spPr>
-          <a:xfrm>
-            <a:off x="10637215" y="457200"/>
-            <a:ext cx="1051560" cy="954471"/>
-          </a:xfrm>
-          <a:prstGeom prst="rect">
-            <a:avLst/>
-          </a:prstGeom>
-        </p:spPr>
-      </p:pic>
-      <p:sp>
-        <p:nvSpPr>
-          <p:cNvPr id="4" name="Rectangle 3"/>
+      <p:sp>
+        <p:nvSpPr>
+          <p:cNvPr id="3" name="Rectangle 2"/>
           <p:cNvSpPr/>
           <p:nvPr/>
         </p:nvSpPr>
@@ -23432,7 +19943,7 @@
       </p:sp>
       <p:sp>
         <p:nvSpPr>
-          <p:cNvPr id="5" name="TextBox 4"/>
+          <p:cNvPr id="4" name="TextBox 3"/>
           <p:cNvSpPr txBox="1"/>
           <p:nvPr/>
         </p:nvSpPr>
@@ -23482,7 +19993,7 @@
       </p:sp>
       <p:sp>
         <p:nvSpPr>
-          <p:cNvPr id="6" name="Rectangle 5"/>
+          <p:cNvPr id="5" name="Rectangle 4"/>
           <p:cNvSpPr/>
           <p:nvPr/>
         </p:nvSpPr>
@@ -23526,7 +20037,7 @@
       </p:sp>
       <p:sp>
         <p:nvSpPr>
-          <p:cNvPr id="7" name="TextBox 6"/>
+          <p:cNvPr id="6" name="TextBox 5"/>
           <p:cNvSpPr txBox="1"/>
           <p:nvPr/>
         </p:nvSpPr>
@@ -23710,7 +20221,7 @@
                       </p:stCondLst>
                       <p:childTnLst>
                         <p:par>
-                          <p:cTn id="8" presetID="23" presetClass="entr" presetSubtype="16" fill="hold" grpId="0" nodeType="afterEffect">
+                          <p:cTn id="6" presetID="10" presetClass="entr" presetSubtype="0" fill="hold" grpId="0" nodeType="afterEffect">
                             <p:stCondLst>
                               <p:cond delay="0"/>
                             </p:stCondLst>
@@ -23723,88 +20234,7 @@
                                     </p:stCondLst>
                                   </p:cTn>
                                   <p:tgtEl>
-                                    <p:spTgt spid="3"/>
-                                  </p:tgtEl>
-                                  <p:attrNameLst>
-                                    <p:attrName>style.visibility</p:attrName>
-                                  </p:attrNameLst>
-                                </p:cBhvr>
-                                <p:to>
-                                  <p:strVal val="visible"/>
-                                </p:to>
-                              </p:set>
-                              <p:anim calcmode="lin" valueType="num">
-                                <p:cBhvr additive="base">
-                                  <p:cTn id="5" dur="600" fill="hold"/>
-                                  <p:tgtEl>
-                                    <p:spTgt spid="3"/>
-                                  </p:tgtEl>
-                                  <p:attrNameLst>
-                                    <p:attrName>ppt_w</p:attrName>
-                                  </p:attrNameLst>
-                                </p:cBhvr>
-                                <p:tavLst>
-                                  <p:tav tm="0">
-                                    <p:val>
-                                      <p:fltVal val="0.3"/>
-                                    </p:val>
-                                  </p:tav>
-                                  <p:tav tm="100000">
-                                    <p:val>
-                                      <p:fltVal val="1"/>
-                                    </p:val>
-                                  </p:tav>
-                                </p:tavLst>
-                              </p:anim>
-                              <p:anim calcmode="lin" valueType="num">
-                                <p:cBhvr additive="base">
-                                  <p:cTn id="6" dur="600" fill="hold"/>
-                                  <p:tgtEl>
-                                    <p:spTgt spid="3"/>
-                                  </p:tgtEl>
-                                  <p:attrNameLst>
-                                    <p:attrName>ppt_h</p:attrName>
-                                  </p:attrNameLst>
-                                </p:cBhvr>
-                                <p:tavLst>
-                                  <p:tav tm="0">
-                                    <p:val>
-                                      <p:fltVal val="0.3"/>
-                                    </p:val>
-                                  </p:tav>
-                                  <p:tav tm="100000">
-                                    <p:val>
-                                      <p:fltVal val="1"/>
-                                    </p:val>
-                                  </p:tav>
-                                </p:tavLst>
-                              </p:anim>
-                              <p:animEffect transition="in" filter="fade">
-                                <p:cBhvr>
-                                  <p:cTn id="7" dur="600"/>
-                                  <p:tgtEl>
-                                    <p:spTgt spid="3"/>
-                                  </p:tgtEl>
-                                </p:cBhvr>
-                              </p:animEffect>
-                            </p:childTnLst>
-                          </p:cTn>
-                        </p:par>
-                        <p:par>
-                          <p:cTn id="11" presetID="10" presetClass="entr" presetSubtype="0" fill="hold" grpId="0" nodeType="afterEffect">
-                            <p:stCondLst>
-                              <p:cond delay="350"/>
-                            </p:stCondLst>
-                            <p:childTnLst>
-                              <p:set>
-                                <p:cBhvr>
-                                  <p:cTn id="9" dur="1" fill="hold">
-                                    <p:stCondLst>
-                                      <p:cond delay="0"/>
-                                    </p:stCondLst>
-                                  </p:cTn>
-                                  <p:tgtEl>
-                                    <p:spTgt spid="5"/>
+                                    <p:spTgt spid="4"/>
                                   </p:tgtEl>
                                   <p:attrNameLst>
                                     <p:attrName>style.visibility</p:attrName>
@@ -23816,9 +20246,9 @@
                               </p:set>
                               <p:animEffect transition="in" filter="fade">
                                 <p:cBhvr>
-                                  <p:cTn id="10" dur="400"/>
+                                  <p:cTn id="5" dur="400"/>
                                   <p:tgtEl>
-                                    <p:spTgt spid="5"/>
+                                    <p:spTgt spid="4"/>
                                   </p:tgtEl>
                                 </p:cBhvr>
                               </p:animEffect>
@@ -23826,20 +20256,20 @@
                           </p:cTn>
                         </p:par>
                         <p:par>
-                          <p:cTn id="14" presetID="10" presetClass="entr" presetSubtype="0" fill="hold" grpId="0" nodeType="afterEffect">
+                          <p:cTn id="9" presetID="10" presetClass="entr" presetSubtype="0" fill="hold" grpId="0" nodeType="afterEffect">
                             <p:stCondLst>
-                              <p:cond delay="600"/>
+                              <p:cond delay="250"/>
                             </p:stCondLst>
                             <p:childTnLst>
                               <p:set>
                                 <p:cBhvr>
-                                  <p:cTn id="12" dur="1" fill="hold">
+                                  <p:cTn id="7" dur="1" fill="hold">
                                     <p:stCondLst>
                                       <p:cond delay="0"/>
                                     </p:stCondLst>
                                   </p:cTn>
                                   <p:tgtEl>
-                                    <p:spTgt spid="7"/>
+                                    <p:spTgt spid="6"/>
                                   </p:tgtEl>
                                   <p:attrNameLst>
                                     <p:attrName>style.visibility</p:attrName>
@@ -23851,9 +20281,9 @@
                               </p:set>
                               <p:animEffect transition="in" filter="fade">
                                 <p:cBhvr>
-                                  <p:cTn id="13" dur="400"/>
+                                  <p:cTn id="8" dur="400"/>
                                   <p:tgtEl>
-                                    <p:spTgt spid="7"/>
+                                    <p:spTgt spid="6"/>
                                   </p:tgtEl>
                                 </p:cBhvr>
                               </p:animEffect>
@@ -23942,33 +20372,9 @@
           </a:p>
         </p:txBody>
       </p:sp>
-      <p:pic>
-        <p:nvPicPr>
-          <p:cNvPr id="3" name="Picture 2" descr="LOGO-OCEO-mark.png"/>
-          <p:cNvPicPr>
-            <a:picLocks noChangeAspect="1"/>
-          </p:cNvPicPr>
-          <p:nvPr/>
-        </p:nvPicPr>
-        <p:blipFill>
-          <a:blip r:embed="rId2"/>
-          <a:stretch>
-            <a:fillRect/>
-          </a:stretch>
-        </p:blipFill>
-        <p:spPr>
-          <a:xfrm>
-            <a:off x="10637215" y="457200"/>
-            <a:ext cx="1051560" cy="954471"/>
-          </a:xfrm>
-          <a:prstGeom prst="rect">
-            <a:avLst/>
-          </a:prstGeom>
-        </p:spPr>
-      </p:pic>
-      <p:sp>
-        <p:nvSpPr>
-          <p:cNvPr id="4" name="Rectangle 3"/>
+      <p:sp>
+        <p:nvSpPr>
+          <p:cNvPr id="3" name="Rectangle 2"/>
           <p:cNvSpPr/>
           <p:nvPr/>
         </p:nvSpPr>
@@ -24012,7 +20418,7 @@
       </p:sp>
       <p:sp>
         <p:nvSpPr>
-          <p:cNvPr id="5" name="TextBox 4"/>
+          <p:cNvPr id="4" name="TextBox 3"/>
           <p:cNvSpPr txBox="1"/>
           <p:nvPr/>
         </p:nvSpPr>
@@ -24062,7 +20468,7 @@
       </p:sp>
       <p:sp>
         <p:nvSpPr>
-          <p:cNvPr id="6" name="Rectangle 5"/>
+          <p:cNvPr id="5" name="Rectangle 4"/>
           <p:cNvSpPr/>
           <p:nvPr/>
         </p:nvSpPr>
@@ -24106,7 +20512,7 @@
       </p:sp>
       <p:sp>
         <p:nvSpPr>
-          <p:cNvPr id="7" name="TextBox 6"/>
+          <p:cNvPr id="6" name="TextBox 5"/>
           <p:cNvSpPr txBox="1"/>
           <p:nvPr/>
         </p:nvSpPr>
@@ -24250,7 +20656,7 @@
                       </p:stCondLst>
                       <p:childTnLst>
                         <p:par>
-                          <p:cTn id="8" presetID="23" presetClass="entr" presetSubtype="16" fill="hold" grpId="0" nodeType="afterEffect">
+                          <p:cTn id="6" presetID="10" presetClass="entr" presetSubtype="0" fill="hold" grpId="0" nodeType="afterEffect">
                             <p:stCondLst>
                               <p:cond delay="0"/>
                             </p:stCondLst>
@@ -24263,88 +20669,7 @@
                                     </p:stCondLst>
                                   </p:cTn>
                                   <p:tgtEl>
-                                    <p:spTgt spid="3"/>
-                                  </p:tgtEl>
-                                  <p:attrNameLst>
-                                    <p:attrName>style.visibility</p:attrName>
-                                  </p:attrNameLst>
-                                </p:cBhvr>
-                                <p:to>
-                                  <p:strVal val="visible"/>
-                                </p:to>
-                              </p:set>
-                              <p:anim calcmode="lin" valueType="num">
-                                <p:cBhvr additive="base">
-                                  <p:cTn id="5" dur="600" fill="hold"/>
-                                  <p:tgtEl>
-                                    <p:spTgt spid="3"/>
-                                  </p:tgtEl>
-                                  <p:attrNameLst>
-                                    <p:attrName>ppt_w</p:attrName>
-                                  </p:attrNameLst>
-                                </p:cBhvr>
-                                <p:tavLst>
-                                  <p:tav tm="0">
-                                    <p:val>
-                                      <p:fltVal val="0.3"/>
-                                    </p:val>
-                                  </p:tav>
-                                  <p:tav tm="100000">
-                                    <p:val>
-                                      <p:fltVal val="1"/>
-                                    </p:val>
-                                  </p:tav>
-                                </p:tavLst>
-                              </p:anim>
-                              <p:anim calcmode="lin" valueType="num">
-                                <p:cBhvr additive="base">
-                                  <p:cTn id="6" dur="600" fill="hold"/>
-                                  <p:tgtEl>
-                                    <p:spTgt spid="3"/>
-                                  </p:tgtEl>
-                                  <p:attrNameLst>
-                                    <p:attrName>ppt_h</p:attrName>
-                                  </p:attrNameLst>
-                                </p:cBhvr>
-                                <p:tavLst>
-                                  <p:tav tm="0">
-                                    <p:val>
-                                      <p:fltVal val="0.3"/>
-                                    </p:val>
-                                  </p:tav>
-                                  <p:tav tm="100000">
-                                    <p:val>
-                                      <p:fltVal val="1"/>
-                                    </p:val>
-                                  </p:tav>
-                                </p:tavLst>
-                              </p:anim>
-                              <p:animEffect transition="in" filter="fade">
-                                <p:cBhvr>
-                                  <p:cTn id="7" dur="600"/>
-                                  <p:tgtEl>
-                                    <p:spTgt spid="3"/>
-                                  </p:tgtEl>
-                                </p:cBhvr>
-                              </p:animEffect>
-                            </p:childTnLst>
-                          </p:cTn>
-                        </p:par>
-                        <p:par>
-                          <p:cTn id="11" presetID="10" presetClass="entr" presetSubtype="0" fill="hold" grpId="0" nodeType="afterEffect">
-                            <p:stCondLst>
-                              <p:cond delay="350"/>
-                            </p:stCondLst>
-                            <p:childTnLst>
-                              <p:set>
-                                <p:cBhvr>
-                                  <p:cTn id="9" dur="1" fill="hold">
-                                    <p:stCondLst>
-                                      <p:cond delay="0"/>
-                                    </p:stCondLst>
-                                  </p:cTn>
-                                  <p:tgtEl>
-                                    <p:spTgt spid="5"/>
+                                    <p:spTgt spid="4"/>
                                   </p:tgtEl>
                                   <p:attrNameLst>
                                     <p:attrName>style.visibility</p:attrName>
@@ -24356,9 +20681,9 @@
                               </p:set>
                               <p:animEffect transition="in" filter="fade">
                                 <p:cBhvr>
-                                  <p:cTn id="10" dur="400"/>
+                                  <p:cTn id="5" dur="400"/>
                                   <p:tgtEl>
-                                    <p:spTgt spid="5"/>
+                                    <p:spTgt spid="4"/>
                                   </p:tgtEl>
                                 </p:cBhvr>
                               </p:animEffect>
@@ -24366,20 +20691,20 @@
                           </p:cTn>
                         </p:par>
                         <p:par>
-                          <p:cTn id="14" presetID="10" presetClass="entr" presetSubtype="0" fill="hold" grpId="0" nodeType="afterEffect">
+                          <p:cTn id="9" presetID="10" presetClass="entr" presetSubtype="0" fill="hold" grpId="0" nodeType="afterEffect">
                             <p:stCondLst>
-                              <p:cond delay="600"/>
+                              <p:cond delay="250"/>
                             </p:stCondLst>
                             <p:childTnLst>
                               <p:set>
                                 <p:cBhvr>
-                                  <p:cTn id="12" dur="1" fill="hold">
+                                  <p:cTn id="7" dur="1" fill="hold">
                                     <p:stCondLst>
                                       <p:cond delay="0"/>
                                     </p:stCondLst>
                                   </p:cTn>
                                   <p:tgtEl>
-                                    <p:spTgt spid="7"/>
+                                    <p:spTgt spid="6"/>
                                   </p:tgtEl>
                                   <p:attrNameLst>
                                     <p:attrName>style.visibility</p:attrName>
@@ -24391,9 +20716,9 @@
                               </p:set>
                               <p:animEffect transition="in" filter="fade">
                                 <p:cBhvr>
-                                  <p:cTn id="13" dur="400"/>
+                                  <p:cTn id="8" dur="400"/>
                                   <p:tgtEl>
-                                    <p:spTgt spid="7"/>
+                                    <p:spTgt spid="6"/>
                                   </p:tgtEl>
                                 </p:cBhvr>
                               </p:animEffect>
@@ -24482,33 +20807,9 @@
           </a:p>
         </p:txBody>
       </p:sp>
-      <p:pic>
-        <p:nvPicPr>
-          <p:cNvPr id="3" name="Picture 2" descr="LOGO-OCEO-mark.png"/>
-          <p:cNvPicPr>
-            <a:picLocks noChangeAspect="1"/>
-          </p:cNvPicPr>
-          <p:nvPr/>
-        </p:nvPicPr>
-        <p:blipFill>
-          <a:blip r:embed="rId2"/>
-          <a:stretch>
-            <a:fillRect/>
-          </a:stretch>
-        </p:blipFill>
-        <p:spPr>
-          <a:xfrm>
-            <a:off x="10637215" y="457200"/>
-            <a:ext cx="1051560" cy="954471"/>
-          </a:xfrm>
-          <a:prstGeom prst="rect">
-            <a:avLst/>
-          </a:prstGeom>
-        </p:spPr>
-      </p:pic>
-      <p:sp>
-        <p:nvSpPr>
-          <p:cNvPr id="4" name="Rectangle 3"/>
+      <p:sp>
+        <p:nvSpPr>
+          <p:cNvPr id="3" name="Rectangle 2"/>
           <p:cNvSpPr/>
           <p:nvPr/>
         </p:nvSpPr>
@@ -24552,7 +20853,7 @@
       </p:sp>
       <p:sp>
         <p:nvSpPr>
-          <p:cNvPr id="5" name="TextBox 4"/>
+          <p:cNvPr id="4" name="TextBox 3"/>
           <p:cNvSpPr txBox="1"/>
           <p:nvPr/>
         </p:nvSpPr>
@@ -24602,7 +20903,7 @@
       </p:sp>
       <p:sp>
         <p:nvSpPr>
-          <p:cNvPr id="6" name="Rectangle 5"/>
+          <p:cNvPr id="5" name="Rectangle 4"/>
           <p:cNvSpPr/>
           <p:nvPr/>
         </p:nvSpPr>
@@ -24646,7 +20947,7 @@
       </p:sp>
       <p:sp>
         <p:nvSpPr>
-          <p:cNvPr id="7" name="TextBox 6"/>
+          <p:cNvPr id="6" name="TextBox 5"/>
           <p:cNvSpPr txBox="1"/>
           <p:nvPr/>
         </p:nvSpPr>
@@ -24846,7 +21147,7 @@
                       </p:stCondLst>
                       <p:childTnLst>
                         <p:par>
-                          <p:cTn id="8" presetID="23" presetClass="entr" presetSubtype="16" fill="hold" grpId="0" nodeType="afterEffect">
+                          <p:cTn id="6" presetID="10" presetClass="entr" presetSubtype="0" fill="hold" grpId="0" nodeType="afterEffect">
                             <p:stCondLst>
                               <p:cond delay="0"/>
                             </p:stCondLst>
@@ -24859,88 +21160,7 @@
                                     </p:stCondLst>
                                   </p:cTn>
                                   <p:tgtEl>
-                                    <p:spTgt spid="3"/>
-                                  </p:tgtEl>
-                                  <p:attrNameLst>
-                                    <p:attrName>style.visibility</p:attrName>
-                                  </p:attrNameLst>
-                                </p:cBhvr>
-                                <p:to>
-                                  <p:strVal val="visible"/>
-                                </p:to>
-                              </p:set>
-                              <p:anim calcmode="lin" valueType="num">
-                                <p:cBhvr additive="base">
-                                  <p:cTn id="5" dur="600" fill="hold"/>
-                                  <p:tgtEl>
-                                    <p:spTgt spid="3"/>
-                                  </p:tgtEl>
-                                  <p:attrNameLst>
-                                    <p:attrName>ppt_w</p:attrName>
-                                  </p:attrNameLst>
-                                </p:cBhvr>
-                                <p:tavLst>
-                                  <p:tav tm="0">
-                                    <p:val>
-                                      <p:fltVal val="0.3"/>
-                                    </p:val>
-                                  </p:tav>
-                                  <p:tav tm="100000">
-                                    <p:val>
-                                      <p:fltVal val="1"/>
-                                    </p:val>
-                                  </p:tav>
-                                </p:tavLst>
-                              </p:anim>
-                              <p:anim calcmode="lin" valueType="num">
-                                <p:cBhvr additive="base">
-                                  <p:cTn id="6" dur="600" fill="hold"/>
-                                  <p:tgtEl>
-                                    <p:spTgt spid="3"/>
-                                  </p:tgtEl>
-                                  <p:attrNameLst>
-                                    <p:attrName>ppt_h</p:attrName>
-                                  </p:attrNameLst>
-                                </p:cBhvr>
-                                <p:tavLst>
-                                  <p:tav tm="0">
-                                    <p:val>
-                                      <p:fltVal val="0.3"/>
-                                    </p:val>
-                                  </p:tav>
-                                  <p:tav tm="100000">
-                                    <p:val>
-                                      <p:fltVal val="1"/>
-                                    </p:val>
-                                  </p:tav>
-                                </p:tavLst>
-                              </p:anim>
-                              <p:animEffect transition="in" filter="fade">
-                                <p:cBhvr>
-                                  <p:cTn id="7" dur="600"/>
-                                  <p:tgtEl>
-                                    <p:spTgt spid="3"/>
-                                  </p:tgtEl>
-                                </p:cBhvr>
-                              </p:animEffect>
-                            </p:childTnLst>
-                          </p:cTn>
-                        </p:par>
-                        <p:par>
-                          <p:cTn id="11" presetID="10" presetClass="entr" presetSubtype="0" fill="hold" grpId="0" nodeType="afterEffect">
-                            <p:stCondLst>
-                              <p:cond delay="350"/>
-                            </p:stCondLst>
-                            <p:childTnLst>
-                              <p:set>
-                                <p:cBhvr>
-                                  <p:cTn id="9" dur="1" fill="hold">
-                                    <p:stCondLst>
-                                      <p:cond delay="0"/>
-                                    </p:stCondLst>
-                                  </p:cTn>
-                                  <p:tgtEl>
-                                    <p:spTgt spid="5"/>
+                                    <p:spTgt spid="4"/>
                                   </p:tgtEl>
                                   <p:attrNameLst>
                                     <p:attrName>style.visibility</p:attrName>
@@ -24952,9 +21172,9 @@
                               </p:set>
                               <p:animEffect transition="in" filter="fade">
                                 <p:cBhvr>
-                                  <p:cTn id="10" dur="400"/>
+                                  <p:cTn id="5" dur="400"/>
                                   <p:tgtEl>
-                                    <p:spTgt spid="5"/>
+                                    <p:spTgt spid="4"/>
                                   </p:tgtEl>
                                 </p:cBhvr>
                               </p:animEffect>
@@ -24962,20 +21182,20 @@
                           </p:cTn>
                         </p:par>
                         <p:par>
-                          <p:cTn id="14" presetID="10" presetClass="entr" presetSubtype="0" fill="hold" grpId="0" nodeType="afterEffect">
+                          <p:cTn id="9" presetID="10" presetClass="entr" presetSubtype="0" fill="hold" grpId="0" nodeType="afterEffect">
                             <p:stCondLst>
-                              <p:cond delay="600"/>
+                              <p:cond delay="250"/>
                             </p:stCondLst>
                             <p:childTnLst>
                               <p:set>
                                 <p:cBhvr>
-                                  <p:cTn id="12" dur="1" fill="hold">
+                                  <p:cTn id="7" dur="1" fill="hold">
                                     <p:stCondLst>
                                       <p:cond delay="0"/>
                                     </p:stCondLst>
                                   </p:cTn>
                                   <p:tgtEl>
-                                    <p:spTgt spid="7"/>
+                                    <p:spTgt spid="6"/>
                                   </p:tgtEl>
                                   <p:attrNameLst>
                                     <p:attrName>style.visibility</p:attrName>
@@ -24987,9 +21207,9 @@
                               </p:set>
                               <p:animEffect transition="in" filter="fade">
                                 <p:cBhvr>
-                                  <p:cTn id="13" dur="400"/>
+                                  <p:cTn id="8" dur="400"/>
                                   <p:tgtEl>
-                                    <p:spTgt spid="7"/>
+                                    <p:spTgt spid="6"/>
                                   </p:tgtEl>
                                 </p:cBhvr>
                               </p:animEffect>
@@ -25078,33 +21298,9 @@
           </a:p>
         </p:txBody>
       </p:sp>
-      <p:pic>
-        <p:nvPicPr>
-          <p:cNvPr id="3" name="Picture 2" descr="LOGO-OCEO-mark.png"/>
-          <p:cNvPicPr>
-            <a:picLocks noChangeAspect="1"/>
-          </p:cNvPicPr>
-          <p:nvPr/>
-        </p:nvPicPr>
-        <p:blipFill>
-          <a:blip r:embed="rId2"/>
-          <a:stretch>
-            <a:fillRect/>
-          </a:stretch>
-        </p:blipFill>
-        <p:spPr>
-          <a:xfrm>
-            <a:off x="10637215" y="457200"/>
-            <a:ext cx="1051560" cy="954471"/>
-          </a:xfrm>
-          <a:prstGeom prst="rect">
-            <a:avLst/>
-          </a:prstGeom>
-        </p:spPr>
-      </p:pic>
-      <p:sp>
-        <p:nvSpPr>
-          <p:cNvPr id="4" name="Rectangle 3"/>
+      <p:sp>
+        <p:nvSpPr>
+          <p:cNvPr id="3" name="Rectangle 2"/>
           <p:cNvSpPr/>
           <p:nvPr/>
         </p:nvSpPr>
@@ -25148,7 +21344,7 @@
       </p:sp>
       <p:sp>
         <p:nvSpPr>
-          <p:cNvPr id="5" name="TextBox 4"/>
+          <p:cNvPr id="4" name="TextBox 3"/>
           <p:cNvSpPr txBox="1"/>
           <p:nvPr/>
         </p:nvSpPr>
@@ -25198,7 +21394,7 @@
       </p:sp>
       <p:sp>
         <p:nvSpPr>
-          <p:cNvPr id="6" name="Rectangle 5"/>
+          <p:cNvPr id="5" name="Rectangle 4"/>
           <p:cNvSpPr/>
           <p:nvPr/>
         </p:nvSpPr>
@@ -25242,7 +21438,7 @@
       </p:sp>
       <p:sp>
         <p:nvSpPr>
-          <p:cNvPr id="7" name="TextBox 6"/>
+          <p:cNvPr id="6" name="TextBox 5"/>
           <p:cNvSpPr txBox="1"/>
           <p:nvPr/>
         </p:nvSpPr>
@@ -25414,7 +21610,7 @@
                       </p:stCondLst>
                       <p:childTnLst>
                         <p:par>
-                          <p:cTn id="8" presetID="23" presetClass="entr" presetSubtype="16" fill="hold" grpId="0" nodeType="afterEffect">
+                          <p:cTn id="6" presetID="10" presetClass="entr" presetSubtype="0" fill="hold" grpId="0" nodeType="afterEffect">
                             <p:stCondLst>
                               <p:cond delay="0"/>
                             </p:stCondLst>
@@ -25427,88 +21623,7 @@
                                     </p:stCondLst>
                                   </p:cTn>
                                   <p:tgtEl>
-                                    <p:spTgt spid="3"/>
-                                  </p:tgtEl>
-                                  <p:attrNameLst>
-                                    <p:attrName>style.visibility</p:attrName>
-                                  </p:attrNameLst>
-                                </p:cBhvr>
-                                <p:to>
-                                  <p:strVal val="visible"/>
-                                </p:to>
-                              </p:set>
-                              <p:anim calcmode="lin" valueType="num">
-                                <p:cBhvr additive="base">
-                                  <p:cTn id="5" dur="600" fill="hold"/>
-                                  <p:tgtEl>
-                                    <p:spTgt spid="3"/>
-                                  </p:tgtEl>
-                                  <p:attrNameLst>
-                                    <p:attrName>ppt_w</p:attrName>
-                                  </p:attrNameLst>
-                                </p:cBhvr>
-                                <p:tavLst>
-                                  <p:tav tm="0">
-                                    <p:val>
-                                      <p:fltVal val="0.3"/>
-                                    </p:val>
-                                  </p:tav>
-                                  <p:tav tm="100000">
-                                    <p:val>
-                                      <p:fltVal val="1"/>
-                                    </p:val>
-                                  </p:tav>
-                                </p:tavLst>
-                              </p:anim>
-                              <p:anim calcmode="lin" valueType="num">
-                                <p:cBhvr additive="base">
-                                  <p:cTn id="6" dur="600" fill="hold"/>
-                                  <p:tgtEl>
-                                    <p:spTgt spid="3"/>
-                                  </p:tgtEl>
-                                  <p:attrNameLst>
-                                    <p:attrName>ppt_h</p:attrName>
-                                  </p:attrNameLst>
-                                </p:cBhvr>
-                                <p:tavLst>
-                                  <p:tav tm="0">
-                                    <p:val>
-                                      <p:fltVal val="0.3"/>
-                                    </p:val>
-                                  </p:tav>
-                                  <p:tav tm="100000">
-                                    <p:val>
-                                      <p:fltVal val="1"/>
-                                    </p:val>
-                                  </p:tav>
-                                </p:tavLst>
-                              </p:anim>
-                              <p:animEffect transition="in" filter="fade">
-                                <p:cBhvr>
-                                  <p:cTn id="7" dur="600"/>
-                                  <p:tgtEl>
-                                    <p:spTgt spid="3"/>
-                                  </p:tgtEl>
-                                </p:cBhvr>
-                              </p:animEffect>
-                            </p:childTnLst>
-                          </p:cTn>
-                        </p:par>
-                        <p:par>
-                          <p:cTn id="11" presetID="10" presetClass="entr" presetSubtype="0" fill="hold" grpId="0" nodeType="afterEffect">
-                            <p:stCondLst>
-                              <p:cond delay="350"/>
-                            </p:stCondLst>
-                            <p:childTnLst>
-                              <p:set>
-                                <p:cBhvr>
-                                  <p:cTn id="9" dur="1" fill="hold">
-                                    <p:stCondLst>
-                                      <p:cond delay="0"/>
-                                    </p:stCondLst>
-                                  </p:cTn>
-                                  <p:tgtEl>
-                                    <p:spTgt spid="5"/>
+                                    <p:spTgt spid="4"/>
                                   </p:tgtEl>
                                   <p:attrNameLst>
                                     <p:attrName>style.visibility</p:attrName>
@@ -25520,9 +21635,9 @@
                               </p:set>
                               <p:animEffect transition="in" filter="fade">
                                 <p:cBhvr>
-                                  <p:cTn id="10" dur="400"/>
+                                  <p:cTn id="5" dur="400"/>
                                   <p:tgtEl>
-                                    <p:spTgt spid="5"/>
+                                    <p:spTgt spid="4"/>
                                   </p:tgtEl>
                                 </p:cBhvr>
                               </p:animEffect>
@@ -25530,20 +21645,20 @@
                           </p:cTn>
                         </p:par>
                         <p:par>
-                          <p:cTn id="14" presetID="10" presetClass="entr" presetSubtype="0" fill="hold" grpId="0" nodeType="afterEffect">
+                          <p:cTn id="9" presetID="10" presetClass="entr" presetSubtype="0" fill="hold" grpId="0" nodeType="afterEffect">
                             <p:stCondLst>
-                              <p:cond delay="600"/>
+                              <p:cond delay="250"/>
                             </p:stCondLst>
                             <p:childTnLst>
                               <p:set>
                                 <p:cBhvr>
-                                  <p:cTn id="12" dur="1" fill="hold">
+                                  <p:cTn id="7" dur="1" fill="hold">
                                     <p:stCondLst>
                                       <p:cond delay="0"/>
                                     </p:stCondLst>
                                   </p:cTn>
                                   <p:tgtEl>
-                                    <p:spTgt spid="7"/>
+                                    <p:spTgt spid="6"/>
                                   </p:tgtEl>
                                   <p:attrNameLst>
                                     <p:attrName>style.visibility</p:attrName>
@@ -25555,9 +21670,9 @@
                               </p:set>
                               <p:animEffect transition="in" filter="fade">
                                 <p:cBhvr>
-                                  <p:cTn id="13" dur="400"/>
+                                  <p:cTn id="8" dur="400"/>
                                   <p:tgtEl>
-                                    <p:spTgt spid="7"/>
+                                    <p:spTgt spid="6"/>
                                   </p:tgtEl>
                                 </p:cBhvr>
                               </p:animEffect>
@@ -25646,33 +21761,9 @@
           </a:p>
         </p:txBody>
       </p:sp>
-      <p:pic>
-        <p:nvPicPr>
-          <p:cNvPr id="3" name="Picture 2" descr="LOGO-OCEO-mark.png"/>
-          <p:cNvPicPr>
-            <a:picLocks noChangeAspect="1"/>
-          </p:cNvPicPr>
-          <p:nvPr/>
-        </p:nvPicPr>
-        <p:blipFill>
-          <a:blip r:embed="rId2"/>
-          <a:stretch>
-            <a:fillRect/>
-          </a:stretch>
-        </p:blipFill>
-        <p:spPr>
-          <a:xfrm>
-            <a:off x="10637215" y="457200"/>
-            <a:ext cx="1051560" cy="954471"/>
-          </a:xfrm>
-          <a:prstGeom prst="rect">
-            <a:avLst/>
-          </a:prstGeom>
-        </p:spPr>
-      </p:pic>
-      <p:sp>
-        <p:nvSpPr>
-          <p:cNvPr id="4" name="Rectangle 3"/>
+      <p:sp>
+        <p:nvSpPr>
+          <p:cNvPr id="3" name="Rectangle 2"/>
           <p:cNvSpPr/>
           <p:nvPr/>
         </p:nvSpPr>
@@ -25716,7 +21807,7 @@
       </p:sp>
       <p:sp>
         <p:nvSpPr>
-          <p:cNvPr id="5" name="TextBox 4"/>
+          <p:cNvPr id="4" name="TextBox 3"/>
           <p:cNvSpPr txBox="1"/>
           <p:nvPr/>
         </p:nvSpPr>
@@ -25766,7 +21857,7 @@
       </p:sp>
       <p:sp>
         <p:nvSpPr>
-          <p:cNvPr id="6" name="Rectangle 5"/>
+          <p:cNvPr id="5" name="Rectangle 4"/>
           <p:cNvSpPr/>
           <p:nvPr/>
         </p:nvSpPr>
@@ -25810,7 +21901,7 @@
       </p:sp>
       <p:sp>
         <p:nvSpPr>
-          <p:cNvPr id="7" name="TextBox 6"/>
+          <p:cNvPr id="6" name="TextBox 5"/>
           <p:cNvSpPr txBox="1"/>
           <p:nvPr/>
         </p:nvSpPr>
@@ -25994,7 +22085,7 @@
                       </p:stCondLst>
                       <p:childTnLst>
                         <p:par>
-                          <p:cTn id="8" presetID="23" presetClass="entr" presetSubtype="16" fill="hold" grpId="0" nodeType="afterEffect">
+                          <p:cTn id="6" presetID="10" presetClass="entr" presetSubtype="0" fill="hold" grpId="0" nodeType="afterEffect">
                             <p:stCondLst>
                               <p:cond delay="0"/>
                             </p:stCondLst>
@@ -26007,88 +22098,7 @@
                                     </p:stCondLst>
                                   </p:cTn>
                                   <p:tgtEl>
-                                    <p:spTgt spid="3"/>
-                                  </p:tgtEl>
-                                  <p:attrNameLst>
-                                    <p:attrName>style.visibility</p:attrName>
-                                  </p:attrNameLst>
-                                </p:cBhvr>
-                                <p:to>
-                                  <p:strVal val="visible"/>
-                                </p:to>
-                              </p:set>
-                              <p:anim calcmode="lin" valueType="num">
-                                <p:cBhvr additive="base">
-                                  <p:cTn id="5" dur="600" fill="hold"/>
-                                  <p:tgtEl>
-                                    <p:spTgt spid="3"/>
-                                  </p:tgtEl>
-                                  <p:attrNameLst>
-                                    <p:attrName>ppt_w</p:attrName>
-                                  </p:attrNameLst>
-                                </p:cBhvr>
-                                <p:tavLst>
-                                  <p:tav tm="0">
-                                    <p:val>
-                                      <p:fltVal val="0.3"/>
-                                    </p:val>
-                                  </p:tav>
-                                  <p:tav tm="100000">
-                                    <p:val>
-                                      <p:fltVal val="1"/>
-                                    </p:val>
-                                  </p:tav>
-                                </p:tavLst>
-                              </p:anim>
-                              <p:anim calcmode="lin" valueType="num">
-                                <p:cBhvr additive="base">
-                                  <p:cTn id="6" dur="600" fill="hold"/>
-                                  <p:tgtEl>
-                                    <p:spTgt spid="3"/>
-                                  </p:tgtEl>
-                                  <p:attrNameLst>
-                                    <p:attrName>ppt_h</p:attrName>
-                                  </p:attrNameLst>
-                                </p:cBhvr>
-                                <p:tavLst>
-                                  <p:tav tm="0">
-                                    <p:val>
-                                      <p:fltVal val="0.3"/>
-                                    </p:val>
-                                  </p:tav>
-                                  <p:tav tm="100000">
-                                    <p:val>
-                                      <p:fltVal val="1"/>
-                                    </p:val>
-                                  </p:tav>
-                                </p:tavLst>
-                              </p:anim>
-                              <p:animEffect transition="in" filter="fade">
-                                <p:cBhvr>
-                                  <p:cTn id="7" dur="600"/>
-                                  <p:tgtEl>
-                                    <p:spTgt spid="3"/>
-                                  </p:tgtEl>
-                                </p:cBhvr>
-                              </p:animEffect>
-                            </p:childTnLst>
-                          </p:cTn>
-                        </p:par>
-                        <p:par>
-                          <p:cTn id="11" presetID="10" presetClass="entr" presetSubtype="0" fill="hold" grpId="0" nodeType="afterEffect">
-                            <p:stCondLst>
-                              <p:cond delay="350"/>
-                            </p:stCondLst>
-                            <p:childTnLst>
-                              <p:set>
-                                <p:cBhvr>
-                                  <p:cTn id="9" dur="1" fill="hold">
-                                    <p:stCondLst>
-                                      <p:cond delay="0"/>
-                                    </p:stCondLst>
-                                  </p:cTn>
-                                  <p:tgtEl>
-                                    <p:spTgt spid="5"/>
+                                    <p:spTgt spid="4"/>
                                   </p:tgtEl>
                                   <p:attrNameLst>
                                     <p:attrName>style.visibility</p:attrName>
@@ -26100,9 +22110,9 @@
                               </p:set>
                               <p:animEffect transition="in" filter="fade">
                                 <p:cBhvr>
-                                  <p:cTn id="10" dur="400"/>
+                                  <p:cTn id="5" dur="400"/>
                                   <p:tgtEl>
-                                    <p:spTgt spid="5"/>
+                                    <p:spTgt spid="4"/>
                                   </p:tgtEl>
                                 </p:cBhvr>
                               </p:animEffect>
@@ -26110,20 +22120,20 @@
                           </p:cTn>
                         </p:par>
                         <p:par>
-                          <p:cTn id="14" presetID="10" presetClass="entr" presetSubtype="0" fill="hold" grpId="0" nodeType="afterEffect">
+                          <p:cTn id="9" presetID="10" presetClass="entr" presetSubtype="0" fill="hold" grpId="0" nodeType="afterEffect">
                             <p:stCondLst>
-                              <p:cond delay="600"/>
+                              <p:cond delay="250"/>
                             </p:stCondLst>
                             <p:childTnLst>
                               <p:set>
                                 <p:cBhvr>
-                                  <p:cTn id="12" dur="1" fill="hold">
+                                  <p:cTn id="7" dur="1" fill="hold">
                                     <p:stCondLst>
                                       <p:cond delay="0"/>
                                     </p:stCondLst>
                                   </p:cTn>
                                   <p:tgtEl>
-                                    <p:spTgt spid="7"/>
+                                    <p:spTgt spid="6"/>
                                   </p:tgtEl>
                                   <p:attrNameLst>
                                     <p:attrName>style.visibility</p:attrName>
@@ -26135,9 +22145,9 @@
                               </p:set>
                               <p:animEffect transition="in" filter="fade">
                                 <p:cBhvr>
-                                  <p:cTn id="13" dur="400"/>
+                                  <p:cTn id="8" dur="400"/>
                                   <p:tgtEl>
-                                    <p:spTgt spid="7"/>
+                                    <p:spTgt spid="6"/>
                                   </p:tgtEl>
                                 </p:cBhvr>
                               </p:animEffect>

--- a/Projetos Gsena Tec/oceo/apresentacao/OCEO - A Obra Completa (apresentacao).pptx
+++ b/Projetos Gsena Tec/oceo/apresentacao/OCEO - A Obra Completa (apresentacao).pptx
@@ -6226,15 +6226,39 @@
           </a:p>
         </p:txBody>
       </p:sp>
-      <p:sp>
-        <p:nvSpPr>
-          <p:cNvPr id="3" name="Rectangle 2"/>
+      <p:pic>
+        <p:nvPicPr>
+          <p:cNvPr id="3" name="Picture 2" descr="LOGO-OCEO.png"/>
+          <p:cNvPicPr>
+            <a:picLocks noChangeAspect="1"/>
+          </p:cNvPicPr>
+          <p:nvPr/>
+        </p:nvPicPr>
+        <p:blipFill>
+          <a:blip r:embed="rId2"/>
+          <a:stretch>
+            <a:fillRect/>
+          </a:stretch>
+        </p:blipFill>
+        <p:spPr>
+          <a:xfrm>
+            <a:off x="868680" y="777240"/>
+            <a:ext cx="2468880" cy="1991869"/>
+          </a:xfrm>
+          <a:prstGeom prst="rect">
+            <a:avLst/>
+          </a:prstGeom>
+        </p:spPr>
+      </p:pic>
+      <p:sp>
+        <p:nvSpPr>
+          <p:cNvPr id="4" name="Rectangle 3"/>
           <p:cNvSpPr/>
           <p:nvPr/>
         </p:nvSpPr>
         <p:spPr>
           <a:xfrm>
-            <a:off x="914400" y="2651760"/>
+            <a:off x="914400" y="3977639"/>
             <a:ext cx="2011680" cy="38100"/>
           </a:xfrm>
           <a:prstGeom prst="rect">
@@ -6272,13 +6296,13 @@
       </p:sp>
       <p:sp>
         <p:nvSpPr>
-          <p:cNvPr id="4" name="TextBox 3"/>
+          <p:cNvPr id="5" name="TextBox 4"/>
           <p:cNvSpPr txBox="1"/>
           <p:nvPr/>
         </p:nvSpPr>
         <p:spPr>
           <a:xfrm>
-            <a:off x="896112" y="2880360"/>
+            <a:off x="896112" y="4206240"/>
             <a:ext cx="10058400" cy="2194560"/>
           </a:xfrm>
           <a:prstGeom prst="rect">
@@ -6362,7 +6386,7 @@
                       </p:stCondLst>
                       <p:childTnLst>
                         <p:par>
-                          <p:cTn id="6" presetID="10" presetClass="entr" presetSubtype="0" fill="hold" grpId="0" nodeType="afterEffect">
+                          <p:cTn id="8" presetID="23" presetClass="entr" presetSubtype="16" fill="hold" grpId="0" nodeType="afterEffect">
                             <p:stCondLst>
                               <p:cond delay="0"/>
                             </p:stCondLst>
@@ -6375,7 +6399,88 @@
                                     </p:stCondLst>
                                   </p:cTn>
                                   <p:tgtEl>
-                                    <p:spTgt spid="4"/>
+                                    <p:spTgt spid="3"/>
+                                  </p:tgtEl>
+                                  <p:attrNameLst>
+                                    <p:attrName>style.visibility</p:attrName>
+                                  </p:attrNameLst>
+                                </p:cBhvr>
+                                <p:to>
+                                  <p:strVal val="visible"/>
+                                </p:to>
+                              </p:set>
+                              <p:anim calcmode="lin" valueType="num">
+                                <p:cBhvr additive="base">
+                                  <p:cTn id="5" dur="600" fill="hold"/>
+                                  <p:tgtEl>
+                                    <p:spTgt spid="3"/>
+                                  </p:tgtEl>
+                                  <p:attrNameLst>
+                                    <p:attrName>ppt_w</p:attrName>
+                                  </p:attrNameLst>
+                                </p:cBhvr>
+                                <p:tavLst>
+                                  <p:tav tm="0">
+                                    <p:val>
+                                      <p:fltVal val="0.3"/>
+                                    </p:val>
+                                  </p:tav>
+                                  <p:tav tm="100000">
+                                    <p:val>
+                                      <p:fltVal val="1"/>
+                                    </p:val>
+                                  </p:tav>
+                                </p:tavLst>
+                              </p:anim>
+                              <p:anim calcmode="lin" valueType="num">
+                                <p:cBhvr additive="base">
+                                  <p:cTn id="6" dur="600" fill="hold"/>
+                                  <p:tgtEl>
+                                    <p:spTgt spid="3"/>
+                                  </p:tgtEl>
+                                  <p:attrNameLst>
+                                    <p:attrName>ppt_h</p:attrName>
+                                  </p:attrNameLst>
+                                </p:cBhvr>
+                                <p:tavLst>
+                                  <p:tav tm="0">
+                                    <p:val>
+                                      <p:fltVal val="0.3"/>
+                                    </p:val>
+                                  </p:tav>
+                                  <p:tav tm="100000">
+                                    <p:val>
+                                      <p:fltVal val="1"/>
+                                    </p:val>
+                                  </p:tav>
+                                </p:tavLst>
+                              </p:anim>
+                              <p:animEffect transition="in" filter="fade">
+                                <p:cBhvr>
+                                  <p:cTn id="7" dur="600"/>
+                                  <p:tgtEl>
+                                    <p:spTgt spid="3"/>
+                                  </p:tgtEl>
+                                </p:cBhvr>
+                              </p:animEffect>
+                            </p:childTnLst>
+                          </p:cTn>
+                        </p:par>
+                        <p:par>
+                          <p:cTn id="11" presetID="10" presetClass="entr" presetSubtype="0" fill="hold" grpId="0" nodeType="afterEffect">
+                            <p:stCondLst>
+                              <p:cond delay="350"/>
+                            </p:stCondLst>
+                            <p:childTnLst>
+                              <p:set>
+                                <p:cBhvr>
+                                  <p:cTn id="9" dur="1" fill="hold">
+                                    <p:stCondLst>
+                                      <p:cond delay="0"/>
+                                    </p:stCondLst>
+                                  </p:cTn>
+                                  <p:tgtEl>
+                                    <p:spTgt spid="5"/>
                                   </p:tgtEl>
                                   <p:attrNameLst>
                                     <p:attrName>style.visibility</p:attrName>
@@ -6387,9 +6492,9 @@
                               </p:set>
                               <p:animEffect transition="in" filter="fade">
                                 <p:cBhvr>
-                                  <p:cTn id="5" dur="400"/>
+                                  <p:cTn id="10" dur="400"/>
                                   <p:tgtEl>
-                                    <p:spTgt spid="4"/>
+                                    <p:spTgt spid="5"/>
                                   </p:tgtEl>
                                 </p:cBhvr>
                               </p:animEffect>
@@ -9234,15 +9339,39 @@
           </a:p>
         </p:txBody>
       </p:sp>
-      <p:sp>
-        <p:nvSpPr>
-          <p:cNvPr id="3" name="Rectangle 2"/>
+      <p:pic>
+        <p:nvPicPr>
+          <p:cNvPr id="3" name="Picture 2" descr="LOGO-OCEO.png"/>
+          <p:cNvPicPr>
+            <a:picLocks noChangeAspect="1"/>
+          </p:cNvPicPr>
+          <p:nvPr/>
+        </p:nvPicPr>
+        <p:blipFill>
+          <a:blip r:embed="rId2"/>
+          <a:stretch>
+            <a:fillRect/>
+          </a:stretch>
+        </p:blipFill>
+        <p:spPr>
+          <a:xfrm>
+            <a:off x="868680" y="777240"/>
+            <a:ext cx="2468880" cy="1991869"/>
+          </a:xfrm>
+          <a:prstGeom prst="rect">
+            <a:avLst/>
+          </a:prstGeom>
+        </p:spPr>
+      </p:pic>
+      <p:sp>
+        <p:nvSpPr>
+          <p:cNvPr id="4" name="Rectangle 3"/>
           <p:cNvSpPr/>
           <p:nvPr/>
         </p:nvSpPr>
         <p:spPr>
           <a:xfrm>
-            <a:off x="914400" y="2651760"/>
+            <a:off x="914400" y="3977639"/>
             <a:ext cx="2011680" cy="38100"/>
           </a:xfrm>
           <a:prstGeom prst="rect">
@@ -9280,13 +9409,13 @@
       </p:sp>
       <p:sp>
         <p:nvSpPr>
-          <p:cNvPr id="4" name="TextBox 3"/>
+          <p:cNvPr id="5" name="TextBox 4"/>
           <p:cNvSpPr txBox="1"/>
           <p:nvPr/>
         </p:nvSpPr>
         <p:spPr>
           <a:xfrm>
-            <a:off x="896112" y="2880360"/>
+            <a:off x="896112" y="4206240"/>
             <a:ext cx="10058400" cy="2194560"/>
           </a:xfrm>
           <a:prstGeom prst="rect">
@@ -9370,7 +9499,7 @@
                       </p:stCondLst>
                       <p:childTnLst>
                         <p:par>
-                          <p:cTn id="6" presetID="10" presetClass="entr" presetSubtype="0" fill="hold" grpId="0" nodeType="afterEffect">
+                          <p:cTn id="8" presetID="23" presetClass="entr" presetSubtype="16" fill="hold" grpId="0" nodeType="afterEffect">
                             <p:stCondLst>
                               <p:cond delay="0"/>
                             </p:stCondLst>
@@ -9383,7 +9512,88 @@
                                     </p:stCondLst>
                                   </p:cTn>
                                   <p:tgtEl>
-                                    <p:spTgt spid="4"/>
+                                    <p:spTgt spid="3"/>
+                                  </p:tgtEl>
+                                  <p:attrNameLst>
+                                    <p:attrName>style.visibility</p:attrName>
+                                  </p:attrNameLst>
+                                </p:cBhvr>
+                                <p:to>
+                                  <p:strVal val="visible"/>
+                                </p:to>
+                              </p:set>
+                              <p:anim calcmode="lin" valueType="num">
+                                <p:cBhvr additive="base">
+                                  <p:cTn id="5" dur="600" fill="hold"/>
+                                  <p:tgtEl>
+                                    <p:spTgt spid="3"/>
+                                  </p:tgtEl>
+                                  <p:attrNameLst>
+                                    <p:attrName>ppt_w</p:attrName>
+                                  </p:attrNameLst>
+                                </p:cBhvr>
+                                <p:tavLst>
+                                  <p:tav tm="0">
+                                    <p:val>
+                                      <p:fltVal val="0.3"/>
+                                    </p:val>
+                                  </p:tav>
+                                  <p:tav tm="100000">
+                                    <p:val>
+                                      <p:fltVal val="1"/>
+                                    </p:val>
+                                  </p:tav>
+                                </p:tavLst>
+                              </p:anim>
+                              <p:anim calcmode="lin" valueType="num">
+                                <p:cBhvr additive="base">
+                                  <p:cTn id="6" dur="600" fill="hold"/>
+                                  <p:tgtEl>
+                                    <p:spTgt spid="3"/>
+                                  </p:tgtEl>
+                                  <p:attrNameLst>
+                                    <p:attrName>ppt_h</p:attrName>
+                                  </p:attrNameLst>
+                                </p:cBhvr>
+                                <p:tavLst>
+                                  <p:tav tm="0">
+                                    <p:val>
+                                      <p:fltVal val="0.3"/>
+                                    </p:val>
+                                  </p:tav>
+                                  <p:tav tm="100000">
+                                    <p:val>
+                                      <p:fltVal val="1"/>
+                                    </p:val>
+                                  </p:tav>
+                                </p:tavLst>
+                              </p:anim>
+                              <p:animEffect transition="in" filter="fade">
+                                <p:cBhvr>
+                                  <p:cTn id="7" dur="600"/>
+                                  <p:tgtEl>
+                                    <p:spTgt spid="3"/>
+                                  </p:tgtEl>
+                                </p:cBhvr>
+                              </p:animEffect>
+                            </p:childTnLst>
+                          </p:cTn>
+                        </p:par>
+                        <p:par>
+                          <p:cTn id="11" presetID="10" presetClass="entr" presetSubtype="0" fill="hold" grpId="0" nodeType="afterEffect">
+                            <p:stCondLst>
+                              <p:cond delay="350"/>
+                            </p:stCondLst>
+                            <p:childTnLst>
+                              <p:set>
+                                <p:cBhvr>
+                                  <p:cTn id="9" dur="1" fill="hold">
+                                    <p:stCondLst>
+                                      <p:cond delay="0"/>
+                                    </p:stCondLst>
+                                  </p:cTn>
+                                  <p:tgtEl>
+                                    <p:spTgt spid="5"/>
                                   </p:tgtEl>
                                   <p:attrNameLst>
                                     <p:attrName>style.visibility</p:attrName>
@@ -9395,9 +9605,9 @@
                               </p:set>
                               <p:animEffect transition="in" filter="fade">
                                 <p:cBhvr>
-                                  <p:cTn id="5" dur="400"/>
+                                  <p:cTn id="10" dur="400"/>
                                   <p:tgtEl>
-                                    <p:spTgt spid="4"/>
+                                    <p:spTgt spid="5"/>
                                   </p:tgtEl>
                                 </p:cBhvr>
                               </p:animEffect>
@@ -11000,15 +11210,39 @@
           </a:p>
         </p:txBody>
       </p:sp>
-      <p:sp>
-        <p:nvSpPr>
-          <p:cNvPr id="3" name="Rectangle 2"/>
+      <p:pic>
+        <p:nvPicPr>
+          <p:cNvPr id="3" name="Picture 2" descr="LOGO-OCEO.png"/>
+          <p:cNvPicPr>
+            <a:picLocks noChangeAspect="1"/>
+          </p:cNvPicPr>
+          <p:nvPr/>
+        </p:nvPicPr>
+        <p:blipFill>
+          <a:blip r:embed="rId2"/>
+          <a:stretch>
+            <a:fillRect/>
+          </a:stretch>
+        </p:blipFill>
+        <p:spPr>
+          <a:xfrm>
+            <a:off x="868680" y="777240"/>
+            <a:ext cx="2468880" cy="1991869"/>
+          </a:xfrm>
+          <a:prstGeom prst="rect">
+            <a:avLst/>
+          </a:prstGeom>
+        </p:spPr>
+      </p:pic>
+      <p:sp>
+        <p:nvSpPr>
+          <p:cNvPr id="4" name="Rectangle 3"/>
           <p:cNvSpPr/>
           <p:nvPr/>
         </p:nvSpPr>
         <p:spPr>
           <a:xfrm>
-            <a:off x="914400" y="2651760"/>
+            <a:off x="914400" y="3977639"/>
             <a:ext cx="2011680" cy="38100"/>
           </a:xfrm>
           <a:prstGeom prst="rect">
@@ -11046,13 +11280,13 @@
       </p:sp>
       <p:sp>
         <p:nvSpPr>
-          <p:cNvPr id="4" name="TextBox 3"/>
+          <p:cNvPr id="5" name="TextBox 4"/>
           <p:cNvSpPr txBox="1"/>
           <p:nvPr/>
         </p:nvSpPr>
         <p:spPr>
           <a:xfrm>
-            <a:off x="896112" y="2880360"/>
+            <a:off x="896112" y="4206240"/>
             <a:ext cx="10058400" cy="2194560"/>
           </a:xfrm>
           <a:prstGeom prst="rect">
@@ -11136,7 +11370,7 @@
                       </p:stCondLst>
                       <p:childTnLst>
                         <p:par>
-                          <p:cTn id="6" presetID="10" presetClass="entr" presetSubtype="0" fill="hold" grpId="0" nodeType="afterEffect">
+                          <p:cTn id="8" presetID="23" presetClass="entr" presetSubtype="16" fill="hold" grpId="0" nodeType="afterEffect">
                             <p:stCondLst>
                               <p:cond delay="0"/>
                             </p:stCondLst>
@@ -11149,7 +11383,88 @@
                                     </p:stCondLst>
                                   </p:cTn>
                                   <p:tgtEl>
-                                    <p:spTgt spid="4"/>
+                                    <p:spTgt spid="3"/>
+                                  </p:tgtEl>
+                                  <p:attrNameLst>
+                                    <p:attrName>style.visibility</p:attrName>
+                                  </p:attrNameLst>
+                                </p:cBhvr>
+                                <p:to>
+                                  <p:strVal val="visible"/>
+                                </p:to>
+                              </p:set>
+                              <p:anim calcmode="lin" valueType="num">
+                                <p:cBhvr additive="base">
+                                  <p:cTn id="5" dur="600" fill="hold"/>
+                                  <p:tgtEl>
+                                    <p:spTgt spid="3"/>
+                                  </p:tgtEl>
+                                  <p:attrNameLst>
+                                    <p:attrName>ppt_w</p:attrName>
+                                  </p:attrNameLst>
+                                </p:cBhvr>
+                                <p:tavLst>
+                                  <p:tav tm="0">
+                                    <p:val>
+                                      <p:fltVal val="0.3"/>
+                                    </p:val>
+                                  </p:tav>
+                                  <p:tav tm="100000">
+                                    <p:val>
+                                      <p:fltVal val="1"/>
+                                    </p:val>
+                                  </p:tav>
+                                </p:tavLst>
+                              </p:anim>
+                              <p:anim calcmode="lin" valueType="num">
+                                <p:cBhvr additive="base">
+                                  <p:cTn id="6" dur="600" fill="hold"/>
+                                  <p:tgtEl>
+                                    <p:spTgt spid="3"/>
+                                  </p:tgtEl>
+                                  <p:attrNameLst>
+                                    <p:attrName>ppt_h</p:attrName>
+                                  </p:attrNameLst>
+                                </p:cBhvr>
+                                <p:tavLst>
+                                  <p:tav tm="0">
+                                    <p:val>
+                                      <p:fltVal val="0.3"/>
+                                    </p:val>
+                                  </p:tav>
+                                  <p:tav tm="100000">
+                                    <p:val>
+                                      <p:fltVal val="1"/>
+                                    </p:val>
+                                  </p:tav>
+                                </p:tavLst>
+                              </p:anim>
+                              <p:animEffect transition="in" filter="fade">
+                                <p:cBhvr>
+                                  <p:cTn id="7" dur="600"/>
+                                  <p:tgtEl>
+                                    <p:spTgt spid="3"/>
+                                  </p:tgtEl>
+                                </p:cBhvr>
+                              </p:animEffect>
+                            </p:childTnLst>
+                          </p:cTn>
+                        </p:par>
+                        <p:par>
+                          <p:cTn id="11" presetID="10" presetClass="entr" presetSubtype="0" fill="hold" grpId="0" nodeType="afterEffect">
+                            <p:stCondLst>
+                              <p:cond delay="350"/>
+                            </p:stCondLst>
+                            <p:childTnLst>
+                              <p:set>
+                                <p:cBhvr>
+                                  <p:cTn id="9" dur="1" fill="hold">
+                                    <p:stCondLst>
+                                      <p:cond delay="0"/>
+                                    </p:stCondLst>
+                                  </p:cTn>
+                                  <p:tgtEl>
+                                    <p:spTgt spid="5"/>
                                   </p:tgtEl>
                                   <p:attrNameLst>
                                     <p:attrName>style.visibility</p:attrName>
@@ -11161,9 +11476,9 @@
                               </p:set>
                               <p:animEffect transition="in" filter="fade">
                                 <p:cBhvr>
-                                  <p:cTn id="5" dur="400"/>
+                                  <p:cTn id="10" dur="400"/>
                                   <p:tgtEl>
-                                    <p:spTgt spid="4"/>
+                                    <p:spTgt spid="5"/>
                                   </p:tgtEl>
                                 </p:cBhvr>
                               </p:animEffect>
@@ -12202,15 +12517,39 @@
           </a:p>
         </p:txBody>
       </p:sp>
-      <p:sp>
-        <p:nvSpPr>
-          <p:cNvPr id="3" name="Rectangle 2"/>
+      <p:pic>
+        <p:nvPicPr>
+          <p:cNvPr id="3" name="Picture 2" descr="LOGO-OCEO.png"/>
+          <p:cNvPicPr>
+            <a:picLocks noChangeAspect="1"/>
+          </p:cNvPicPr>
+          <p:nvPr/>
+        </p:nvPicPr>
+        <p:blipFill>
+          <a:blip r:embed="rId2"/>
+          <a:stretch>
+            <a:fillRect/>
+          </a:stretch>
+        </p:blipFill>
+        <p:spPr>
+          <a:xfrm>
+            <a:off x="868680" y="777240"/>
+            <a:ext cx="2468880" cy="1991869"/>
+          </a:xfrm>
+          <a:prstGeom prst="rect">
+            <a:avLst/>
+          </a:prstGeom>
+        </p:spPr>
+      </p:pic>
+      <p:sp>
+        <p:nvSpPr>
+          <p:cNvPr id="4" name="Rectangle 3"/>
           <p:cNvSpPr/>
           <p:nvPr/>
         </p:nvSpPr>
         <p:spPr>
           <a:xfrm>
-            <a:off x="914400" y="2651760"/>
+            <a:off x="914400" y="3977639"/>
             <a:ext cx="2011680" cy="38100"/>
           </a:xfrm>
           <a:prstGeom prst="rect">
@@ -12248,13 +12587,13 @@
       </p:sp>
       <p:sp>
         <p:nvSpPr>
-          <p:cNvPr id="4" name="TextBox 3"/>
+          <p:cNvPr id="5" name="TextBox 4"/>
           <p:cNvSpPr txBox="1"/>
           <p:nvPr/>
         </p:nvSpPr>
         <p:spPr>
           <a:xfrm>
-            <a:off x="896112" y="2880360"/>
+            <a:off x="896112" y="4206240"/>
             <a:ext cx="10058400" cy="2194560"/>
           </a:xfrm>
           <a:prstGeom prst="rect">
@@ -12338,7 +12677,7 @@
                       </p:stCondLst>
                       <p:childTnLst>
                         <p:par>
-                          <p:cTn id="6" presetID="10" presetClass="entr" presetSubtype="0" fill="hold" grpId="0" nodeType="afterEffect">
+                          <p:cTn id="8" presetID="23" presetClass="entr" presetSubtype="16" fill="hold" grpId="0" nodeType="afterEffect">
                             <p:stCondLst>
                               <p:cond delay="0"/>
                             </p:stCondLst>
@@ -12351,7 +12690,88 @@
                                     </p:stCondLst>
                                   </p:cTn>
                                   <p:tgtEl>
-                                    <p:spTgt spid="4"/>
+                                    <p:spTgt spid="3"/>
+                                  </p:tgtEl>
+                                  <p:attrNameLst>
+                                    <p:attrName>style.visibility</p:attrName>
+                                  </p:attrNameLst>
+                                </p:cBhvr>
+                                <p:to>
+                                  <p:strVal val="visible"/>
+                                </p:to>
+                              </p:set>
+                              <p:anim calcmode="lin" valueType="num">
+                                <p:cBhvr additive="base">
+                                  <p:cTn id="5" dur="600" fill="hold"/>
+                                  <p:tgtEl>
+                                    <p:spTgt spid="3"/>
+                                  </p:tgtEl>
+                                  <p:attrNameLst>
+                                    <p:attrName>ppt_w</p:attrName>
+                                  </p:attrNameLst>
+                                </p:cBhvr>
+                                <p:tavLst>
+                                  <p:tav tm="0">
+                                    <p:val>
+                                      <p:fltVal val="0.3"/>
+                                    </p:val>
+                                  </p:tav>
+                                  <p:tav tm="100000">
+                                    <p:val>
+                                      <p:fltVal val="1"/>
+                                    </p:val>
+                                  </p:tav>
+                                </p:tavLst>
+                              </p:anim>
+                              <p:anim calcmode="lin" valueType="num">
+                                <p:cBhvr additive="base">
+                                  <p:cTn id="6" dur="600" fill="hold"/>
+                                  <p:tgtEl>
+                                    <p:spTgt spid="3"/>
+                                  </p:tgtEl>
+                                  <p:attrNameLst>
+                                    <p:attrName>ppt_h</p:attrName>
+                                  </p:attrNameLst>
+                                </p:cBhvr>
+                                <p:tavLst>
+                                  <p:tav tm="0">
+                                    <p:val>
+                                      <p:fltVal val="0.3"/>
+                                    </p:val>
+                                  </p:tav>
+                                  <p:tav tm="100000">
+                                    <p:val>
+                                      <p:fltVal val="1"/>
+                                    </p:val>
+                                  </p:tav>
+                                </p:tavLst>
+                              </p:anim>
+                              <p:animEffect transition="in" filter="fade">
+                                <p:cBhvr>
+                                  <p:cTn id="7" dur="600"/>
+                                  <p:tgtEl>
+                                    <p:spTgt spid="3"/>
+                                  </p:tgtEl>
+                                </p:cBhvr>
+                              </p:animEffect>
+                            </p:childTnLst>
+                          </p:cTn>
+                        </p:par>
+                        <p:par>
+                          <p:cTn id="11" presetID="10" presetClass="entr" presetSubtype="0" fill="hold" grpId="0" nodeType="afterEffect">
+                            <p:stCondLst>
+                              <p:cond delay="350"/>
+                            </p:stCondLst>
+                            <p:childTnLst>
+                              <p:set>
+                                <p:cBhvr>
+                                  <p:cTn id="9" dur="1" fill="hold">
+                                    <p:stCondLst>
+                                      <p:cond delay="0"/>
+                                    </p:stCondLst>
+                                  </p:cTn>
+                                  <p:tgtEl>
+                                    <p:spTgt spid="5"/>
                                   </p:tgtEl>
                                   <p:attrNameLst>
                                     <p:attrName>style.visibility</p:attrName>
@@ -12363,9 +12783,9 @@
                               </p:set>
                               <p:animEffect transition="in" filter="fade">
                                 <p:cBhvr>
-                                  <p:cTn id="5" dur="400"/>
+                                  <p:cTn id="10" dur="400"/>
                                   <p:tgtEl>
-                                    <p:spTgt spid="4"/>
+                                    <p:spTgt spid="5"/>
                                   </p:tgtEl>
                                 </p:cBhvr>
                               </p:animEffect>
@@ -14156,15 +14576,39 @@
           </a:p>
         </p:txBody>
       </p:sp>
-      <p:sp>
-        <p:nvSpPr>
-          <p:cNvPr id="3" name="Rectangle 2"/>
+      <p:pic>
+        <p:nvPicPr>
+          <p:cNvPr id="3" name="Picture 2" descr="LOGO-OCEO.png"/>
+          <p:cNvPicPr>
+            <a:picLocks noChangeAspect="1"/>
+          </p:cNvPicPr>
+          <p:nvPr/>
+        </p:nvPicPr>
+        <p:blipFill>
+          <a:blip r:embed="rId2"/>
+          <a:stretch>
+            <a:fillRect/>
+          </a:stretch>
+        </p:blipFill>
+        <p:spPr>
+          <a:xfrm>
+            <a:off x="868680" y="777240"/>
+            <a:ext cx="2468880" cy="1991869"/>
+          </a:xfrm>
+          <a:prstGeom prst="rect">
+            <a:avLst/>
+          </a:prstGeom>
+        </p:spPr>
+      </p:pic>
+      <p:sp>
+        <p:nvSpPr>
+          <p:cNvPr id="4" name="Rectangle 3"/>
           <p:cNvSpPr/>
           <p:nvPr/>
         </p:nvSpPr>
         <p:spPr>
           <a:xfrm>
-            <a:off x="914400" y="2651760"/>
+            <a:off x="914400" y="3977639"/>
             <a:ext cx="2011680" cy="38100"/>
           </a:xfrm>
           <a:prstGeom prst="rect">
@@ -14202,13 +14646,13 @@
       </p:sp>
       <p:sp>
         <p:nvSpPr>
-          <p:cNvPr id="4" name="TextBox 3"/>
+          <p:cNvPr id="5" name="TextBox 4"/>
           <p:cNvSpPr txBox="1"/>
           <p:nvPr/>
         </p:nvSpPr>
         <p:spPr>
           <a:xfrm>
-            <a:off x="896112" y="2880360"/>
+            <a:off x="896112" y="4206240"/>
             <a:ext cx="10058400" cy="2194560"/>
           </a:xfrm>
           <a:prstGeom prst="rect">
@@ -14292,7 +14736,7 @@
                       </p:stCondLst>
                       <p:childTnLst>
                         <p:par>
-                          <p:cTn id="6" presetID="10" presetClass="entr" presetSubtype="0" fill="hold" grpId="0" nodeType="afterEffect">
+                          <p:cTn id="8" presetID="23" presetClass="entr" presetSubtype="16" fill="hold" grpId="0" nodeType="afterEffect">
                             <p:stCondLst>
                               <p:cond delay="0"/>
                             </p:stCondLst>
@@ -14305,7 +14749,88 @@
                                     </p:stCondLst>
                                   </p:cTn>
                                   <p:tgtEl>
-                                    <p:spTgt spid="4"/>
+                                    <p:spTgt spid="3"/>
+                                  </p:tgtEl>
+                                  <p:attrNameLst>
+                                    <p:attrName>style.visibility</p:attrName>
+                                  </p:attrNameLst>
+                                </p:cBhvr>
+                                <p:to>
+                                  <p:strVal val="visible"/>
+                                </p:to>
+                              </p:set>
+                              <p:anim calcmode="lin" valueType="num">
+                                <p:cBhvr additive="base">
+                                  <p:cTn id="5" dur="600" fill="hold"/>
+                                  <p:tgtEl>
+                                    <p:spTgt spid="3"/>
+                                  </p:tgtEl>
+                                  <p:attrNameLst>
+                                    <p:attrName>ppt_w</p:attrName>
+                                  </p:attrNameLst>
+                                </p:cBhvr>
+                                <p:tavLst>
+                                  <p:tav tm="0">
+                                    <p:val>
+                                      <p:fltVal val="0.3"/>
+                                    </p:val>
+                                  </p:tav>
+                                  <p:tav tm="100000">
+                                    <p:val>
+                                      <p:fltVal val="1"/>
+                                    </p:val>
+                                  </p:tav>
+                                </p:tavLst>
+                              </p:anim>
+                              <p:anim calcmode="lin" valueType="num">
+                                <p:cBhvr additive="base">
+                                  <p:cTn id="6" dur="600" fill="hold"/>
+                                  <p:tgtEl>
+                                    <p:spTgt spid="3"/>
+                                  </p:tgtEl>
+                                  <p:attrNameLst>
+                                    <p:attrName>ppt_h</p:attrName>
+                                  </p:attrNameLst>
+                                </p:cBhvr>
+                                <p:tavLst>
+                                  <p:tav tm="0">
+                                    <p:val>
+                                      <p:fltVal val="0.3"/>
+                                    </p:val>
+                                  </p:tav>
+                                  <p:tav tm="100000">
+                                    <p:val>
+                                      <p:fltVal val="1"/>
+                                    </p:val>
+                                  </p:tav>
+                                </p:tavLst>
+                              </p:anim>
+                              <p:animEffect transition="in" filter="fade">
+                                <p:cBhvr>
+                                  <p:cTn id="7" dur="600"/>
+                                  <p:tgtEl>
+                                    <p:spTgt spid="3"/>
+                                  </p:tgtEl>
+                                </p:cBhvr>
+                              </p:animEffect>
+                            </p:childTnLst>
+                          </p:cTn>
+                        </p:par>
+                        <p:par>
+                          <p:cTn id="11" presetID="10" presetClass="entr" presetSubtype="0" fill="hold" grpId="0" nodeType="afterEffect">
+                            <p:stCondLst>
+                              <p:cond delay="350"/>
+                            </p:stCondLst>
+                            <p:childTnLst>
+                              <p:set>
+                                <p:cBhvr>
+                                  <p:cTn id="9" dur="1" fill="hold">
+                                    <p:stCondLst>
+                                      <p:cond delay="0"/>
+                                    </p:stCondLst>
+                                  </p:cTn>
+                                  <p:tgtEl>
+                                    <p:spTgt spid="5"/>
                                   </p:tgtEl>
                                   <p:attrNameLst>
                                     <p:attrName>style.visibility</p:attrName>
@@ -14317,9 +14842,9 @@
                               </p:set>
                               <p:animEffect transition="in" filter="fade">
                                 <p:cBhvr>
-                                  <p:cTn id="5" dur="400"/>
+                                  <p:cTn id="10" dur="400"/>
                                   <p:tgtEl>
-                                    <p:spTgt spid="4"/>
+                                    <p:spTgt spid="5"/>
                                   </p:tgtEl>
                                 </p:cBhvr>
                               </p:animEffect>
